--- a/.ArtFiles/Slides/GameExplenation.pptx
+++ b/.ArtFiles/Slides/GameExplenation.pptx
@@ -7,9 +7,12 @@
   <p:sldIdLst>
     <p:sldId id="257" r:id="rId2"/>
     <p:sldId id="259" r:id="rId3"/>
-    <p:sldId id="260" r:id="rId4"/>
-    <p:sldId id="256" r:id="rId5"/>
-    <p:sldId id="261" r:id="rId6"/>
+    <p:sldId id="262" r:id="rId4"/>
+    <p:sldId id="260" r:id="rId5"/>
+    <p:sldId id="256" r:id="rId6"/>
+    <p:sldId id="263" r:id="rId7"/>
+    <p:sldId id="261" r:id="rId8"/>
+    <p:sldId id="264" r:id="rId9"/>
   </p:sldIdLst>
   <p:sldSz cx="12192000" cy="6858000"/>
   <p:notesSz cx="6858000" cy="9144000"/>
@@ -119,7 +122,7 @@
 <file path=ppt/revisionInfo.xml><?xml version="1.0" encoding="utf-8"?>
 <p1510:revInfo xmlns:a="http://schemas.openxmlformats.org/drawingml/2006/main" xmlns:r="http://schemas.openxmlformats.org/officeDocument/2006/relationships" xmlns:p1510="http://schemas.microsoft.com/office/powerpoint/2015/10/main">
   <p1510:revLst>
-    <p1510:client id="{581F2EE1-DDE8-4C81-8886-E39EC1CD3DCF}" v="69" dt="2023-04-30T18:38:36.529"/>
+    <p1510:client id="{581F2EE1-DDE8-4C81-8886-E39EC1CD3DCF}" v="135" dt="2023-05-01T02:33:32.637"/>
   </p1510:revLst>
 </p1510:revInfo>
 </file>
@@ -129,12 +132,12 @@
   <pc:docChgLst>
     <pc:chgData name="Douwe Ravers" userId="c8d85bf50e360dd6" providerId="LiveId" clId="{581F2EE1-DDE8-4C81-8886-E39EC1CD3DCF}"/>
     <pc:docChg chg="undo custSel addSld delSld modSld sldOrd modMainMaster">
-      <pc:chgData name="Douwe Ravers" userId="c8d85bf50e360dd6" providerId="LiveId" clId="{581F2EE1-DDE8-4C81-8886-E39EC1CD3DCF}" dt="2023-04-30T18:38:37.889" v="1836" actId="1076"/>
+      <pc:chgData name="Douwe Ravers" userId="c8d85bf50e360dd6" providerId="LiveId" clId="{581F2EE1-DDE8-4C81-8886-E39EC1CD3DCF}" dt="2023-05-01T02:35:24.001" v="2720" actId="1076"/>
       <pc:docMkLst>
         <pc:docMk/>
       </pc:docMkLst>
       <pc:sldChg chg="addSp delSp modSp mod ord setBg">
-        <pc:chgData name="Douwe Ravers" userId="c8d85bf50e360dd6" providerId="LiveId" clId="{581F2EE1-DDE8-4C81-8886-E39EC1CD3DCF}" dt="2023-04-30T18:26:05.898" v="1561" actId="478"/>
+        <pc:chgData name="Douwe Ravers" userId="c8d85bf50e360dd6" providerId="LiveId" clId="{581F2EE1-DDE8-4C81-8886-E39EC1CD3DCF}" dt="2023-04-30T22:49:02.792" v="1866"/>
         <pc:sldMkLst>
           <pc:docMk/>
           <pc:sldMk cId="603461540" sldId="256"/>
@@ -203,15 +206,31 @@
             <ac:spMk id="70" creationId="{9574F44D-C879-0215-F12D-589C70E7ED12}"/>
           </ac:spMkLst>
         </pc:spChg>
+        <pc:picChg chg="add del mod">
+          <ac:chgData name="Douwe Ravers" userId="c8d85bf50e360dd6" providerId="LiveId" clId="{581F2EE1-DDE8-4C81-8886-E39EC1CD3DCF}" dt="2023-04-30T22:48:49.986" v="1860" actId="478"/>
+          <ac:picMkLst>
+            <pc:docMk/>
+            <pc:sldMk cId="603461540" sldId="256"/>
+            <ac:picMk id="2" creationId="{ACF4C5E2-F457-65BF-0985-6D215BE6EB3C}"/>
+          </ac:picMkLst>
+        </pc:picChg>
+        <pc:picChg chg="add mod">
+          <ac:chgData name="Douwe Ravers" userId="c8d85bf50e360dd6" providerId="LiveId" clId="{581F2EE1-DDE8-4C81-8886-E39EC1CD3DCF}" dt="2023-04-30T22:49:02.792" v="1866"/>
+          <ac:picMkLst>
+            <pc:docMk/>
+            <pc:sldMk cId="603461540" sldId="256"/>
+            <ac:picMk id="3" creationId="{5B0EF7CB-EF00-FFBB-9328-8C912AAF9E22}"/>
+          </ac:picMkLst>
+        </pc:picChg>
       </pc:sldChg>
       <pc:sldChg chg="addSp delSp modSp new mod">
-        <pc:chgData name="Douwe Ravers" userId="c8d85bf50e360dd6" providerId="LiveId" clId="{581F2EE1-DDE8-4C81-8886-E39EC1CD3DCF}" dt="2023-04-30T17:49:47.386" v="431" actId="1076"/>
+        <pc:chgData name="Douwe Ravers" userId="c8d85bf50e360dd6" providerId="LiveId" clId="{581F2EE1-DDE8-4C81-8886-E39EC1CD3DCF}" dt="2023-04-30T22:48:39.573" v="1857" actId="1076"/>
         <pc:sldMkLst>
           <pc:docMk/>
           <pc:sldMk cId="343596358" sldId="257"/>
         </pc:sldMkLst>
-        <pc:spChg chg="mod">
-          <ac:chgData name="Douwe Ravers" userId="c8d85bf50e360dd6" providerId="LiveId" clId="{581F2EE1-DDE8-4C81-8886-E39EC1CD3DCF}" dt="2023-04-30T17:45:27.216" v="123" actId="207"/>
+        <pc:spChg chg="del mod">
+          <ac:chgData name="Douwe Ravers" userId="c8d85bf50e360dd6" providerId="LiveId" clId="{581F2EE1-DDE8-4C81-8886-E39EC1CD3DCF}" dt="2023-04-30T22:47:39.240" v="1840" actId="478"/>
           <ac:spMkLst>
             <pc:docMk/>
             <pc:sldMk cId="343596358" sldId="257"/>
@@ -234,6 +253,14 @@
             <ac:spMk id="6" creationId="{2AF2B410-4DC0-96E6-C33A-579BA68F535C}"/>
           </ac:spMkLst>
         </pc:spChg>
+        <pc:spChg chg="add del mod">
+          <ac:chgData name="Douwe Ravers" userId="c8d85bf50e360dd6" providerId="LiveId" clId="{581F2EE1-DDE8-4C81-8886-E39EC1CD3DCF}" dt="2023-04-30T22:47:49.061" v="1843" actId="478"/>
+          <ac:spMkLst>
+            <pc:docMk/>
+            <pc:sldMk cId="343596358" sldId="257"/>
+            <ac:spMk id="9" creationId="{79B56AF9-8B9D-9065-B4BD-84AFBE4F0AF0}"/>
+          </ac:spMkLst>
+        </pc:spChg>
         <pc:spChg chg="add mod">
           <ac:chgData name="Douwe Ravers" userId="c8d85bf50e360dd6" providerId="LiveId" clId="{581F2EE1-DDE8-4C81-8886-E39EC1CD3DCF}" dt="2023-04-30T17:45:37.866" v="125" actId="1076"/>
           <ac:spMkLst>
@@ -275,6 +302,14 @@
           </ac:spMkLst>
         </pc:spChg>
         <pc:picChg chg="add mod">
+          <ac:chgData name="Douwe Ravers" userId="c8d85bf50e360dd6" providerId="LiveId" clId="{581F2EE1-DDE8-4C81-8886-E39EC1CD3DCF}" dt="2023-04-30T22:47:47.221" v="1842" actId="1076"/>
+          <ac:picMkLst>
+            <pc:docMk/>
+            <pc:sldMk cId="343596358" sldId="257"/>
+            <ac:picMk id="4" creationId="{74427DB3-499E-1A89-2A22-96AC84760185}"/>
+          </ac:picMkLst>
+        </pc:picChg>
+        <pc:picChg chg="add mod">
           <ac:chgData name="Douwe Ravers" userId="c8d85bf50e360dd6" providerId="LiveId" clId="{581F2EE1-DDE8-4C81-8886-E39EC1CD3DCF}" dt="2023-04-30T17:41:19.606" v="20" actId="1076"/>
           <ac:picMkLst>
             <pc:docMk/>
@@ -304,6 +339,14 @@
             <pc:docMk/>
             <pc:sldMk cId="343596358" sldId="257"/>
             <ac:picMk id="15" creationId="{A781DDCB-26D2-26AA-BAE4-EA03760158E0}"/>
+          </ac:picMkLst>
+        </pc:picChg>
+        <pc:picChg chg="add mod">
+          <ac:chgData name="Douwe Ravers" userId="c8d85bf50e360dd6" providerId="LiveId" clId="{581F2EE1-DDE8-4C81-8886-E39EC1CD3DCF}" dt="2023-04-30T22:48:39.573" v="1857" actId="1076"/>
+          <ac:picMkLst>
+            <pc:docMk/>
+            <pc:sldMk cId="343596358" sldId="257"/>
+            <ac:picMk id="17" creationId="{B773132E-8259-5D60-8871-3A32AAD3770F}"/>
           </ac:picMkLst>
         </pc:picChg>
       </pc:sldChg>
@@ -419,7 +462,7 @@
         </pc:picChg>
       </pc:sldChg>
       <pc:sldChg chg="addSp delSp modSp add mod">
-        <pc:chgData name="Douwe Ravers" userId="c8d85bf50e360dd6" providerId="LiveId" clId="{581F2EE1-DDE8-4C81-8886-E39EC1CD3DCF}" dt="2023-04-30T18:05:25.179" v="983" actId="20577"/>
+        <pc:chgData name="Douwe Ravers" userId="c8d85bf50e360dd6" providerId="LiveId" clId="{581F2EE1-DDE8-4C81-8886-E39EC1CD3DCF}" dt="2023-05-01T02:05:28.289" v="1957" actId="20577"/>
         <pc:sldMkLst>
           <pc:docMk/>
           <pc:sldMk cId="2628760162" sldId="259"/>
@@ -448,6 +491,14 @@
             <ac:spMk id="4" creationId="{3677E704-7EC9-C76C-F4C7-C3FA3861531F}"/>
           </ac:spMkLst>
         </pc:spChg>
+        <pc:spChg chg="add mod">
+          <ac:chgData name="Douwe Ravers" userId="c8d85bf50e360dd6" providerId="LiveId" clId="{581F2EE1-DDE8-4C81-8886-E39EC1CD3DCF}" dt="2023-05-01T02:05:28.289" v="1957" actId="20577"/>
+          <ac:spMkLst>
+            <pc:docMk/>
+            <pc:sldMk cId="2628760162" sldId="259"/>
+            <ac:spMk id="5" creationId="{417C88E7-183E-F4DB-7BB0-4099CF3D538A}"/>
+          </ac:spMkLst>
+        </pc:spChg>
         <pc:spChg chg="del">
           <ac:chgData name="Douwe Ravers" userId="c8d85bf50e360dd6" providerId="LiveId" clId="{581F2EE1-DDE8-4C81-8886-E39EC1CD3DCF}" dt="2023-04-30T17:50:21.351" v="442" actId="478"/>
           <ac:spMkLst>
@@ -584,6 +635,22 @@
             <ac:grpSpMk id="36" creationId="{30512300-A14C-2060-0DC1-9130EA75E369}"/>
           </ac:grpSpMkLst>
         </pc:grpChg>
+        <pc:picChg chg="add del mod">
+          <ac:chgData name="Douwe Ravers" userId="c8d85bf50e360dd6" providerId="LiveId" clId="{581F2EE1-DDE8-4C81-8886-E39EC1CD3DCF}" dt="2023-04-30T22:48:11.671" v="1849" actId="21"/>
+          <ac:picMkLst>
+            <pc:docMk/>
+            <pc:sldMk cId="2628760162" sldId="259"/>
+            <ac:picMk id="4" creationId="{7AF531EB-56CE-BECA-7A72-E77D6F535126}"/>
+          </ac:picMkLst>
+        </pc:picChg>
+        <pc:picChg chg="add mod">
+          <ac:chgData name="Douwe Ravers" userId="c8d85bf50e360dd6" providerId="LiveId" clId="{581F2EE1-DDE8-4C81-8886-E39EC1CD3DCF}" dt="2023-05-01T02:04:53.790" v="1870" actId="1076"/>
+          <ac:picMkLst>
+            <pc:docMk/>
+            <pc:sldMk cId="2628760162" sldId="259"/>
+            <ac:picMk id="4" creationId="{C5B7A151-0943-9407-8E7E-F275595CD0C2}"/>
+          </ac:picMkLst>
+        </pc:picChg>
         <pc:picChg chg="del mod">
           <ac:chgData name="Douwe Ravers" userId="c8d85bf50e360dd6" providerId="LiveId" clId="{581F2EE1-DDE8-4C81-8886-E39EC1CD3DCF}" dt="2023-04-30T17:51:58.558" v="459" actId="478"/>
           <ac:picMkLst>
@@ -592,6 +659,30 @@
             <ac:picMk id="5" creationId="{5D5A22C7-8F08-1AFB-BC06-294B5A5E7184}"/>
           </ac:picMkLst>
         </pc:picChg>
+        <pc:picChg chg="add del mod">
+          <ac:chgData name="Douwe Ravers" userId="c8d85bf50e360dd6" providerId="LiveId" clId="{581F2EE1-DDE8-4C81-8886-E39EC1CD3DCF}" dt="2023-04-30T22:48:43.298" v="1858" actId="478"/>
+          <ac:picMkLst>
+            <pc:docMk/>
+            <pc:sldMk cId="2628760162" sldId="259"/>
+            <ac:picMk id="5" creationId="{A02B9D10-A44E-6A94-638E-51C3F871D2D0}"/>
+          </ac:picMkLst>
+        </pc:picChg>
+        <pc:picChg chg="add mod">
+          <ac:chgData name="Douwe Ravers" userId="c8d85bf50e360dd6" providerId="LiveId" clId="{581F2EE1-DDE8-4C81-8886-E39EC1CD3DCF}" dt="2023-04-30T22:48:57.752" v="1862"/>
+          <ac:picMkLst>
+            <pc:docMk/>
+            <pc:sldMk cId="2628760162" sldId="259"/>
+            <ac:picMk id="6" creationId="{5FC0299F-22C8-9EB0-C955-9DF0E24113FB}"/>
+          </ac:picMkLst>
+        </pc:picChg>
+        <pc:picChg chg="add del mod">
+          <ac:chgData name="Douwe Ravers" userId="c8d85bf50e360dd6" providerId="LiveId" clId="{581F2EE1-DDE8-4C81-8886-E39EC1CD3DCF}" dt="2023-04-30T22:48:59.189" v="1864"/>
+          <ac:picMkLst>
+            <pc:docMk/>
+            <pc:sldMk cId="2628760162" sldId="259"/>
+            <ac:picMk id="7" creationId="{6515638D-1A3E-0BA1-3C2D-9CD40B990CAF}"/>
+          </ac:picMkLst>
+        </pc:picChg>
         <pc:picChg chg="del">
           <ac:chgData name="Douwe Ravers" userId="c8d85bf50e360dd6" providerId="LiveId" clId="{581F2EE1-DDE8-4C81-8886-E39EC1CD3DCF}" dt="2023-04-30T17:50:59.270" v="445" actId="478"/>
           <ac:picMkLst>
@@ -730,7 +821,7 @@
         </pc:picChg>
       </pc:sldChg>
       <pc:sldChg chg="addSp delSp modSp add mod">
-        <pc:chgData name="Douwe Ravers" userId="c8d85bf50e360dd6" providerId="LiveId" clId="{581F2EE1-DDE8-4C81-8886-E39EC1CD3DCF}" dt="2023-04-30T18:17:20.230" v="1480"/>
+        <pc:chgData name="Douwe Ravers" userId="c8d85bf50e360dd6" providerId="LiveId" clId="{581F2EE1-DDE8-4C81-8886-E39EC1CD3DCF}" dt="2023-05-01T02:18:38.811" v="2187" actId="1076"/>
         <pc:sldMkLst>
           <pc:docMk/>
           <pc:sldMk cId="47746131" sldId="260"/>
@@ -815,6 +906,30 @@
             <ac:spMk id="13" creationId="{8DFA6E7F-ED1F-C734-B48E-EFDFF2B06868}"/>
           </ac:spMkLst>
         </pc:spChg>
+        <pc:spChg chg="mod">
+          <ac:chgData name="Douwe Ravers" userId="c8d85bf50e360dd6" providerId="LiveId" clId="{581F2EE1-DDE8-4C81-8886-E39EC1CD3DCF}" dt="2023-05-01T02:17:34.877" v="2166"/>
+          <ac:spMkLst>
+            <pc:docMk/>
+            <pc:sldMk cId="47746131" sldId="260"/>
+            <ac:spMk id="14" creationId="{D2A01DE4-9F17-E472-B66D-ECFB59D3318D}"/>
+          </ac:spMkLst>
+        </pc:spChg>
+        <pc:spChg chg="mod">
+          <ac:chgData name="Douwe Ravers" userId="c8d85bf50e360dd6" providerId="LiveId" clId="{581F2EE1-DDE8-4C81-8886-E39EC1CD3DCF}" dt="2023-05-01T02:17:40.377" v="2170" actId="20577"/>
+          <ac:spMkLst>
+            <pc:docMk/>
+            <pc:sldMk cId="47746131" sldId="260"/>
+            <ac:spMk id="16" creationId="{6C3AD5C3-E692-8966-2894-18C83A2D2682}"/>
+          </ac:spMkLst>
+        </pc:spChg>
+        <pc:spChg chg="add mod">
+          <ac:chgData name="Douwe Ravers" userId="c8d85bf50e360dd6" providerId="LiveId" clId="{581F2EE1-DDE8-4C81-8886-E39EC1CD3DCF}" dt="2023-05-01T02:18:38.811" v="2187" actId="1076"/>
+          <ac:spMkLst>
+            <pc:docMk/>
+            <pc:sldMk cId="47746131" sldId="260"/>
+            <ac:spMk id="17" creationId="{FD35058F-AB2E-9072-2CD0-0B48CBCE9EDD}"/>
+          </ac:spMkLst>
+        </pc:spChg>
         <pc:spChg chg="del">
           <ac:chgData name="Douwe Ravers" userId="c8d85bf50e360dd6" providerId="LiveId" clId="{581F2EE1-DDE8-4C81-8886-E39EC1CD3DCF}" dt="2023-04-30T18:05:37.098" v="985" actId="478"/>
           <ac:spMkLst>
@@ -911,6 +1026,14 @@
             <ac:spMk id="47" creationId="{79B4B6F4-4AE2-2843-9E80-670710CD4FB4}"/>
           </ac:spMkLst>
         </pc:spChg>
+        <pc:grpChg chg="add mod">
+          <ac:chgData name="Douwe Ravers" userId="c8d85bf50e360dd6" providerId="LiveId" clId="{581F2EE1-DDE8-4C81-8886-E39EC1CD3DCF}" dt="2023-05-01T02:18:34.509" v="2186" actId="1076"/>
+          <ac:grpSpMkLst>
+            <pc:docMk/>
+            <pc:sldMk cId="47746131" sldId="260"/>
+            <ac:grpSpMk id="3" creationId="{02ADE3CF-1B8D-DC4C-6DAE-82214797D87F}"/>
+          </ac:grpSpMkLst>
+        </pc:grpChg>
         <pc:grpChg chg="del">
           <ac:chgData name="Douwe Ravers" userId="c8d85bf50e360dd6" providerId="LiveId" clId="{581F2EE1-DDE8-4C81-8886-E39EC1CD3DCF}" dt="2023-04-30T18:05:37.098" v="985" actId="478"/>
           <ac:grpSpMkLst>
@@ -919,6 +1042,22 @@
             <ac:grpSpMk id="36" creationId="{30512300-A14C-2060-0DC1-9130EA75E369}"/>
           </ac:grpSpMkLst>
         </pc:grpChg>
+        <pc:picChg chg="add del mod">
+          <ac:chgData name="Douwe Ravers" userId="c8d85bf50e360dd6" providerId="LiveId" clId="{581F2EE1-DDE8-4C81-8886-E39EC1CD3DCF}" dt="2023-04-30T22:48:46.682" v="1859" actId="478"/>
+          <ac:picMkLst>
+            <pc:docMk/>
+            <pc:sldMk cId="47746131" sldId="260"/>
+            <ac:picMk id="3" creationId="{F5D44884-048B-099F-8201-00691D1E697E}"/>
+          </ac:picMkLst>
+        </pc:picChg>
+        <pc:picChg chg="add mod">
+          <ac:chgData name="Douwe Ravers" userId="c8d85bf50e360dd6" providerId="LiveId" clId="{581F2EE1-DDE8-4C81-8886-E39EC1CD3DCF}" dt="2023-04-30T22:49:01.567" v="1865"/>
+          <ac:picMkLst>
+            <pc:docMk/>
+            <pc:sldMk cId="47746131" sldId="260"/>
+            <ac:picMk id="4" creationId="{86D37864-7E09-EAD9-4F60-363B1348FEB4}"/>
+          </ac:picMkLst>
+        </pc:picChg>
         <pc:picChg chg="add mod ord">
           <ac:chgData name="Douwe Ravers" userId="c8d85bf50e360dd6" providerId="LiveId" clId="{581F2EE1-DDE8-4C81-8886-E39EC1CD3DCF}" dt="2023-04-30T18:12:08.953" v="1264" actId="171"/>
           <ac:picMkLst>
@@ -1025,7 +1164,7 @@
         </pc:cxnChg>
       </pc:sldChg>
       <pc:sldChg chg="addSp delSp modSp add mod">
-        <pc:chgData name="Douwe Ravers" userId="c8d85bf50e360dd6" providerId="LiveId" clId="{581F2EE1-DDE8-4C81-8886-E39EC1CD3DCF}" dt="2023-04-30T18:38:37.889" v="1836" actId="1076"/>
+        <pc:chgData name="Douwe Ravers" userId="c8d85bf50e360dd6" providerId="LiveId" clId="{581F2EE1-DDE8-4C81-8886-E39EC1CD3DCF}" dt="2023-05-01T02:35:24.001" v="2720" actId="1076"/>
         <pc:sldMkLst>
           <pc:docMk/>
           <pc:sldMk cId="1128374672" sldId="261"/>
@@ -1039,47 +1178,47 @@
           </ac:spMkLst>
         </pc:spChg>
         <pc:spChg chg="mod">
-          <ac:chgData name="Douwe Ravers" userId="c8d85bf50e360dd6" providerId="LiveId" clId="{581F2EE1-DDE8-4C81-8886-E39EC1CD3DCF}" dt="2023-04-30T18:24:33.342" v="1538" actId="20577"/>
+          <ac:chgData name="Douwe Ravers" userId="c8d85bf50e360dd6" providerId="LiveId" clId="{581F2EE1-DDE8-4C81-8886-E39EC1CD3DCF}" dt="2023-05-01T02:20:24.644" v="2234" actId="20577"/>
           <ac:spMkLst>
             <pc:docMk/>
             <pc:sldMk cId="1128374672" sldId="261"/>
             <ac:spMk id="11" creationId="{13A726F4-4F1A-0E43-5DDB-DF59D3337A06}"/>
           </ac:spMkLst>
         </pc:spChg>
-        <pc:spChg chg="add mod">
-          <ac:chgData name="Douwe Ravers" userId="c8d85bf50e360dd6" providerId="LiveId" clId="{581F2EE1-DDE8-4C81-8886-E39EC1CD3DCF}" dt="2023-04-30T18:27:32.293" v="1577" actId="13822"/>
+        <pc:spChg chg="add del mod">
+          <ac:chgData name="Douwe Ravers" userId="c8d85bf50e360dd6" providerId="LiveId" clId="{581F2EE1-DDE8-4C81-8886-E39EC1CD3DCF}" dt="2023-05-01T02:20:56.443" v="2235" actId="478"/>
           <ac:spMkLst>
             <pc:docMk/>
             <pc:sldMk cId="1128374672" sldId="261"/>
             <ac:spMk id="12" creationId="{43B66A1A-1E52-F235-C98B-C2FCA32819C6}"/>
           </ac:spMkLst>
         </pc:spChg>
-        <pc:spChg chg="add mod ord">
-          <ac:chgData name="Douwe Ravers" userId="c8d85bf50e360dd6" providerId="LiveId" clId="{581F2EE1-DDE8-4C81-8886-E39EC1CD3DCF}" dt="2023-04-30T18:32:19.582" v="1691" actId="166"/>
+        <pc:spChg chg="add del mod ord">
+          <ac:chgData name="Douwe Ravers" userId="c8d85bf50e360dd6" providerId="LiveId" clId="{581F2EE1-DDE8-4C81-8886-E39EC1CD3DCF}" dt="2023-05-01T02:20:56.443" v="2235" actId="478"/>
           <ac:spMkLst>
             <pc:docMk/>
             <pc:sldMk cId="1128374672" sldId="261"/>
             <ac:spMk id="13" creationId="{64677852-DDD3-D551-E68E-9A9218676E87}"/>
           </ac:spMkLst>
         </pc:spChg>
-        <pc:spChg chg="add mod">
-          <ac:chgData name="Douwe Ravers" userId="c8d85bf50e360dd6" providerId="LiveId" clId="{581F2EE1-DDE8-4C81-8886-E39EC1CD3DCF}" dt="2023-04-30T18:28:25.320" v="1600" actId="1076"/>
+        <pc:spChg chg="add del mod">
+          <ac:chgData name="Douwe Ravers" userId="c8d85bf50e360dd6" providerId="LiveId" clId="{581F2EE1-DDE8-4C81-8886-E39EC1CD3DCF}" dt="2023-05-01T02:20:56.443" v="2235" actId="478"/>
           <ac:spMkLst>
             <pc:docMk/>
             <pc:sldMk cId="1128374672" sldId="261"/>
             <ac:spMk id="16" creationId="{3F3DD1B3-A258-09E7-BD25-DC226463AB84}"/>
           </ac:spMkLst>
         </pc:spChg>
-        <pc:spChg chg="add mod">
-          <ac:chgData name="Douwe Ravers" userId="c8d85bf50e360dd6" providerId="LiveId" clId="{581F2EE1-DDE8-4C81-8886-E39EC1CD3DCF}" dt="2023-04-30T18:34:42.042" v="1775" actId="1076"/>
+        <pc:spChg chg="add del mod">
+          <ac:chgData name="Douwe Ravers" userId="c8d85bf50e360dd6" providerId="LiveId" clId="{581F2EE1-DDE8-4C81-8886-E39EC1CD3DCF}" dt="2023-05-01T02:20:56.443" v="2235" actId="478"/>
           <ac:spMkLst>
             <pc:docMk/>
             <pc:sldMk cId="1128374672" sldId="261"/>
             <ac:spMk id="20" creationId="{1E2E4E05-0086-E50E-B082-D62B29B550FA}"/>
           </ac:spMkLst>
         </pc:spChg>
-        <pc:spChg chg="add mod">
-          <ac:chgData name="Douwe Ravers" userId="c8d85bf50e360dd6" providerId="LiveId" clId="{581F2EE1-DDE8-4C81-8886-E39EC1CD3DCF}" dt="2023-04-30T18:35:05.571" v="1788" actId="20577"/>
+        <pc:spChg chg="add del mod">
+          <ac:chgData name="Douwe Ravers" userId="c8d85bf50e360dd6" providerId="LiveId" clId="{581F2EE1-DDE8-4C81-8886-E39EC1CD3DCF}" dt="2023-05-01T02:20:56.443" v="2235" actId="478"/>
           <ac:spMkLst>
             <pc:docMk/>
             <pc:sldMk cId="1128374672" sldId="261"/>
@@ -1094,8 +1233,8 @@
             <ac:spMk id="25" creationId="{4F5DCD47-99BC-BD6F-28FC-57289963C0C6}"/>
           </ac:spMkLst>
         </pc:spChg>
-        <pc:spChg chg="add mod">
-          <ac:chgData name="Douwe Ravers" userId="c8d85bf50e360dd6" providerId="LiveId" clId="{581F2EE1-DDE8-4C81-8886-E39EC1CD3DCF}" dt="2023-04-30T18:34:50.131" v="1777" actId="1076"/>
+        <pc:spChg chg="add del mod">
+          <ac:chgData name="Douwe Ravers" userId="c8d85bf50e360dd6" providerId="LiveId" clId="{581F2EE1-DDE8-4C81-8886-E39EC1CD3DCF}" dt="2023-05-01T02:20:56.443" v="2235" actId="478"/>
           <ac:spMkLst>
             <pc:docMk/>
             <pc:sldMk cId="1128374672" sldId="261"/>
@@ -1103,15 +1242,23 @@
           </ac:spMkLst>
         </pc:spChg>
         <pc:spChg chg="add mod">
-          <ac:chgData name="Douwe Ravers" userId="c8d85bf50e360dd6" providerId="LiveId" clId="{581F2EE1-DDE8-4C81-8886-E39EC1CD3DCF}" dt="2023-04-30T18:36:55.161" v="1801" actId="1076"/>
+          <ac:chgData name="Douwe Ravers" userId="c8d85bf50e360dd6" providerId="LiveId" clId="{581F2EE1-DDE8-4C81-8886-E39EC1CD3DCF}" dt="2023-05-01T02:21:47.746" v="2254" actId="20577"/>
+          <ac:spMkLst>
+            <pc:docMk/>
+            <pc:sldMk cId="1128374672" sldId="261"/>
+            <ac:spMk id="28" creationId="{56F32BB4-0588-9479-87F5-A94FC57CE143}"/>
+          </ac:spMkLst>
+        </pc:spChg>
+        <pc:spChg chg="add del mod">
+          <ac:chgData name="Douwe Ravers" userId="c8d85bf50e360dd6" providerId="LiveId" clId="{581F2EE1-DDE8-4C81-8886-E39EC1CD3DCF}" dt="2023-05-01T02:20:56.443" v="2235" actId="478"/>
           <ac:spMkLst>
             <pc:docMk/>
             <pc:sldMk cId="1128374672" sldId="261"/>
             <ac:spMk id="30" creationId="{8482BA6E-1534-A46E-6B31-14458E461318}"/>
           </ac:spMkLst>
         </pc:spChg>
-        <pc:spChg chg="add mod">
-          <ac:chgData name="Douwe Ravers" userId="c8d85bf50e360dd6" providerId="LiveId" clId="{581F2EE1-DDE8-4C81-8886-E39EC1CD3DCF}" dt="2023-04-30T18:37:29.784" v="1816" actId="14100"/>
+        <pc:spChg chg="add del mod">
+          <ac:chgData name="Douwe Ravers" userId="c8d85bf50e360dd6" providerId="LiveId" clId="{581F2EE1-DDE8-4C81-8886-E39EC1CD3DCF}" dt="2023-05-01T02:20:56.443" v="2235" actId="478"/>
           <ac:spMkLst>
             <pc:docMk/>
             <pc:sldMk cId="1128374672" sldId="261"/>
@@ -1126,14 +1273,38 @@
             <ac:spMk id="33" creationId="{258AEF8C-056C-4B2A-2083-80154B4166D5}"/>
           </ac:spMkLst>
         </pc:spChg>
-        <pc:spChg chg="add mod">
-          <ac:chgData name="Douwe Ravers" userId="c8d85bf50e360dd6" providerId="LiveId" clId="{581F2EE1-DDE8-4C81-8886-E39EC1CD3DCF}" dt="2023-04-30T18:38:04.501" v="1829" actId="20577"/>
+        <pc:spChg chg="add del mod">
+          <ac:chgData name="Douwe Ravers" userId="c8d85bf50e360dd6" providerId="LiveId" clId="{581F2EE1-DDE8-4C81-8886-E39EC1CD3DCF}" dt="2023-05-01T02:20:56.443" v="2235" actId="478"/>
           <ac:spMkLst>
             <pc:docMk/>
             <pc:sldMk cId="1128374672" sldId="261"/>
             <ac:spMk id="34" creationId="{9FA48EC5-D67A-62CE-6259-0A14FC4F758F}"/>
           </ac:spMkLst>
         </pc:spChg>
+        <pc:spChg chg="add mod">
+          <ac:chgData name="Douwe Ravers" userId="c8d85bf50e360dd6" providerId="LiveId" clId="{581F2EE1-DDE8-4C81-8886-E39EC1CD3DCF}" dt="2023-05-01T02:34:49.032" v="2706" actId="1076"/>
+          <ac:spMkLst>
+            <pc:docMk/>
+            <pc:sldMk cId="1128374672" sldId="261"/>
+            <ac:spMk id="40" creationId="{0F952BF5-8A32-C9CE-4E04-012F7D549246}"/>
+          </ac:spMkLst>
+        </pc:spChg>
+        <pc:spChg chg="add mod">
+          <ac:chgData name="Douwe Ravers" userId="c8d85bf50e360dd6" providerId="LiveId" clId="{581F2EE1-DDE8-4C81-8886-E39EC1CD3DCF}" dt="2023-05-01T02:35:24.001" v="2720" actId="1076"/>
+          <ac:spMkLst>
+            <pc:docMk/>
+            <pc:sldMk cId="1128374672" sldId="261"/>
+            <ac:spMk id="43" creationId="{11A47190-729D-5173-D8F2-D8C7B3148A15}"/>
+          </ac:spMkLst>
+        </pc:spChg>
+        <pc:spChg chg="add mod">
+          <ac:chgData name="Douwe Ravers" userId="c8d85bf50e360dd6" providerId="LiveId" clId="{581F2EE1-DDE8-4C81-8886-E39EC1CD3DCF}" dt="2023-05-01T02:35:09.117" v="2714" actId="1076"/>
+          <ac:spMkLst>
+            <pc:docMk/>
+            <pc:sldMk cId="1128374672" sldId="261"/>
+            <ac:spMk id="45" creationId="{104A2BE1-4377-9F5D-6BC7-CA4206DD0B9F}"/>
+          </ac:spMkLst>
+        </pc:spChg>
         <pc:spChg chg="del">
           <ac:chgData name="Douwe Ravers" userId="c8d85bf50e360dd6" providerId="LiveId" clId="{581F2EE1-DDE8-4C81-8886-E39EC1CD3DCF}" dt="2023-04-30T18:26:12.074" v="1562" actId="478"/>
           <ac:spMkLst>
@@ -1182,14 +1353,30 @@
             <ac:spMk id="70" creationId="{9574F44D-C879-0215-F12D-589C70E7ED12}"/>
           </ac:spMkLst>
         </pc:spChg>
-        <pc:picChg chg="add mod">
-          <ac:chgData name="Douwe Ravers" userId="c8d85bf50e360dd6" providerId="LiveId" clId="{581F2EE1-DDE8-4C81-8886-E39EC1CD3DCF}" dt="2023-04-30T18:26:01.230" v="1560" actId="1076"/>
+        <pc:picChg chg="add del mod">
+          <ac:chgData name="Douwe Ravers" userId="c8d85bf50e360dd6" providerId="LiveId" clId="{581F2EE1-DDE8-4C81-8886-E39EC1CD3DCF}" dt="2023-04-30T22:48:53.362" v="1861" actId="478"/>
+          <ac:picMkLst>
+            <pc:docMk/>
+            <pc:sldMk cId="1128374672" sldId="261"/>
+            <ac:picMk id="2" creationId="{916D2A8F-216E-F0E7-5CA6-CA7793991A96}"/>
+          </ac:picMkLst>
+        </pc:picChg>
+        <pc:picChg chg="add del mod">
+          <ac:chgData name="Douwe Ravers" userId="c8d85bf50e360dd6" providerId="LiveId" clId="{581F2EE1-DDE8-4C81-8886-E39EC1CD3DCF}" dt="2023-05-01T02:20:56.443" v="2235" actId="478"/>
           <ac:picMkLst>
             <pc:docMk/>
             <pc:sldMk cId="1128374672" sldId="261"/>
             <ac:picMk id="3" creationId="{DB24A937-2A5C-0E97-5346-8441C55CEE65}"/>
           </ac:picMkLst>
         </pc:picChg>
+        <pc:picChg chg="add mod">
+          <ac:chgData name="Douwe Ravers" userId="c8d85bf50e360dd6" providerId="LiveId" clId="{581F2EE1-DDE8-4C81-8886-E39EC1CD3DCF}" dt="2023-04-30T22:49:03.639" v="1867"/>
+          <ac:picMkLst>
+            <pc:docMk/>
+            <pc:sldMk cId="1128374672" sldId="261"/>
+            <ac:picMk id="4" creationId="{95B6D3C2-2209-11E4-54A1-3DB5F7AC3722}"/>
+          </ac:picMkLst>
+        </pc:picChg>
         <pc:picChg chg="del">
           <ac:chgData name="Douwe Ravers" userId="c8d85bf50e360dd6" providerId="LiveId" clId="{581F2EE1-DDE8-4C81-8886-E39EC1CD3DCF}" dt="2023-04-30T18:26:20.378" v="1563" actId="478"/>
           <ac:picMkLst>
@@ -1199,23 +1386,31 @@
           </ac:picMkLst>
         </pc:picChg>
         <pc:picChg chg="add mod">
-          <ac:chgData name="Douwe Ravers" userId="c8d85bf50e360dd6" providerId="LiveId" clId="{581F2EE1-DDE8-4C81-8886-E39EC1CD3DCF}" dt="2023-04-30T18:25:55.383" v="1557" actId="1076"/>
+          <ac:chgData name="Douwe Ravers" userId="c8d85bf50e360dd6" providerId="LiveId" clId="{581F2EE1-DDE8-4C81-8886-E39EC1CD3DCF}" dt="2023-05-01T02:21:17.212" v="2244" actId="1076"/>
+          <ac:picMkLst>
+            <pc:docMk/>
+            <pc:sldMk cId="1128374672" sldId="261"/>
+            <ac:picMk id="5" creationId="{76A748E9-8F3C-64D1-C33F-FB15325BB823}"/>
+          </ac:picMkLst>
+        </pc:picChg>
+        <pc:picChg chg="add del mod">
+          <ac:chgData name="Douwe Ravers" userId="c8d85bf50e360dd6" providerId="LiveId" clId="{581F2EE1-DDE8-4C81-8886-E39EC1CD3DCF}" dt="2023-05-01T02:20:56.443" v="2235" actId="478"/>
           <ac:picMkLst>
             <pc:docMk/>
             <pc:sldMk cId="1128374672" sldId="261"/>
             <ac:picMk id="6" creationId="{D1FF5F0A-AD35-2A8F-29B6-BFC594322DBA}"/>
           </ac:picMkLst>
         </pc:picChg>
-        <pc:picChg chg="add mod">
-          <ac:chgData name="Douwe Ravers" userId="c8d85bf50e360dd6" providerId="LiveId" clId="{581F2EE1-DDE8-4C81-8886-E39EC1CD3DCF}" dt="2023-04-30T18:25:51.680" v="1556" actId="1076"/>
+        <pc:picChg chg="add del mod">
+          <ac:chgData name="Douwe Ravers" userId="c8d85bf50e360dd6" providerId="LiveId" clId="{581F2EE1-DDE8-4C81-8886-E39EC1CD3DCF}" dt="2023-05-01T02:20:56.443" v="2235" actId="478"/>
           <ac:picMkLst>
             <pc:docMk/>
             <pc:sldMk cId="1128374672" sldId="261"/>
             <ac:picMk id="8" creationId="{76CD83DF-A6C8-E58F-6B72-92A4F089205A}"/>
           </ac:picMkLst>
         </pc:picChg>
-        <pc:picChg chg="add mod ord">
-          <ac:chgData name="Douwe Ravers" userId="c8d85bf50e360dd6" providerId="LiveId" clId="{581F2EE1-DDE8-4C81-8886-E39EC1CD3DCF}" dt="2023-04-30T18:28:32.206" v="1602" actId="1076"/>
+        <pc:picChg chg="add del mod ord">
+          <ac:chgData name="Douwe Ravers" userId="c8d85bf50e360dd6" providerId="LiveId" clId="{581F2EE1-DDE8-4C81-8886-E39EC1CD3DCF}" dt="2023-05-01T02:20:56.443" v="2235" actId="478"/>
           <ac:picMkLst>
             <pc:docMk/>
             <pc:sldMk cId="1128374672" sldId="261"/>
@@ -1223,55 +1418,71 @@
           </ac:picMkLst>
         </pc:picChg>
         <pc:picChg chg="add mod">
-          <ac:chgData name="Douwe Ravers" userId="c8d85bf50e360dd6" providerId="LiveId" clId="{581F2EE1-DDE8-4C81-8886-E39EC1CD3DCF}" dt="2023-04-30T18:28:14.734" v="1597" actId="1076"/>
+          <ac:chgData name="Douwe Ravers" userId="c8d85bf50e360dd6" providerId="LiveId" clId="{581F2EE1-DDE8-4C81-8886-E39EC1CD3DCF}" dt="2023-05-01T02:21:38.987" v="2249" actId="1076"/>
+          <ac:picMkLst>
+            <pc:docMk/>
+            <pc:sldMk cId="1128374672" sldId="261"/>
+            <ac:picMk id="10" creationId="{B076ECC6-592E-55A7-5817-C363C4C411BA}"/>
+          </ac:picMkLst>
+        </pc:picChg>
+        <pc:picChg chg="add del mod">
+          <ac:chgData name="Douwe Ravers" userId="c8d85bf50e360dd6" providerId="LiveId" clId="{581F2EE1-DDE8-4C81-8886-E39EC1CD3DCF}" dt="2023-05-01T02:20:56.443" v="2235" actId="478"/>
           <ac:picMkLst>
             <pc:docMk/>
             <pc:sldMk cId="1128374672" sldId="261"/>
             <ac:picMk id="14" creationId="{6E71BF46-26F3-691C-32E1-82DC7057FEA8}"/>
           </ac:picMkLst>
         </pc:picChg>
-        <pc:picChg chg="add mod ord">
-          <ac:chgData name="Douwe Ravers" userId="c8d85bf50e360dd6" providerId="LiveId" clId="{581F2EE1-DDE8-4C81-8886-E39EC1CD3DCF}" dt="2023-04-30T18:28:59.893" v="1615" actId="170"/>
+        <pc:picChg chg="add del mod ord">
+          <ac:chgData name="Douwe Ravers" userId="c8d85bf50e360dd6" providerId="LiveId" clId="{581F2EE1-DDE8-4C81-8886-E39EC1CD3DCF}" dt="2023-05-01T02:20:56.443" v="2235" actId="478"/>
           <ac:picMkLst>
             <pc:docMk/>
             <pc:sldMk cId="1128374672" sldId="261"/>
             <ac:picMk id="15" creationId="{F66C616F-5CC3-B43A-CDED-F6E3C888FA27}"/>
           </ac:picMkLst>
         </pc:picChg>
-        <pc:picChg chg="add mod">
-          <ac:chgData name="Douwe Ravers" userId="c8d85bf50e360dd6" providerId="LiveId" clId="{581F2EE1-DDE8-4C81-8886-E39EC1CD3DCF}" dt="2023-04-30T18:28:50.245" v="1612" actId="1076"/>
+        <pc:picChg chg="add del mod">
+          <ac:chgData name="Douwe Ravers" userId="c8d85bf50e360dd6" providerId="LiveId" clId="{581F2EE1-DDE8-4C81-8886-E39EC1CD3DCF}" dt="2023-05-01T02:20:56.443" v="2235" actId="478"/>
           <ac:picMkLst>
             <pc:docMk/>
             <pc:sldMk cId="1128374672" sldId="261"/>
             <ac:picMk id="17" creationId="{38771A27-B2EF-6BE6-2163-AF21E8092FC8}"/>
           </ac:picMkLst>
         </pc:picChg>
-        <pc:picChg chg="add mod">
-          <ac:chgData name="Douwe Ravers" userId="c8d85bf50e360dd6" providerId="LiveId" clId="{581F2EE1-DDE8-4C81-8886-E39EC1CD3DCF}" dt="2023-04-30T18:29:20.447" v="1619" actId="1076"/>
+        <pc:picChg chg="add del mod">
+          <ac:chgData name="Douwe Ravers" userId="c8d85bf50e360dd6" providerId="LiveId" clId="{581F2EE1-DDE8-4C81-8886-E39EC1CD3DCF}" dt="2023-05-01T02:20:56.443" v="2235" actId="478"/>
           <ac:picMkLst>
             <pc:docMk/>
             <pc:sldMk cId="1128374672" sldId="261"/>
             <ac:picMk id="18" creationId="{E75D81FA-D393-55DB-A657-EF48F2CC2DDD}"/>
           </ac:picMkLst>
         </pc:picChg>
-        <pc:picChg chg="add mod">
-          <ac:chgData name="Douwe Ravers" userId="c8d85bf50e360dd6" providerId="LiveId" clId="{581F2EE1-DDE8-4C81-8886-E39EC1CD3DCF}" dt="2023-04-30T18:29:27.794" v="1622" actId="1076"/>
+        <pc:picChg chg="add del mod">
+          <ac:chgData name="Douwe Ravers" userId="c8d85bf50e360dd6" providerId="LiveId" clId="{581F2EE1-DDE8-4C81-8886-E39EC1CD3DCF}" dt="2023-05-01T02:20:56.443" v="2235" actId="478"/>
           <ac:picMkLst>
             <pc:docMk/>
             <pc:sldMk cId="1128374672" sldId="261"/>
             <ac:picMk id="19" creationId="{D8F3C3A9-08F8-8107-C890-EF9BEA07BA87}"/>
           </ac:picMkLst>
         </pc:picChg>
-        <pc:picChg chg="add mod">
-          <ac:chgData name="Douwe Ravers" userId="c8d85bf50e360dd6" providerId="LiveId" clId="{581F2EE1-DDE8-4C81-8886-E39EC1CD3DCF}" dt="2023-04-30T18:34:44.856" v="1776" actId="1076"/>
+        <pc:picChg chg="add del mod">
+          <ac:chgData name="Douwe Ravers" userId="c8d85bf50e360dd6" providerId="LiveId" clId="{581F2EE1-DDE8-4C81-8886-E39EC1CD3DCF}" dt="2023-05-01T02:21:35.890" v="2248" actId="478"/>
+          <ac:picMkLst>
+            <pc:docMk/>
+            <pc:sldMk cId="1128374672" sldId="261"/>
+            <ac:picMk id="21" creationId="{8C32D653-1F9A-3309-236C-C53166DBD034}"/>
+          </ac:picMkLst>
+        </pc:picChg>
+        <pc:picChg chg="add del mod">
+          <ac:chgData name="Douwe Ravers" userId="c8d85bf50e360dd6" providerId="LiveId" clId="{581F2EE1-DDE8-4C81-8886-E39EC1CD3DCF}" dt="2023-05-01T02:20:56.443" v="2235" actId="478"/>
           <ac:picMkLst>
             <pc:docMk/>
             <pc:sldMk cId="1128374672" sldId="261"/>
             <ac:picMk id="22" creationId="{ECE93F01-56FC-CFE0-F64C-5A4196D3FDA0}"/>
           </ac:picMkLst>
         </pc:picChg>
-        <pc:picChg chg="add mod">
-          <ac:chgData name="Douwe Ravers" userId="c8d85bf50e360dd6" providerId="LiveId" clId="{581F2EE1-DDE8-4C81-8886-E39EC1CD3DCF}" dt="2023-04-30T18:34:44.856" v="1776" actId="1076"/>
+        <pc:picChg chg="add del mod">
+          <ac:chgData name="Douwe Ravers" userId="c8d85bf50e360dd6" providerId="LiveId" clId="{581F2EE1-DDE8-4C81-8886-E39EC1CD3DCF}" dt="2023-05-01T02:20:56.443" v="2235" actId="478"/>
           <ac:picMkLst>
             <pc:docMk/>
             <pc:sldMk cId="1128374672" sldId="261"/>
@@ -1279,23 +1490,31 @@
           </ac:picMkLst>
         </pc:picChg>
         <pc:picChg chg="add mod">
-          <ac:chgData name="Douwe Ravers" userId="c8d85bf50e360dd6" providerId="LiveId" clId="{581F2EE1-DDE8-4C81-8886-E39EC1CD3DCF}" dt="2023-04-30T18:34:51.959" v="1778" actId="1076"/>
+          <ac:chgData name="Douwe Ravers" userId="c8d85bf50e360dd6" providerId="LiveId" clId="{581F2EE1-DDE8-4C81-8886-E39EC1CD3DCF}" dt="2023-05-01T02:21:32.095" v="2247"/>
+          <ac:picMkLst>
+            <pc:docMk/>
+            <pc:sldMk cId="1128374672" sldId="261"/>
+            <ac:picMk id="25" creationId="{D68D6AB6-9E6A-E765-5D96-AC979A71DFEC}"/>
+          </ac:picMkLst>
+        </pc:picChg>
+        <pc:picChg chg="add del mod">
+          <ac:chgData name="Douwe Ravers" userId="c8d85bf50e360dd6" providerId="LiveId" clId="{581F2EE1-DDE8-4C81-8886-E39EC1CD3DCF}" dt="2023-05-01T02:20:56.443" v="2235" actId="478"/>
           <ac:picMkLst>
             <pc:docMk/>
             <pc:sldMk cId="1128374672" sldId="261"/>
             <ac:picMk id="26" creationId="{A6E33105-9EE8-6924-61DC-CE15F84B1EF2}"/>
           </ac:picMkLst>
         </pc:picChg>
-        <pc:picChg chg="add mod">
-          <ac:chgData name="Douwe Ravers" userId="c8d85bf50e360dd6" providerId="LiveId" clId="{581F2EE1-DDE8-4C81-8886-E39EC1CD3DCF}" dt="2023-04-30T18:36:30.582" v="1793" actId="1076"/>
+        <pc:picChg chg="add del mod">
+          <ac:chgData name="Douwe Ravers" userId="c8d85bf50e360dd6" providerId="LiveId" clId="{581F2EE1-DDE8-4C81-8886-E39EC1CD3DCF}" dt="2023-05-01T02:20:56.443" v="2235" actId="478"/>
           <ac:picMkLst>
             <pc:docMk/>
             <pc:sldMk cId="1128374672" sldId="261"/>
             <ac:picMk id="29" creationId="{A3F44E14-D09D-290B-DA10-09BE66D874CE}"/>
           </ac:picMkLst>
         </pc:picChg>
-        <pc:picChg chg="add mod">
-          <ac:chgData name="Douwe Ravers" userId="c8d85bf50e360dd6" providerId="LiveId" clId="{581F2EE1-DDE8-4C81-8886-E39EC1CD3DCF}" dt="2023-04-30T18:37:19.294" v="1812" actId="1076"/>
+        <pc:picChg chg="add del mod">
+          <ac:chgData name="Douwe Ravers" userId="c8d85bf50e360dd6" providerId="LiveId" clId="{581F2EE1-DDE8-4C81-8886-E39EC1CD3DCF}" dt="2023-05-01T02:20:56.443" v="2235" actId="478"/>
           <ac:picMkLst>
             <pc:docMk/>
             <pc:sldMk cId="1128374672" sldId="261"/>
@@ -1303,29 +1522,77 @@
           </ac:picMkLst>
         </pc:picChg>
         <pc:picChg chg="add mod">
-          <ac:chgData name="Douwe Ravers" userId="c8d85bf50e360dd6" providerId="LiveId" clId="{581F2EE1-DDE8-4C81-8886-E39EC1CD3DCF}" dt="2023-04-30T18:38:22.801" v="1832" actId="14100"/>
+          <ac:chgData name="Douwe Ravers" userId="c8d85bf50e360dd6" providerId="LiveId" clId="{581F2EE1-DDE8-4C81-8886-E39EC1CD3DCF}" dt="2023-05-01T02:21:43.538" v="2251" actId="1076"/>
+          <ac:picMkLst>
+            <pc:docMk/>
+            <pc:sldMk cId="1128374672" sldId="261"/>
+            <ac:picMk id="33" creationId="{D447A3EA-0D33-FC3C-8718-6D957CBD5D7F}"/>
+          </ac:picMkLst>
+        </pc:picChg>
+        <pc:picChg chg="add del mod">
+          <ac:chgData name="Douwe Ravers" userId="c8d85bf50e360dd6" providerId="LiveId" clId="{581F2EE1-DDE8-4C81-8886-E39EC1CD3DCF}" dt="2023-05-01T02:20:56.443" v="2235" actId="478"/>
           <ac:picMkLst>
             <pc:docMk/>
             <pc:sldMk cId="1128374672" sldId="261"/>
             <ac:picMk id="35" creationId="{F2BC8095-8077-E319-DAB5-5BC6C3BB4CFC}"/>
           </ac:picMkLst>
         </pc:picChg>
-        <pc:picChg chg="add mod">
-          <ac:chgData name="Douwe Ravers" userId="c8d85bf50e360dd6" providerId="LiveId" clId="{581F2EE1-DDE8-4C81-8886-E39EC1CD3DCF}" dt="2023-04-30T18:38:35.205" v="1834" actId="1076"/>
+        <pc:picChg chg="add del mod">
+          <ac:chgData name="Douwe Ravers" userId="c8d85bf50e360dd6" providerId="LiveId" clId="{581F2EE1-DDE8-4C81-8886-E39EC1CD3DCF}" dt="2023-05-01T02:20:56.443" v="2235" actId="478"/>
           <ac:picMkLst>
             <pc:docMk/>
             <pc:sldMk cId="1128374672" sldId="261"/>
             <ac:picMk id="36" creationId="{D36C74D7-EA69-5D8F-AF1D-C6E14607AE03}"/>
           </ac:picMkLst>
         </pc:picChg>
-        <pc:picChg chg="add mod">
-          <ac:chgData name="Douwe Ravers" userId="c8d85bf50e360dd6" providerId="LiveId" clId="{581F2EE1-DDE8-4C81-8886-E39EC1CD3DCF}" dt="2023-04-30T18:38:37.889" v="1836" actId="1076"/>
+        <pc:picChg chg="add del mod">
+          <ac:chgData name="Douwe Ravers" userId="c8d85bf50e360dd6" providerId="LiveId" clId="{581F2EE1-DDE8-4C81-8886-E39EC1CD3DCF}" dt="2023-05-01T02:20:56.443" v="2235" actId="478"/>
           <ac:picMkLst>
             <pc:docMk/>
             <pc:sldMk cId="1128374672" sldId="261"/>
             <ac:picMk id="37" creationId="{67377397-5955-5533-D221-24F45E74C3EC}"/>
           </ac:picMkLst>
         </pc:picChg>
+        <pc:picChg chg="add mod">
+          <ac:chgData name="Douwe Ravers" userId="c8d85bf50e360dd6" providerId="LiveId" clId="{581F2EE1-DDE8-4C81-8886-E39EC1CD3DCF}" dt="2023-05-01T02:34:46.616" v="2705" actId="1076"/>
+          <ac:picMkLst>
+            <pc:docMk/>
+            <pc:sldMk cId="1128374672" sldId="261"/>
+            <ac:picMk id="38" creationId="{C9B8EBE7-3BE2-AD9B-B8D3-E0D010809725}"/>
+          </ac:picMkLst>
+        </pc:picChg>
+        <pc:picChg chg="add mod">
+          <ac:chgData name="Douwe Ravers" userId="c8d85bf50e360dd6" providerId="LiveId" clId="{581F2EE1-DDE8-4C81-8886-E39EC1CD3DCF}" dt="2023-05-01T02:34:46.616" v="2705" actId="1076"/>
+          <ac:picMkLst>
+            <pc:docMk/>
+            <pc:sldMk cId="1128374672" sldId="261"/>
+            <ac:picMk id="39" creationId="{0A8A5695-55CE-6220-FB3B-CD6252811681}"/>
+          </ac:picMkLst>
+        </pc:picChg>
+        <pc:picChg chg="add mod">
+          <ac:chgData name="Douwe Ravers" userId="c8d85bf50e360dd6" providerId="LiveId" clId="{581F2EE1-DDE8-4C81-8886-E39EC1CD3DCF}" dt="2023-05-01T02:34:51.326" v="2707" actId="1076"/>
+          <ac:picMkLst>
+            <pc:docMk/>
+            <pc:sldMk cId="1128374672" sldId="261"/>
+            <ac:picMk id="42" creationId="{F884CF73-0A51-FB77-1240-2834495DC33C}"/>
+          </ac:picMkLst>
+        </pc:picChg>
+        <pc:picChg chg="add mod">
+          <ac:chgData name="Douwe Ravers" userId="c8d85bf50e360dd6" providerId="LiveId" clId="{581F2EE1-DDE8-4C81-8886-E39EC1CD3DCF}" dt="2023-05-01T02:35:12.041" v="2715" actId="1076"/>
+          <ac:picMkLst>
+            <pc:docMk/>
+            <pc:sldMk cId="1128374672" sldId="261"/>
+            <ac:picMk id="44" creationId="{84860609-A298-E69D-C903-42A745EE6143}"/>
+          </ac:picMkLst>
+        </pc:picChg>
+        <pc:picChg chg="add mod">
+          <ac:chgData name="Douwe Ravers" userId="c8d85bf50e360dd6" providerId="LiveId" clId="{581F2EE1-DDE8-4C81-8886-E39EC1CD3DCF}" dt="2023-05-01T02:35:12.041" v="2715" actId="1076"/>
+          <ac:picMkLst>
+            <pc:docMk/>
+            <pc:sldMk cId="1128374672" sldId="261"/>
+            <ac:picMk id="46" creationId="{24F4D718-0357-BC0F-640B-3EAD2D35C213}"/>
+          </ac:picMkLst>
+        </pc:picChg>
         <pc:picChg chg="del">
           <ac:chgData name="Douwe Ravers" userId="c8d85bf50e360dd6" providerId="LiveId" clId="{581F2EE1-DDE8-4C81-8886-E39EC1CD3DCF}" dt="2023-04-30T18:23:29.079" v="1482" actId="478"/>
           <ac:picMkLst>
@@ -1396,6 +1663,1019 @@
             <pc:docMk/>
             <pc:sldMk cId="1128374672" sldId="261"/>
             <ac:picMk id="68" creationId="{BC4AE79A-D5C1-1AB5-9F7D-AAED1E61FC98}"/>
+          </ac:picMkLst>
+        </pc:picChg>
+      </pc:sldChg>
+      <pc:sldChg chg="addSp delSp modSp add mod">
+        <pc:chgData name="Douwe Ravers" userId="c8d85bf50e360dd6" providerId="LiveId" clId="{581F2EE1-DDE8-4C81-8886-E39EC1CD3DCF}" dt="2023-05-01T02:17:16.827" v="2165" actId="478"/>
+        <pc:sldMkLst>
+          <pc:docMk/>
+          <pc:sldMk cId="120876259" sldId="262"/>
+        </pc:sldMkLst>
+        <pc:spChg chg="mod">
+          <ac:chgData name="Douwe Ravers" userId="c8d85bf50e360dd6" providerId="LiveId" clId="{581F2EE1-DDE8-4C81-8886-E39EC1CD3DCF}" dt="2023-05-01T02:06:31.583" v="1968" actId="20577"/>
+          <ac:spMkLst>
+            <pc:docMk/>
+            <pc:sldMk cId="120876259" sldId="262"/>
+            <ac:spMk id="2" creationId="{0C4DE95C-AF44-B196-31D1-911B992140AF}"/>
+          </ac:spMkLst>
+        </pc:spChg>
+        <pc:spChg chg="add mod">
+          <ac:chgData name="Douwe Ravers" userId="c8d85bf50e360dd6" providerId="LiveId" clId="{581F2EE1-DDE8-4C81-8886-E39EC1CD3DCF}" dt="2023-05-01T02:13:22.203" v="2082" actId="14100"/>
+          <ac:spMkLst>
+            <pc:docMk/>
+            <pc:sldMk cId="120876259" sldId="262"/>
+            <ac:spMk id="3" creationId="{0051D99D-F126-80C3-9FA5-587C43A393E0}"/>
+          </ac:spMkLst>
+        </pc:spChg>
+        <pc:spChg chg="del">
+          <ac:chgData name="Douwe Ravers" userId="c8d85bf50e360dd6" providerId="LiveId" clId="{581F2EE1-DDE8-4C81-8886-E39EC1CD3DCF}" dt="2023-05-01T02:06:25.086" v="1959" actId="478"/>
+          <ac:spMkLst>
+            <pc:docMk/>
+            <pc:sldMk cId="120876259" sldId="262"/>
+            <ac:spMk id="5" creationId="{417C88E7-183E-F4DB-7BB0-4099CF3D538A}"/>
+          </ac:spMkLst>
+        </pc:spChg>
+        <pc:spChg chg="add mod ord">
+          <ac:chgData name="Douwe Ravers" userId="c8d85bf50e360dd6" providerId="LiveId" clId="{581F2EE1-DDE8-4C81-8886-E39EC1CD3DCF}" dt="2023-05-01T02:07:33.654" v="1977" actId="164"/>
+          <ac:spMkLst>
+            <pc:docMk/>
+            <pc:sldMk cId="120876259" sldId="262"/>
+            <ac:spMk id="7" creationId="{F047936E-CC0E-9CD6-45DB-FB6E5C3D32C1}"/>
+          </ac:spMkLst>
+        </pc:spChg>
+        <pc:spChg chg="mod">
+          <ac:chgData name="Douwe Ravers" userId="c8d85bf50e360dd6" providerId="LiveId" clId="{581F2EE1-DDE8-4C81-8886-E39EC1CD3DCF}" dt="2023-05-01T02:13:30.667" v="2087" actId="1076"/>
+          <ac:spMkLst>
+            <pc:docMk/>
+            <pc:sldMk cId="120876259" sldId="262"/>
+            <ac:spMk id="10" creationId="{96BB3229-2211-C718-2451-9A5841410D18}"/>
+          </ac:spMkLst>
+        </pc:spChg>
+        <pc:spChg chg="mod">
+          <ac:chgData name="Douwe Ravers" userId="c8d85bf50e360dd6" providerId="LiveId" clId="{581F2EE1-DDE8-4C81-8886-E39EC1CD3DCF}" dt="2023-05-01T02:13:28.355" v="2085" actId="1076"/>
+          <ac:spMkLst>
+            <pc:docMk/>
+            <pc:sldMk cId="120876259" sldId="262"/>
+            <ac:spMk id="11" creationId="{686ACEBB-1264-E7FD-6625-F7EFB49AF210}"/>
+          </ac:spMkLst>
+        </pc:spChg>
+        <pc:spChg chg="mod">
+          <ac:chgData name="Douwe Ravers" userId="c8d85bf50e360dd6" providerId="LiveId" clId="{581F2EE1-DDE8-4C81-8886-E39EC1CD3DCF}" dt="2023-05-01T02:07:40.247" v="1981"/>
+          <ac:spMkLst>
+            <pc:docMk/>
+            <pc:sldMk cId="120876259" sldId="262"/>
+            <ac:spMk id="13" creationId="{1AFBFB3E-A1C5-65BB-565A-D7604A5787B2}"/>
+          </ac:spMkLst>
+        </pc:spChg>
+        <pc:spChg chg="mod">
+          <ac:chgData name="Douwe Ravers" userId="c8d85bf50e360dd6" providerId="LiveId" clId="{581F2EE1-DDE8-4C81-8886-E39EC1CD3DCF}" dt="2023-05-01T02:09:10.337" v="2019" actId="20577"/>
+          <ac:spMkLst>
+            <pc:docMk/>
+            <pc:sldMk cId="120876259" sldId="262"/>
+            <ac:spMk id="14" creationId="{C4924F81-D0AF-F158-F145-A6AB67D50AD8}"/>
+          </ac:spMkLst>
+        </pc:spChg>
+        <pc:spChg chg="mod">
+          <ac:chgData name="Douwe Ravers" userId="c8d85bf50e360dd6" providerId="LiveId" clId="{581F2EE1-DDE8-4C81-8886-E39EC1CD3DCF}" dt="2023-05-01T02:07:43.448" v="1983"/>
+          <ac:spMkLst>
+            <pc:docMk/>
+            <pc:sldMk cId="120876259" sldId="262"/>
+            <ac:spMk id="16" creationId="{4DC63507-38B9-1AAB-8366-BBD86923C05F}"/>
+          </ac:spMkLst>
+        </pc:spChg>
+        <pc:spChg chg="del">
+          <ac:chgData name="Douwe Ravers" userId="c8d85bf50e360dd6" providerId="LiveId" clId="{581F2EE1-DDE8-4C81-8886-E39EC1CD3DCF}" dt="2023-05-01T02:06:25.086" v="1959" actId="478"/>
+          <ac:spMkLst>
+            <pc:docMk/>
+            <pc:sldMk cId="120876259" sldId="262"/>
+            <ac:spMk id="19" creationId="{9539DEDB-948E-7A0F-5B50-475C0FB3CDA3}"/>
+          </ac:spMkLst>
+        </pc:spChg>
+        <pc:spChg chg="del">
+          <ac:chgData name="Douwe Ravers" userId="c8d85bf50e360dd6" providerId="LiveId" clId="{581F2EE1-DDE8-4C81-8886-E39EC1CD3DCF}" dt="2023-05-01T02:06:25.086" v="1959" actId="478"/>
+          <ac:spMkLst>
+            <pc:docMk/>
+            <pc:sldMk cId="120876259" sldId="262"/>
+            <ac:spMk id="20" creationId="{6D44D6B4-BFC2-3936-93A7-FC8E38936DEE}"/>
+          </ac:spMkLst>
+        </pc:spChg>
+        <pc:spChg chg="del">
+          <ac:chgData name="Douwe Ravers" userId="c8d85bf50e360dd6" providerId="LiveId" clId="{581F2EE1-DDE8-4C81-8886-E39EC1CD3DCF}" dt="2023-05-01T02:06:25.086" v="1959" actId="478"/>
+          <ac:spMkLst>
+            <pc:docMk/>
+            <pc:sldMk cId="120876259" sldId="262"/>
+            <ac:spMk id="23" creationId="{2377A15D-E3A8-E7A4-5D0A-A51094752988}"/>
+          </ac:spMkLst>
+        </pc:spChg>
+        <pc:spChg chg="del">
+          <ac:chgData name="Douwe Ravers" userId="c8d85bf50e360dd6" providerId="LiveId" clId="{581F2EE1-DDE8-4C81-8886-E39EC1CD3DCF}" dt="2023-05-01T02:06:25.086" v="1959" actId="478"/>
+          <ac:spMkLst>
+            <pc:docMk/>
+            <pc:sldMk cId="120876259" sldId="262"/>
+            <ac:spMk id="24" creationId="{16B21408-42CA-5334-7091-03781C6D6441}"/>
+          </ac:spMkLst>
+        </pc:spChg>
+        <pc:spChg chg="mod">
+          <ac:chgData name="Douwe Ravers" userId="c8d85bf50e360dd6" providerId="LiveId" clId="{581F2EE1-DDE8-4C81-8886-E39EC1CD3DCF}" dt="2023-05-01T02:09:07.178" v="2018" actId="20577"/>
+          <ac:spMkLst>
+            <pc:docMk/>
+            <pc:sldMk cId="120876259" sldId="262"/>
+            <ac:spMk id="26" creationId="{F5E450D6-F9E1-E373-6586-F3054472B830}"/>
+          </ac:spMkLst>
+        </pc:spChg>
+        <pc:spChg chg="mod">
+          <ac:chgData name="Douwe Ravers" userId="c8d85bf50e360dd6" providerId="LiveId" clId="{581F2EE1-DDE8-4C81-8886-E39EC1CD3DCF}" dt="2023-05-01T02:07:48.071" v="1985"/>
+          <ac:spMkLst>
+            <pc:docMk/>
+            <pc:sldMk cId="120876259" sldId="262"/>
+            <ac:spMk id="30" creationId="{8BE1C929-3DF8-B365-A30D-9717154EAD68}"/>
+          </ac:spMkLst>
+        </pc:spChg>
+        <pc:spChg chg="mod">
+          <ac:chgData name="Douwe Ravers" userId="c8d85bf50e360dd6" providerId="LiveId" clId="{581F2EE1-DDE8-4C81-8886-E39EC1CD3DCF}" dt="2023-05-01T02:09:12.498" v="2020" actId="20577"/>
+          <ac:spMkLst>
+            <pc:docMk/>
+            <pc:sldMk cId="120876259" sldId="262"/>
+            <ac:spMk id="32" creationId="{E97C4697-4C20-6090-EB8E-43010DF8B29A}"/>
+          </ac:spMkLst>
+        </pc:spChg>
+        <pc:spChg chg="del">
+          <ac:chgData name="Douwe Ravers" userId="c8d85bf50e360dd6" providerId="LiveId" clId="{581F2EE1-DDE8-4C81-8886-E39EC1CD3DCF}" dt="2023-05-01T02:06:25.086" v="1959" actId="478"/>
+          <ac:spMkLst>
+            <pc:docMk/>
+            <pc:sldMk cId="120876259" sldId="262"/>
+            <ac:spMk id="37" creationId="{696ABA83-FF46-A8B8-F33F-A0429A5AA271}"/>
+          </ac:spMkLst>
+        </pc:spChg>
+        <pc:spChg chg="del">
+          <ac:chgData name="Douwe Ravers" userId="c8d85bf50e360dd6" providerId="LiveId" clId="{581F2EE1-DDE8-4C81-8886-E39EC1CD3DCF}" dt="2023-05-01T02:06:27.710" v="1960" actId="478"/>
+          <ac:spMkLst>
+            <pc:docMk/>
+            <pc:sldMk cId="120876259" sldId="262"/>
+            <ac:spMk id="38" creationId="{A7BFFFA3-315E-4AE8-4F74-199407118D66}"/>
+          </ac:spMkLst>
+        </pc:spChg>
+        <pc:spChg chg="del">
+          <ac:chgData name="Douwe Ravers" userId="c8d85bf50e360dd6" providerId="LiveId" clId="{581F2EE1-DDE8-4C81-8886-E39EC1CD3DCF}" dt="2023-05-01T02:06:25.086" v="1959" actId="478"/>
+          <ac:spMkLst>
+            <pc:docMk/>
+            <pc:sldMk cId="120876259" sldId="262"/>
+            <ac:spMk id="40" creationId="{E6C11E82-A403-E713-57C4-06BEB55A0FCC}"/>
+          </ac:spMkLst>
+        </pc:spChg>
+        <pc:spChg chg="mod">
+          <ac:chgData name="Douwe Ravers" userId="c8d85bf50e360dd6" providerId="LiveId" clId="{581F2EE1-DDE8-4C81-8886-E39EC1CD3DCF}" dt="2023-05-01T02:07:48.071" v="1985"/>
+          <ac:spMkLst>
+            <pc:docMk/>
+            <pc:sldMk cId="120876259" sldId="262"/>
+            <ac:spMk id="42" creationId="{79E8DC33-3420-5B12-1574-B642F6CE921F}"/>
+          </ac:spMkLst>
+        </pc:spChg>
+        <pc:spChg chg="mod">
+          <ac:chgData name="Douwe Ravers" userId="c8d85bf50e360dd6" providerId="LiveId" clId="{581F2EE1-DDE8-4C81-8886-E39EC1CD3DCF}" dt="2023-05-01T02:09:14.441" v="2021" actId="20577"/>
+          <ac:spMkLst>
+            <pc:docMk/>
+            <pc:sldMk cId="120876259" sldId="262"/>
+            <ac:spMk id="44" creationId="{C865F46F-F790-2149-3677-BBD0BC183B4B}"/>
+          </ac:spMkLst>
+        </pc:spChg>
+        <pc:spChg chg="del">
+          <ac:chgData name="Douwe Ravers" userId="c8d85bf50e360dd6" providerId="LiveId" clId="{581F2EE1-DDE8-4C81-8886-E39EC1CD3DCF}" dt="2023-05-01T02:06:25.086" v="1959" actId="478"/>
+          <ac:spMkLst>
+            <pc:docMk/>
+            <pc:sldMk cId="120876259" sldId="262"/>
+            <ac:spMk id="46" creationId="{5AF56E79-28C4-370A-1132-33A9826AB7F5}"/>
+          </ac:spMkLst>
+        </pc:spChg>
+        <pc:spChg chg="mod">
+          <ac:chgData name="Douwe Ravers" userId="c8d85bf50e360dd6" providerId="LiveId" clId="{581F2EE1-DDE8-4C81-8886-E39EC1CD3DCF}" dt="2023-05-01T02:08:05.927" v="1988"/>
+          <ac:spMkLst>
+            <pc:docMk/>
+            <pc:sldMk cId="120876259" sldId="262"/>
+            <ac:spMk id="48" creationId="{96B898E1-BF62-6C95-7C5A-F6745E3BEC78}"/>
+          </ac:spMkLst>
+        </pc:spChg>
+        <pc:spChg chg="mod">
+          <ac:chgData name="Douwe Ravers" userId="c8d85bf50e360dd6" providerId="LiveId" clId="{581F2EE1-DDE8-4C81-8886-E39EC1CD3DCF}" dt="2023-05-01T02:08:47.941" v="2007" actId="113"/>
+          <ac:spMkLst>
+            <pc:docMk/>
+            <pc:sldMk cId="120876259" sldId="262"/>
+            <ac:spMk id="49" creationId="{18159877-57B6-D1E6-B23E-B328EDDA414D}"/>
+          </ac:spMkLst>
+        </pc:spChg>
+        <pc:spChg chg="add del mod">
+          <ac:chgData name="Douwe Ravers" userId="c8d85bf50e360dd6" providerId="LiveId" clId="{581F2EE1-DDE8-4C81-8886-E39EC1CD3DCF}" dt="2023-05-01T02:11:27.213" v="2066" actId="478"/>
+          <ac:spMkLst>
+            <pc:docMk/>
+            <pc:sldMk cId="120876259" sldId="262"/>
+            <ac:spMk id="53" creationId="{3E9CFC54-6ADC-4850-6969-D60EA0129553}"/>
+          </ac:spMkLst>
+        </pc:spChg>
+        <pc:spChg chg="mod">
+          <ac:chgData name="Douwe Ravers" userId="c8d85bf50e360dd6" providerId="LiveId" clId="{581F2EE1-DDE8-4C81-8886-E39EC1CD3DCF}" dt="2023-05-01T02:14:05.836" v="2098"/>
+          <ac:spMkLst>
+            <pc:docMk/>
+            <pc:sldMk cId="120876259" sldId="262"/>
+            <ac:spMk id="59" creationId="{F1FA7974-891A-9093-6D2A-2E0F14F893F4}"/>
+          </ac:spMkLst>
+        </pc:spChg>
+        <pc:spChg chg="mod">
+          <ac:chgData name="Douwe Ravers" userId="c8d85bf50e360dd6" providerId="LiveId" clId="{581F2EE1-DDE8-4C81-8886-E39EC1CD3DCF}" dt="2023-05-01T02:14:10.084" v="2105" actId="20577"/>
+          <ac:spMkLst>
+            <pc:docMk/>
+            <pc:sldMk cId="120876259" sldId="262"/>
+            <ac:spMk id="60" creationId="{22C8D6A7-FBB2-2345-CBC7-EAB03D8C140F}"/>
+          </ac:spMkLst>
+        </pc:spChg>
+        <pc:spChg chg="mod">
+          <ac:chgData name="Douwe Ravers" userId="c8d85bf50e360dd6" providerId="LiveId" clId="{581F2EE1-DDE8-4C81-8886-E39EC1CD3DCF}" dt="2023-05-01T02:14:20.067" v="2108"/>
+          <ac:spMkLst>
+            <pc:docMk/>
+            <pc:sldMk cId="120876259" sldId="262"/>
+            <ac:spMk id="62" creationId="{AAE5F5D0-15E8-EB3E-D4CE-F49BAEC95E9D}"/>
+          </ac:spMkLst>
+        </pc:spChg>
+        <pc:spChg chg="mod">
+          <ac:chgData name="Douwe Ravers" userId="c8d85bf50e360dd6" providerId="LiveId" clId="{581F2EE1-DDE8-4C81-8886-E39EC1CD3DCF}" dt="2023-05-01T02:14:24.472" v="2114" actId="20577"/>
+          <ac:spMkLst>
+            <pc:docMk/>
+            <pc:sldMk cId="120876259" sldId="262"/>
+            <ac:spMk id="63" creationId="{F0AD0AD1-8B31-15E1-5DD0-10578A72AD67}"/>
+          </ac:spMkLst>
+        </pc:spChg>
+        <pc:spChg chg="mod">
+          <ac:chgData name="Douwe Ravers" userId="c8d85bf50e360dd6" providerId="LiveId" clId="{581F2EE1-DDE8-4C81-8886-E39EC1CD3DCF}" dt="2023-05-01T02:15:47.432" v="2135"/>
+          <ac:spMkLst>
+            <pc:docMk/>
+            <pc:sldMk cId="120876259" sldId="262"/>
+            <ac:spMk id="71" creationId="{52A18678-8D00-458B-ABB0-A1ADAA67487D}"/>
+          </ac:spMkLst>
+        </pc:spChg>
+        <pc:spChg chg="mod">
+          <ac:chgData name="Douwe Ravers" userId="c8d85bf50e360dd6" providerId="LiveId" clId="{581F2EE1-DDE8-4C81-8886-E39EC1CD3DCF}" dt="2023-05-01T02:16:10.293" v="2144" actId="20577"/>
+          <ac:spMkLst>
+            <pc:docMk/>
+            <pc:sldMk cId="120876259" sldId="262"/>
+            <ac:spMk id="72" creationId="{F8D83813-6B4C-BBE4-BADA-B058FFF59DFF}"/>
+          </ac:spMkLst>
+        </pc:spChg>
+        <pc:spChg chg="mod">
+          <ac:chgData name="Douwe Ravers" userId="c8d85bf50e360dd6" providerId="LiveId" clId="{581F2EE1-DDE8-4C81-8886-E39EC1CD3DCF}" dt="2023-05-01T02:15:51.256" v="2137"/>
+          <ac:spMkLst>
+            <pc:docMk/>
+            <pc:sldMk cId="120876259" sldId="262"/>
+            <ac:spMk id="74" creationId="{1A117355-58F1-0209-2067-48C2F6FE5E14}"/>
+          </ac:spMkLst>
+        </pc:spChg>
+        <pc:spChg chg="mod">
+          <ac:chgData name="Douwe Ravers" userId="c8d85bf50e360dd6" providerId="LiveId" clId="{581F2EE1-DDE8-4C81-8886-E39EC1CD3DCF}" dt="2023-05-01T02:16:25.628" v="2147" actId="255"/>
+          <ac:spMkLst>
+            <pc:docMk/>
+            <pc:sldMk cId="120876259" sldId="262"/>
+            <ac:spMk id="75" creationId="{66EF9B27-5B3F-95C5-11B9-3307E958234E}"/>
+          </ac:spMkLst>
+        </pc:spChg>
+        <pc:spChg chg="mod">
+          <ac:chgData name="Douwe Ravers" userId="c8d85bf50e360dd6" providerId="LiveId" clId="{581F2EE1-DDE8-4C81-8886-E39EC1CD3DCF}" dt="2023-05-01T02:16:36.521" v="2149"/>
+          <ac:spMkLst>
+            <pc:docMk/>
+            <pc:sldMk cId="120876259" sldId="262"/>
+            <ac:spMk id="80" creationId="{C6E64D04-C6AC-56CF-8290-6BD3DC937062}"/>
+          </ac:spMkLst>
+        </pc:spChg>
+        <pc:spChg chg="mod">
+          <ac:chgData name="Douwe Ravers" userId="c8d85bf50e360dd6" providerId="LiveId" clId="{581F2EE1-DDE8-4C81-8886-E39EC1CD3DCF}" dt="2023-05-01T02:17:13.842" v="2163" actId="20577"/>
+          <ac:spMkLst>
+            <pc:docMk/>
+            <pc:sldMk cId="120876259" sldId="262"/>
+            <ac:spMk id="81" creationId="{DC834460-4B2B-5C09-55A4-8294127D7FBA}"/>
+          </ac:spMkLst>
+        </pc:spChg>
+        <pc:spChg chg="mod">
+          <ac:chgData name="Douwe Ravers" userId="c8d85bf50e360dd6" providerId="LiveId" clId="{581F2EE1-DDE8-4C81-8886-E39EC1CD3DCF}" dt="2023-05-01T02:16:36.521" v="2149"/>
+          <ac:spMkLst>
+            <pc:docMk/>
+            <pc:sldMk cId="120876259" sldId="262"/>
+            <ac:spMk id="83" creationId="{8F61F13C-5439-8014-73A4-BE7080BE3ECC}"/>
+          </ac:spMkLst>
+        </pc:spChg>
+        <pc:spChg chg="mod">
+          <ac:chgData name="Douwe Ravers" userId="c8d85bf50e360dd6" providerId="LiveId" clId="{581F2EE1-DDE8-4C81-8886-E39EC1CD3DCF}" dt="2023-05-01T02:16:55.843" v="2157" actId="20577"/>
+          <ac:spMkLst>
+            <pc:docMk/>
+            <pc:sldMk cId="120876259" sldId="262"/>
+            <ac:spMk id="84" creationId="{6BE653C7-702B-76BB-AF95-9D2699314FB5}"/>
+          </ac:spMkLst>
+        </pc:spChg>
+        <pc:spChg chg="mod">
+          <ac:chgData name="Douwe Ravers" userId="c8d85bf50e360dd6" providerId="LiveId" clId="{581F2EE1-DDE8-4C81-8886-E39EC1CD3DCF}" dt="2023-05-01T02:17:07.166" v="2160"/>
+          <ac:spMkLst>
+            <pc:docMk/>
+            <pc:sldMk cId="120876259" sldId="262"/>
+            <ac:spMk id="89" creationId="{E734010D-71FF-F4F0-B734-FF316E068AA5}"/>
+          </ac:spMkLst>
+        </pc:spChg>
+        <pc:spChg chg="mod">
+          <ac:chgData name="Douwe Ravers" userId="c8d85bf50e360dd6" providerId="LiveId" clId="{581F2EE1-DDE8-4C81-8886-E39EC1CD3DCF}" dt="2023-05-01T02:17:07.166" v="2160"/>
+          <ac:spMkLst>
+            <pc:docMk/>
+            <pc:sldMk cId="120876259" sldId="262"/>
+            <ac:spMk id="90" creationId="{6C4FD06B-A4AD-7E7D-9ED2-0F5F0FB5B82B}"/>
+          </ac:spMkLst>
+        </pc:spChg>
+        <pc:grpChg chg="add mod ord">
+          <ac:chgData name="Douwe Ravers" userId="c8d85bf50e360dd6" providerId="LiveId" clId="{581F2EE1-DDE8-4C81-8886-E39EC1CD3DCF}" dt="2023-05-01T02:13:38.878" v="2089" actId="1076"/>
+          <ac:grpSpMkLst>
+            <pc:docMk/>
+            <pc:sldMk cId="120876259" sldId="262"/>
+            <ac:grpSpMk id="8" creationId="{E6E8C8D8-9190-1DF1-4BC7-B7F53D6C2CD2}"/>
+          </ac:grpSpMkLst>
+        </pc:grpChg>
+        <pc:grpChg chg="add mod">
+          <ac:chgData name="Douwe Ravers" userId="c8d85bf50e360dd6" providerId="LiveId" clId="{581F2EE1-DDE8-4C81-8886-E39EC1CD3DCF}" dt="2023-05-01T02:13:36.159" v="2088" actId="1076"/>
+          <ac:grpSpMkLst>
+            <pc:docMk/>
+            <pc:sldMk cId="120876259" sldId="262"/>
+            <ac:grpSpMk id="9" creationId="{D6DCCAA1-E1FD-1083-9D3F-1C3CE51AF952}"/>
+          </ac:grpSpMkLst>
+        </pc:grpChg>
+        <pc:grpChg chg="add del mod">
+          <ac:chgData name="Douwe Ravers" userId="c8d85bf50e360dd6" providerId="LiveId" clId="{581F2EE1-DDE8-4C81-8886-E39EC1CD3DCF}" dt="2023-05-01T02:09:38.561" v="2029" actId="478"/>
+          <ac:grpSpMkLst>
+            <pc:docMk/>
+            <pc:sldMk cId="120876259" sldId="262"/>
+            <ac:grpSpMk id="12" creationId="{123038F9-4EAB-A86D-217D-52242FE5A985}"/>
+          </ac:grpSpMkLst>
+        </pc:grpChg>
+        <pc:grpChg chg="add del mod">
+          <ac:chgData name="Douwe Ravers" userId="c8d85bf50e360dd6" providerId="LiveId" clId="{581F2EE1-DDE8-4C81-8886-E39EC1CD3DCF}" dt="2023-05-01T02:09:35.776" v="2026" actId="478"/>
+          <ac:grpSpMkLst>
+            <pc:docMk/>
+            <pc:sldMk cId="120876259" sldId="262"/>
+            <ac:grpSpMk id="15" creationId="{9E964F6D-7D99-AF61-A4D1-D763EDA0A42D}"/>
+          </ac:grpSpMkLst>
+        </pc:grpChg>
+        <pc:grpChg chg="add del mod">
+          <ac:chgData name="Douwe Ravers" userId="c8d85bf50e360dd6" providerId="LiveId" clId="{581F2EE1-DDE8-4C81-8886-E39EC1CD3DCF}" dt="2023-05-01T02:09:37.816" v="2028" actId="478"/>
+          <ac:grpSpMkLst>
+            <pc:docMk/>
+            <pc:sldMk cId="120876259" sldId="262"/>
+            <ac:grpSpMk id="28" creationId="{D602D6C1-EA6C-5CE2-850E-2C703732EDE5}"/>
+          </ac:grpSpMkLst>
+        </pc:grpChg>
+        <pc:grpChg chg="add del mod">
+          <ac:chgData name="Douwe Ravers" userId="c8d85bf50e360dd6" providerId="LiveId" clId="{581F2EE1-DDE8-4C81-8886-E39EC1CD3DCF}" dt="2023-05-01T02:09:36.736" v="2027" actId="478"/>
+          <ac:grpSpMkLst>
+            <pc:docMk/>
+            <pc:sldMk cId="120876259" sldId="262"/>
+            <ac:grpSpMk id="34" creationId="{60B816E5-7F81-BA47-8719-2F10E0B0A3D2}"/>
+          </ac:grpSpMkLst>
+        </pc:grpChg>
+        <pc:grpChg chg="del">
+          <ac:chgData name="Douwe Ravers" userId="c8d85bf50e360dd6" providerId="LiveId" clId="{581F2EE1-DDE8-4C81-8886-E39EC1CD3DCF}" dt="2023-05-01T02:06:25.086" v="1959" actId="478"/>
+          <ac:grpSpMkLst>
+            <pc:docMk/>
+            <pc:sldMk cId="120876259" sldId="262"/>
+            <ac:grpSpMk id="36" creationId="{30512300-A14C-2060-0DC1-9130EA75E369}"/>
+          </ac:grpSpMkLst>
+        </pc:grpChg>
+        <pc:grpChg chg="add del mod">
+          <ac:chgData name="Douwe Ravers" userId="c8d85bf50e360dd6" providerId="LiveId" clId="{581F2EE1-DDE8-4C81-8886-E39EC1CD3DCF}" dt="2023-05-01T02:13:49.472" v="2092" actId="478"/>
+          <ac:grpSpMkLst>
+            <pc:docMk/>
+            <pc:sldMk cId="120876259" sldId="262"/>
+            <ac:grpSpMk id="47" creationId="{986C0D1B-5BB0-F5D8-D975-1C0C1C4C0F0D}"/>
+          </ac:grpSpMkLst>
+        </pc:grpChg>
+        <pc:grpChg chg="add mod">
+          <ac:chgData name="Douwe Ravers" userId="c8d85bf50e360dd6" providerId="LiveId" clId="{581F2EE1-DDE8-4C81-8886-E39EC1CD3DCF}" dt="2023-05-01T02:14:18.991" v="2107" actId="1076"/>
+          <ac:grpSpMkLst>
+            <pc:docMk/>
+            <pc:sldMk cId="120876259" sldId="262"/>
+            <ac:grpSpMk id="58" creationId="{61973827-0884-AA99-B93D-BB72BE57D3D1}"/>
+          </ac:grpSpMkLst>
+        </pc:grpChg>
+        <pc:grpChg chg="add mod">
+          <ac:chgData name="Douwe Ravers" userId="c8d85bf50e360dd6" providerId="LiveId" clId="{581F2EE1-DDE8-4C81-8886-E39EC1CD3DCF}" dt="2023-05-01T02:14:22.578" v="2109" actId="1076"/>
+          <ac:grpSpMkLst>
+            <pc:docMk/>
+            <pc:sldMk cId="120876259" sldId="262"/>
+            <ac:grpSpMk id="61" creationId="{5E0467A6-1E28-CFEF-F459-F3C08C9372C2}"/>
+          </ac:grpSpMkLst>
+        </pc:grpChg>
+        <pc:grpChg chg="add mod">
+          <ac:chgData name="Douwe Ravers" userId="c8d85bf50e360dd6" providerId="LiveId" clId="{581F2EE1-DDE8-4C81-8886-E39EC1CD3DCF}" dt="2023-05-01T02:16:41.885" v="2151" actId="1076"/>
+          <ac:grpSpMkLst>
+            <pc:docMk/>
+            <pc:sldMk cId="120876259" sldId="262"/>
+            <ac:grpSpMk id="70" creationId="{34128D05-3152-D6B2-77F5-1E7F934D87CD}"/>
+          </ac:grpSpMkLst>
+        </pc:grpChg>
+        <pc:grpChg chg="add mod">
+          <ac:chgData name="Douwe Ravers" userId="c8d85bf50e360dd6" providerId="LiveId" clId="{581F2EE1-DDE8-4C81-8886-E39EC1CD3DCF}" dt="2023-05-01T02:16:35.607" v="2148" actId="1076"/>
+          <ac:grpSpMkLst>
+            <pc:docMk/>
+            <pc:sldMk cId="120876259" sldId="262"/>
+            <ac:grpSpMk id="73" creationId="{C5D83871-C6C1-31FC-DBAB-92B696756343}"/>
+          </ac:grpSpMkLst>
+        </pc:grpChg>
+        <pc:grpChg chg="add del mod">
+          <ac:chgData name="Douwe Ravers" userId="c8d85bf50e360dd6" providerId="LiveId" clId="{581F2EE1-DDE8-4C81-8886-E39EC1CD3DCF}" dt="2023-05-01T02:17:16.827" v="2165" actId="478"/>
+          <ac:grpSpMkLst>
+            <pc:docMk/>
+            <pc:sldMk cId="120876259" sldId="262"/>
+            <ac:grpSpMk id="79" creationId="{E7FAF1FC-C6F5-0FE0-DA2D-B6A2B3EF89C8}"/>
+          </ac:grpSpMkLst>
+        </pc:grpChg>
+        <pc:grpChg chg="add mod">
+          <ac:chgData name="Douwe Ravers" userId="c8d85bf50e360dd6" providerId="LiveId" clId="{581F2EE1-DDE8-4C81-8886-E39EC1CD3DCF}" dt="2023-05-01T02:16:39.288" v="2150" actId="1076"/>
+          <ac:grpSpMkLst>
+            <pc:docMk/>
+            <pc:sldMk cId="120876259" sldId="262"/>
+            <ac:grpSpMk id="82" creationId="{D9FC0811-BDCF-BC42-0F8E-87C5E752EE99}"/>
+          </ac:grpSpMkLst>
+        </pc:grpChg>
+        <pc:grpChg chg="add del mod">
+          <ac:chgData name="Douwe Ravers" userId="c8d85bf50e360dd6" providerId="LiveId" clId="{581F2EE1-DDE8-4C81-8886-E39EC1CD3DCF}" dt="2023-05-01T02:17:09.140" v="2161"/>
+          <ac:grpSpMkLst>
+            <pc:docMk/>
+            <pc:sldMk cId="120876259" sldId="262"/>
+            <ac:grpSpMk id="88" creationId="{CB33BE8D-05BA-C2AC-9504-B992C88055F5}"/>
+          </ac:grpSpMkLst>
+        </pc:grpChg>
+        <pc:picChg chg="del">
+          <ac:chgData name="Douwe Ravers" userId="c8d85bf50e360dd6" providerId="LiveId" clId="{581F2EE1-DDE8-4C81-8886-E39EC1CD3DCF}" dt="2023-05-01T02:06:25.086" v="1959" actId="478"/>
+          <ac:picMkLst>
+            <pc:docMk/>
+            <pc:sldMk cId="120876259" sldId="262"/>
+            <ac:picMk id="4" creationId="{C5B7A151-0943-9407-8E7E-F275595CD0C2}"/>
+          </ac:picMkLst>
+        </pc:picChg>
+        <pc:picChg chg="del">
+          <ac:chgData name="Douwe Ravers" userId="c8d85bf50e360dd6" providerId="LiveId" clId="{581F2EE1-DDE8-4C81-8886-E39EC1CD3DCF}" dt="2023-05-01T02:06:25.086" v="1959" actId="478"/>
+          <ac:picMkLst>
+            <pc:docMk/>
+            <pc:sldMk cId="120876259" sldId="262"/>
+            <ac:picMk id="18" creationId="{F838B353-E5D1-9956-5403-2649661A9B4C}"/>
+          </ac:picMkLst>
+        </pc:picChg>
+        <pc:picChg chg="del">
+          <ac:chgData name="Douwe Ravers" userId="c8d85bf50e360dd6" providerId="LiveId" clId="{581F2EE1-DDE8-4C81-8886-E39EC1CD3DCF}" dt="2023-05-01T02:06:25.086" v="1959" actId="478"/>
+          <ac:picMkLst>
+            <pc:docMk/>
+            <pc:sldMk cId="120876259" sldId="262"/>
+            <ac:picMk id="21" creationId="{BC46C399-87A0-575E-DDF0-29894527EC8B}"/>
+          </ac:picMkLst>
+        </pc:picChg>
+        <pc:picChg chg="del">
+          <ac:chgData name="Douwe Ravers" userId="c8d85bf50e360dd6" providerId="LiveId" clId="{581F2EE1-DDE8-4C81-8886-E39EC1CD3DCF}" dt="2023-05-01T02:06:25.086" v="1959" actId="478"/>
+          <ac:picMkLst>
+            <pc:docMk/>
+            <pc:sldMk cId="120876259" sldId="262"/>
+            <ac:picMk id="22" creationId="{E4640686-8CB2-15AB-7A48-65F08C391017}"/>
+          </ac:picMkLst>
+        </pc:picChg>
+        <pc:picChg chg="del">
+          <ac:chgData name="Douwe Ravers" userId="c8d85bf50e360dd6" providerId="LiveId" clId="{581F2EE1-DDE8-4C81-8886-E39EC1CD3DCF}" dt="2023-05-01T02:06:25.086" v="1959" actId="478"/>
+          <ac:picMkLst>
+            <pc:docMk/>
+            <pc:sldMk cId="120876259" sldId="262"/>
+            <ac:picMk id="25" creationId="{D923FA94-9B33-B561-BC60-740106D126E6}"/>
+          </ac:picMkLst>
+        </pc:picChg>
+        <pc:picChg chg="del">
+          <ac:chgData name="Douwe Ravers" userId="c8d85bf50e360dd6" providerId="LiveId" clId="{581F2EE1-DDE8-4C81-8886-E39EC1CD3DCF}" dt="2023-05-01T02:06:25.086" v="1959" actId="478"/>
+          <ac:picMkLst>
+            <pc:docMk/>
+            <pc:sldMk cId="120876259" sldId="262"/>
+            <ac:picMk id="39" creationId="{9D4C5513-36E0-B20B-8D7C-B4714DF52859}"/>
+          </ac:picMkLst>
+        </pc:picChg>
+        <pc:picChg chg="del">
+          <ac:chgData name="Douwe Ravers" userId="c8d85bf50e360dd6" providerId="LiveId" clId="{581F2EE1-DDE8-4C81-8886-E39EC1CD3DCF}" dt="2023-05-01T02:06:27.710" v="1960" actId="478"/>
+          <ac:picMkLst>
+            <pc:docMk/>
+            <pc:sldMk cId="120876259" sldId="262"/>
+            <ac:picMk id="41" creationId="{E6D99BDE-D6FC-27CF-1612-C8B1714D3902}"/>
+          </ac:picMkLst>
+        </pc:picChg>
+        <pc:picChg chg="del">
+          <ac:chgData name="Douwe Ravers" userId="c8d85bf50e360dd6" providerId="LiveId" clId="{581F2EE1-DDE8-4C81-8886-E39EC1CD3DCF}" dt="2023-05-01T02:06:25.086" v="1959" actId="478"/>
+          <ac:picMkLst>
+            <pc:docMk/>
+            <pc:sldMk cId="120876259" sldId="262"/>
+            <ac:picMk id="43" creationId="{1013201F-8EEE-F2A9-3BDF-DC0141B8A312}"/>
+          </ac:picMkLst>
+        </pc:picChg>
+        <pc:picChg chg="del">
+          <ac:chgData name="Douwe Ravers" userId="c8d85bf50e360dd6" providerId="LiveId" clId="{581F2EE1-DDE8-4C81-8886-E39EC1CD3DCF}" dt="2023-05-01T02:06:25.086" v="1959" actId="478"/>
+          <ac:picMkLst>
+            <pc:docMk/>
+            <pc:sldMk cId="120876259" sldId="262"/>
+            <ac:picMk id="45" creationId="{11206812-EF56-C729-1C31-8A94929B2958}"/>
+          </ac:picMkLst>
+        </pc:picChg>
+        <pc:picChg chg="add del mod">
+          <ac:chgData name="Douwe Ravers" userId="c8d85bf50e360dd6" providerId="LiveId" clId="{581F2EE1-DDE8-4C81-8886-E39EC1CD3DCF}" dt="2023-05-01T02:13:05.281" v="2076" actId="478"/>
+          <ac:picMkLst>
+            <pc:docMk/>
+            <pc:sldMk cId="120876259" sldId="262"/>
+            <ac:picMk id="50" creationId="{55FC95BE-D445-8BC4-5F61-1AE117100E24}"/>
+          </ac:picMkLst>
+        </pc:picChg>
+        <pc:picChg chg="add mod ord">
+          <ac:chgData name="Douwe Ravers" userId="c8d85bf50e360dd6" providerId="LiveId" clId="{581F2EE1-DDE8-4C81-8886-E39EC1CD3DCF}" dt="2023-05-01T02:14:45.138" v="2119" actId="1076"/>
+          <ac:picMkLst>
+            <pc:docMk/>
+            <pc:sldMk cId="120876259" sldId="262"/>
+            <ac:picMk id="52" creationId="{8F28D28A-9052-D75D-7B3E-A095F75EA1F1}"/>
+          </ac:picMkLst>
+        </pc:picChg>
+        <pc:picChg chg="add mod">
+          <ac:chgData name="Douwe Ravers" userId="c8d85bf50e360dd6" providerId="LiveId" clId="{581F2EE1-DDE8-4C81-8886-E39EC1CD3DCF}" dt="2023-05-01T02:13:09.923" v="2077" actId="1076"/>
+          <ac:picMkLst>
+            <pc:docMk/>
+            <pc:sldMk cId="120876259" sldId="262"/>
+            <ac:picMk id="55" creationId="{07A8B345-EF2E-C528-6C69-8C445F9F85A7}"/>
+          </ac:picMkLst>
+        </pc:picChg>
+        <pc:picChg chg="add mod">
+          <ac:chgData name="Douwe Ravers" userId="c8d85bf50e360dd6" providerId="LiveId" clId="{581F2EE1-DDE8-4C81-8886-E39EC1CD3DCF}" dt="2023-05-01T02:13:56.338" v="2093" actId="1076"/>
+          <ac:picMkLst>
+            <pc:docMk/>
+            <pc:sldMk cId="120876259" sldId="262"/>
+            <ac:picMk id="56" creationId="{26FD961C-0135-9360-B979-07F01C3E96EC}"/>
+          </ac:picMkLst>
+        </pc:picChg>
+        <pc:picChg chg="add mod">
+          <ac:chgData name="Douwe Ravers" userId="c8d85bf50e360dd6" providerId="LiveId" clId="{581F2EE1-DDE8-4C81-8886-E39EC1CD3DCF}" dt="2023-05-01T02:14:03.951" v="2097" actId="1076"/>
+          <ac:picMkLst>
+            <pc:docMk/>
+            <pc:sldMk cId="120876259" sldId="262"/>
+            <ac:picMk id="57" creationId="{9DB188B0-B8F8-E7A4-1764-39B7C608F6D9}"/>
+          </ac:picMkLst>
+        </pc:picChg>
+        <pc:picChg chg="add mod">
+          <ac:chgData name="Douwe Ravers" userId="c8d85bf50e360dd6" providerId="LiveId" clId="{581F2EE1-DDE8-4C81-8886-E39EC1CD3DCF}" dt="2023-05-01T02:16:35.607" v="2148" actId="1076"/>
+          <ac:picMkLst>
+            <pc:docMk/>
+            <pc:sldMk cId="120876259" sldId="262"/>
+            <ac:picMk id="64" creationId="{87798E28-C550-0DDC-3C1B-234DC2BC7422}"/>
+          </ac:picMkLst>
+        </pc:picChg>
+        <pc:picChg chg="add mod">
+          <ac:chgData name="Douwe Ravers" userId="c8d85bf50e360dd6" providerId="LiveId" clId="{581F2EE1-DDE8-4C81-8886-E39EC1CD3DCF}" dt="2023-05-01T02:14:55.760" v="2122" actId="1076"/>
+          <ac:picMkLst>
+            <pc:docMk/>
+            <pc:sldMk cId="120876259" sldId="262"/>
+            <ac:picMk id="65" creationId="{5031FFF6-7AB0-DBD2-1AD6-1983549EAF06}"/>
+          </ac:picMkLst>
+        </pc:picChg>
+        <pc:picChg chg="add mod">
+          <ac:chgData name="Douwe Ravers" userId="c8d85bf50e360dd6" providerId="LiveId" clId="{581F2EE1-DDE8-4C81-8886-E39EC1CD3DCF}" dt="2023-05-01T02:15:05.993" v="2125" actId="1076"/>
+          <ac:picMkLst>
+            <pc:docMk/>
+            <pc:sldMk cId="120876259" sldId="262"/>
+            <ac:picMk id="66" creationId="{36F0A75B-50BD-DBFE-A851-78060824913C}"/>
+          </ac:picMkLst>
+        </pc:picChg>
+        <pc:picChg chg="add mod">
+          <ac:chgData name="Douwe Ravers" userId="c8d85bf50e360dd6" providerId="LiveId" clId="{581F2EE1-DDE8-4C81-8886-E39EC1CD3DCF}" dt="2023-05-01T02:16:35.607" v="2148" actId="1076"/>
+          <ac:picMkLst>
+            <pc:docMk/>
+            <pc:sldMk cId="120876259" sldId="262"/>
+            <ac:picMk id="68" creationId="{7BD80AD5-B85B-7BB8-304A-98A90E2294FA}"/>
+          </ac:picMkLst>
+        </pc:picChg>
+        <pc:picChg chg="add mod">
+          <ac:chgData name="Douwe Ravers" userId="c8d85bf50e360dd6" providerId="LiveId" clId="{581F2EE1-DDE8-4C81-8886-E39EC1CD3DCF}" dt="2023-05-01T02:16:35.607" v="2148" actId="1076"/>
+          <ac:picMkLst>
+            <pc:docMk/>
+            <pc:sldMk cId="120876259" sldId="262"/>
+            <ac:picMk id="69" creationId="{8330DDE4-9FEA-D48B-6781-2D67E1C61265}"/>
+          </ac:picMkLst>
+        </pc:picChg>
+        <pc:picChg chg="add mod">
+          <ac:chgData name="Douwe Ravers" userId="c8d85bf50e360dd6" providerId="LiveId" clId="{581F2EE1-DDE8-4C81-8886-E39EC1CD3DCF}" dt="2023-05-01T02:16:39.288" v="2150" actId="1076"/>
+          <ac:picMkLst>
+            <pc:docMk/>
+            <pc:sldMk cId="120876259" sldId="262"/>
+            <ac:picMk id="76" creationId="{5D0FE51C-3F96-1C3B-43E2-E61E7BB685DB}"/>
+          </ac:picMkLst>
+        </pc:picChg>
+        <pc:picChg chg="add del mod">
+          <ac:chgData name="Douwe Ravers" userId="c8d85bf50e360dd6" providerId="LiveId" clId="{581F2EE1-DDE8-4C81-8886-E39EC1CD3DCF}" dt="2023-05-01T02:16:48.195" v="2154" actId="478"/>
+          <ac:picMkLst>
+            <pc:docMk/>
+            <pc:sldMk cId="120876259" sldId="262"/>
+            <ac:picMk id="77" creationId="{AC1F6F5B-9582-1863-EB0E-CC3AB9FE86DA}"/>
+          </ac:picMkLst>
+        </pc:picChg>
+        <pc:picChg chg="add del mod">
+          <ac:chgData name="Douwe Ravers" userId="c8d85bf50e360dd6" providerId="LiveId" clId="{581F2EE1-DDE8-4C81-8886-E39EC1CD3DCF}" dt="2023-05-01T02:16:46.867" v="2153" actId="478"/>
+          <ac:picMkLst>
+            <pc:docMk/>
+            <pc:sldMk cId="120876259" sldId="262"/>
+            <ac:picMk id="78" creationId="{69BBFDED-3796-8AEB-DD91-A453F800ADDE}"/>
+          </ac:picMkLst>
+        </pc:picChg>
+        <pc:picChg chg="add mod">
+          <ac:chgData name="Douwe Ravers" userId="c8d85bf50e360dd6" providerId="LiveId" clId="{581F2EE1-DDE8-4C81-8886-E39EC1CD3DCF}" dt="2023-05-01T02:16:53.903" v="2156" actId="1076"/>
+          <ac:picMkLst>
+            <pc:docMk/>
+            <pc:sldMk cId="120876259" sldId="262"/>
+            <ac:picMk id="85" creationId="{E2A9E910-5FD3-2182-5DE3-98B3D793B766}"/>
+          </ac:picMkLst>
+        </pc:picChg>
+        <pc:picChg chg="add mod">
+          <ac:chgData name="Douwe Ravers" userId="c8d85bf50e360dd6" providerId="LiveId" clId="{581F2EE1-DDE8-4C81-8886-E39EC1CD3DCF}" dt="2023-05-01T02:16:53.903" v="2156" actId="1076"/>
+          <ac:picMkLst>
+            <pc:docMk/>
+            <pc:sldMk cId="120876259" sldId="262"/>
+            <ac:picMk id="86" creationId="{4970C3D1-FEDB-8BF7-604D-B463C5488122}"/>
+          </ac:picMkLst>
+        </pc:picChg>
+        <pc:picChg chg="add del mod">
+          <ac:chgData name="Douwe Ravers" userId="c8d85bf50e360dd6" providerId="LiveId" clId="{581F2EE1-DDE8-4C81-8886-E39EC1CD3DCF}" dt="2023-05-01T02:17:09.140" v="2161"/>
+          <ac:picMkLst>
+            <pc:docMk/>
+            <pc:sldMk cId="120876259" sldId="262"/>
+            <ac:picMk id="87" creationId="{9EDC7B1F-032E-FCB1-467F-4AE5EEB1B010}"/>
+          </ac:picMkLst>
+        </pc:picChg>
+      </pc:sldChg>
+      <pc:sldChg chg="modSp add mod ord">
+        <pc:chgData name="Douwe Ravers" userId="c8d85bf50e360dd6" providerId="LiveId" clId="{581F2EE1-DDE8-4C81-8886-E39EC1CD3DCF}" dt="2023-05-01T02:19:49.497" v="2209"/>
+        <pc:sldMkLst>
+          <pc:docMk/>
+          <pc:sldMk cId="2102838215" sldId="263"/>
+        </pc:sldMkLst>
+        <pc:spChg chg="mod">
+          <ac:chgData name="Douwe Ravers" userId="c8d85bf50e360dd6" providerId="LiveId" clId="{581F2EE1-DDE8-4C81-8886-E39EC1CD3DCF}" dt="2023-05-01T02:19:44.086" v="2207" actId="20577"/>
+          <ac:spMkLst>
+            <pc:docMk/>
+            <pc:sldMk cId="2102838215" sldId="263"/>
+            <ac:spMk id="16" creationId="{3F3DD1B3-A258-09E7-BD25-DC226463AB84}"/>
+          </ac:spMkLst>
+        </pc:spChg>
+        <pc:spChg chg="mod">
+          <ac:chgData name="Douwe Ravers" userId="c8d85bf50e360dd6" providerId="LiveId" clId="{581F2EE1-DDE8-4C81-8886-E39EC1CD3DCF}" dt="2023-05-01T02:19:21.726" v="2193" actId="20577"/>
+          <ac:spMkLst>
+            <pc:docMk/>
+            <pc:sldMk cId="2102838215" sldId="263"/>
+            <ac:spMk id="27" creationId="{9E7FEB4B-8C21-7BC1-637A-85DA14D9DCAD}"/>
+          </ac:spMkLst>
+        </pc:spChg>
+        <pc:spChg chg="mod">
+          <ac:chgData name="Douwe Ravers" userId="c8d85bf50e360dd6" providerId="LiveId" clId="{581F2EE1-DDE8-4C81-8886-E39EC1CD3DCF}" dt="2023-05-01T02:19:28.278" v="2199" actId="20577"/>
+          <ac:spMkLst>
+            <pc:docMk/>
+            <pc:sldMk cId="2102838215" sldId="263"/>
+            <ac:spMk id="31" creationId="{68159FC1-D87C-3201-A944-B9132F05CC85}"/>
+          </ac:spMkLst>
+        </pc:spChg>
+      </pc:sldChg>
+      <pc:sldChg chg="addSp delSp modSp add mod">
+        <pc:chgData name="Douwe Ravers" userId="c8d85bf50e360dd6" providerId="LiveId" clId="{581F2EE1-DDE8-4C81-8886-E39EC1CD3DCF}" dt="2023-05-01T02:34:02.139" v="2695" actId="20577"/>
+        <pc:sldMkLst>
+          <pc:docMk/>
+          <pc:sldMk cId="3973355849" sldId="264"/>
+        </pc:sldMkLst>
+        <pc:spChg chg="add mod">
+          <ac:chgData name="Douwe Ravers" userId="c8d85bf50e360dd6" providerId="LiveId" clId="{581F2EE1-DDE8-4C81-8886-E39EC1CD3DCF}" dt="2023-05-01T02:30:12.089" v="2569" actId="14100"/>
+          <ac:spMkLst>
+            <pc:docMk/>
+            <pc:sldMk cId="3973355849" sldId="264"/>
+            <ac:spMk id="6" creationId="{ED418043-F533-AA21-C31D-C58E4671A37B}"/>
+          </ac:spMkLst>
+        </pc:spChg>
+        <pc:spChg chg="mod">
+          <ac:chgData name="Douwe Ravers" userId="c8d85bf50e360dd6" providerId="LiveId" clId="{581F2EE1-DDE8-4C81-8886-E39EC1CD3DCF}" dt="2023-05-01T02:34:02.139" v="2695" actId="20577"/>
+          <ac:spMkLst>
+            <pc:docMk/>
+            <pc:sldMk cId="3973355849" sldId="264"/>
+            <ac:spMk id="11" creationId="{13A726F4-4F1A-0E43-5DDB-DF59D3337A06}"/>
+          </ac:spMkLst>
+        </pc:spChg>
+        <pc:spChg chg="add mod">
+          <ac:chgData name="Douwe Ravers" userId="c8d85bf50e360dd6" providerId="LiveId" clId="{581F2EE1-DDE8-4C81-8886-E39EC1CD3DCF}" dt="2023-05-01T02:33:47.603" v="2683" actId="20577"/>
+          <ac:spMkLst>
+            <pc:docMk/>
+            <pc:sldMk cId="3973355849" sldId="264"/>
+            <ac:spMk id="21" creationId="{E3456EDC-9697-DDA1-CFC6-F76EB56FECB2}"/>
+          </ac:spMkLst>
+        </pc:spChg>
+        <pc:spChg chg="del">
+          <ac:chgData name="Douwe Ravers" userId="c8d85bf50e360dd6" providerId="LiveId" clId="{581F2EE1-DDE8-4C81-8886-E39EC1CD3DCF}" dt="2023-05-01T02:25:51.306" v="2407" actId="478"/>
+          <ac:spMkLst>
+            <pc:docMk/>
+            <pc:sldMk cId="3973355849" sldId="264"/>
+            <ac:spMk id="28" creationId="{56F32BB4-0588-9479-87F5-A94FC57CE143}"/>
+          </ac:spMkLst>
+        </pc:spChg>
+        <pc:spChg chg="add mod">
+          <ac:chgData name="Douwe Ravers" userId="c8d85bf50e360dd6" providerId="LiveId" clId="{581F2EE1-DDE8-4C81-8886-E39EC1CD3DCF}" dt="2023-05-01T02:33:53.787" v="2692" actId="20577"/>
+          <ac:spMkLst>
+            <pc:docMk/>
+            <pc:sldMk cId="3973355849" sldId="264"/>
+            <ac:spMk id="35" creationId="{15956298-A9C9-8929-1952-E0F1F00B2E8D}"/>
+          </ac:spMkLst>
+        </pc:spChg>
+        <pc:spChg chg="add del mod">
+          <ac:chgData name="Douwe Ravers" userId="c8d85bf50e360dd6" providerId="LiveId" clId="{581F2EE1-DDE8-4C81-8886-E39EC1CD3DCF}" dt="2023-05-01T02:32:30.197" v="2643" actId="478"/>
+          <ac:spMkLst>
+            <pc:docMk/>
+            <pc:sldMk cId="3973355849" sldId="264"/>
+            <ac:spMk id="36" creationId="{B2A98948-EB01-09F6-5815-687ED52D07F1}"/>
+          </ac:spMkLst>
+        </pc:spChg>
+        <pc:spChg chg="del">
+          <ac:chgData name="Douwe Ravers" userId="c8d85bf50e360dd6" providerId="LiveId" clId="{581F2EE1-DDE8-4C81-8886-E39EC1CD3DCF}" dt="2023-05-01T02:25:51.306" v="2407" actId="478"/>
+          <ac:spMkLst>
+            <pc:docMk/>
+            <pc:sldMk cId="3973355849" sldId="264"/>
+            <ac:spMk id="40" creationId="{0F952BF5-8A32-C9CE-4E04-012F7D549246}"/>
+          </ac:spMkLst>
+        </pc:spChg>
+        <pc:spChg chg="del">
+          <ac:chgData name="Douwe Ravers" userId="c8d85bf50e360dd6" providerId="LiveId" clId="{581F2EE1-DDE8-4C81-8886-E39EC1CD3DCF}" dt="2023-05-01T02:25:51.306" v="2407" actId="478"/>
+          <ac:spMkLst>
+            <pc:docMk/>
+            <pc:sldMk cId="3973355849" sldId="264"/>
+            <ac:spMk id="43" creationId="{11A47190-729D-5173-D8F2-D8C7B3148A15}"/>
+          </ac:spMkLst>
+        </pc:spChg>
+        <pc:spChg chg="del">
+          <ac:chgData name="Douwe Ravers" userId="c8d85bf50e360dd6" providerId="LiveId" clId="{581F2EE1-DDE8-4C81-8886-E39EC1CD3DCF}" dt="2023-05-01T02:25:55.018" v="2408" actId="478"/>
+          <ac:spMkLst>
+            <pc:docMk/>
+            <pc:sldMk cId="3973355849" sldId="264"/>
+            <ac:spMk id="45" creationId="{104A2BE1-4377-9F5D-6BC7-CA4206DD0B9F}"/>
+          </ac:spMkLst>
+        </pc:spChg>
+        <pc:spChg chg="add mod">
+          <ac:chgData name="Douwe Ravers" userId="c8d85bf50e360dd6" providerId="LiveId" clId="{581F2EE1-DDE8-4C81-8886-E39EC1CD3DCF}" dt="2023-05-01T02:33:17.797" v="2669" actId="1076"/>
+          <ac:spMkLst>
+            <pc:docMk/>
+            <pc:sldMk cId="3973355849" sldId="264"/>
+            <ac:spMk id="47" creationId="{4F1665DC-2339-4FC9-B424-A914CD2158F5}"/>
+          </ac:spMkLst>
+        </pc:spChg>
+        <pc:picChg chg="add mod">
+          <ac:chgData name="Douwe Ravers" userId="c8d85bf50e360dd6" providerId="LiveId" clId="{581F2EE1-DDE8-4C81-8886-E39EC1CD3DCF}" dt="2023-05-01T02:30:00.067" v="2566" actId="1076"/>
+          <ac:picMkLst>
+            <pc:docMk/>
+            <pc:sldMk cId="3973355849" sldId="264"/>
+            <ac:picMk id="3" creationId="{79F3D753-1D10-0877-604F-1C31BC9F902A}"/>
+          </ac:picMkLst>
+        </pc:picChg>
+        <pc:picChg chg="del">
+          <ac:chgData name="Douwe Ravers" userId="c8d85bf50e360dd6" providerId="LiveId" clId="{581F2EE1-DDE8-4C81-8886-E39EC1CD3DCF}" dt="2023-05-01T02:25:51.306" v="2407" actId="478"/>
+          <ac:picMkLst>
+            <pc:docMk/>
+            <pc:sldMk cId="3973355849" sldId="264"/>
+            <ac:picMk id="5" creationId="{76A748E9-8F3C-64D1-C33F-FB15325BB823}"/>
+          </ac:picMkLst>
+        </pc:picChg>
+        <pc:picChg chg="add mod">
+          <ac:chgData name="Douwe Ravers" userId="c8d85bf50e360dd6" providerId="LiveId" clId="{581F2EE1-DDE8-4C81-8886-E39EC1CD3DCF}" dt="2023-05-01T02:28:24.173" v="2499" actId="1076"/>
+          <ac:picMkLst>
+            <pc:docMk/>
+            <pc:sldMk cId="3973355849" sldId="264"/>
+            <ac:picMk id="8" creationId="{EF372B1B-0308-2F75-A9D9-D9DB95C5EEDF}"/>
+          </ac:picMkLst>
+        </pc:picChg>
+        <pc:picChg chg="del">
+          <ac:chgData name="Douwe Ravers" userId="c8d85bf50e360dd6" providerId="LiveId" clId="{581F2EE1-DDE8-4C81-8886-E39EC1CD3DCF}" dt="2023-05-01T02:25:58.177" v="2409" actId="478"/>
+          <ac:picMkLst>
+            <pc:docMk/>
+            <pc:sldMk cId="3973355849" sldId="264"/>
+            <ac:picMk id="10" creationId="{B076ECC6-592E-55A7-5817-C363C4C411BA}"/>
+          </ac:picMkLst>
+        </pc:picChg>
+        <pc:picChg chg="add mod">
+          <ac:chgData name="Douwe Ravers" userId="c8d85bf50e360dd6" providerId="LiveId" clId="{581F2EE1-DDE8-4C81-8886-E39EC1CD3DCF}" dt="2023-05-01T02:28:19.876" v="2497" actId="1076"/>
+          <ac:picMkLst>
+            <pc:docMk/>
+            <pc:sldMk cId="3973355849" sldId="264"/>
+            <ac:picMk id="12" creationId="{DB4F5DB8-E8EA-E683-A0EA-05886AF963D0}"/>
+          </ac:picMkLst>
+        </pc:picChg>
+        <pc:picChg chg="add mod">
+          <ac:chgData name="Douwe Ravers" userId="c8d85bf50e360dd6" providerId="LiveId" clId="{581F2EE1-DDE8-4C81-8886-E39EC1CD3DCF}" dt="2023-05-01T02:28:28.978" v="2501" actId="1076"/>
+          <ac:picMkLst>
+            <pc:docMk/>
+            <pc:sldMk cId="3973355849" sldId="264"/>
+            <ac:picMk id="14" creationId="{5C87BB0F-07C5-F933-74F5-84911194E1C1}"/>
+          </ac:picMkLst>
+        </pc:picChg>
+        <pc:picChg chg="add mod">
+          <ac:chgData name="Douwe Ravers" userId="c8d85bf50e360dd6" providerId="LiveId" clId="{581F2EE1-DDE8-4C81-8886-E39EC1CD3DCF}" dt="2023-05-01T02:28:38.947" v="2505" actId="1076"/>
+          <ac:picMkLst>
+            <pc:docMk/>
+            <pc:sldMk cId="3973355849" sldId="264"/>
+            <ac:picMk id="15" creationId="{DDD14D9C-17C3-7625-5987-7D59A8BF89F2}"/>
+          </ac:picMkLst>
+        </pc:picChg>
+        <pc:picChg chg="add mod">
+          <ac:chgData name="Douwe Ravers" userId="c8d85bf50e360dd6" providerId="LiveId" clId="{581F2EE1-DDE8-4C81-8886-E39EC1CD3DCF}" dt="2023-05-01T02:29:14.657" v="2523" actId="1076"/>
+          <ac:picMkLst>
+            <pc:docMk/>
+            <pc:sldMk cId="3973355849" sldId="264"/>
+            <ac:picMk id="17" creationId="{D031EAE9-5171-5A7C-1691-F0E2BBB02691}"/>
+          </ac:picMkLst>
+        </pc:picChg>
+        <pc:picChg chg="add mod">
+          <ac:chgData name="Douwe Ravers" userId="c8d85bf50e360dd6" providerId="LiveId" clId="{581F2EE1-DDE8-4C81-8886-E39EC1CD3DCF}" dt="2023-05-01T02:29:11.476" v="2522" actId="1076"/>
+          <ac:picMkLst>
+            <pc:docMk/>
+            <pc:sldMk cId="3973355849" sldId="264"/>
+            <ac:picMk id="18" creationId="{2F951A08-82AA-909E-3614-9C05DB68647B}"/>
+          </ac:picMkLst>
+        </pc:picChg>
+        <pc:picChg chg="add del mod">
+          <ac:chgData name="Douwe Ravers" userId="c8d85bf50e360dd6" providerId="LiveId" clId="{581F2EE1-DDE8-4C81-8886-E39EC1CD3DCF}" dt="2023-05-01T02:28:59.587" v="2513" actId="478"/>
+          <ac:picMkLst>
+            <pc:docMk/>
+            <pc:sldMk cId="3973355849" sldId="264"/>
+            <ac:picMk id="19" creationId="{D333D2B5-0AEA-8FFA-94EC-459986AD3552}"/>
+          </ac:picMkLst>
+        </pc:picChg>
+        <pc:picChg chg="add mod">
+          <ac:chgData name="Douwe Ravers" userId="c8d85bf50e360dd6" providerId="LiveId" clId="{581F2EE1-DDE8-4C81-8886-E39EC1CD3DCF}" dt="2023-05-01T02:29:04.799" v="2517" actId="1076"/>
+          <ac:picMkLst>
+            <pc:docMk/>
+            <pc:sldMk cId="3973355849" sldId="264"/>
+            <ac:picMk id="20" creationId="{22BF553D-245D-BC9B-6707-DD97A7889831}"/>
+          </ac:picMkLst>
+        </pc:picChg>
+        <pc:picChg chg="add mod">
+          <ac:chgData name="Douwe Ravers" userId="c8d85bf50e360dd6" providerId="LiveId" clId="{581F2EE1-DDE8-4C81-8886-E39EC1CD3DCF}" dt="2023-05-01T02:32:11.213" v="2638" actId="1076"/>
+          <ac:picMkLst>
+            <pc:docMk/>
+            <pc:sldMk cId="3973355849" sldId="264"/>
+            <ac:picMk id="22" creationId="{8FDEEF21-5766-14A6-EBA9-5BF60613A93C}"/>
+          </ac:picMkLst>
+        </pc:picChg>
+        <pc:picChg chg="add mod">
+          <ac:chgData name="Douwe Ravers" userId="c8d85bf50e360dd6" providerId="LiveId" clId="{581F2EE1-DDE8-4C81-8886-E39EC1CD3DCF}" dt="2023-05-01T02:32:11.213" v="2638" actId="1076"/>
+          <ac:picMkLst>
+            <pc:docMk/>
+            <pc:sldMk cId="3973355849" sldId="264"/>
+            <ac:picMk id="23" creationId="{69242735-5BD2-4BD6-9066-1F0D1FC3C017}"/>
+          </ac:picMkLst>
+        </pc:picChg>
+        <pc:picChg chg="add mod">
+          <ac:chgData name="Douwe Ravers" userId="c8d85bf50e360dd6" providerId="LiveId" clId="{581F2EE1-DDE8-4C81-8886-E39EC1CD3DCF}" dt="2023-05-01T02:32:07.599" v="2637" actId="1076"/>
+          <ac:picMkLst>
+            <pc:docMk/>
+            <pc:sldMk cId="3973355849" sldId="264"/>
+            <ac:picMk id="24" creationId="{FCAD6655-ECB7-126E-4C33-C685ADC5E892}"/>
+          </ac:picMkLst>
+        </pc:picChg>
+        <pc:picChg chg="del">
+          <ac:chgData name="Douwe Ravers" userId="c8d85bf50e360dd6" providerId="LiveId" clId="{581F2EE1-DDE8-4C81-8886-E39EC1CD3DCF}" dt="2023-05-01T02:25:51.306" v="2407" actId="478"/>
+          <ac:picMkLst>
+            <pc:docMk/>
+            <pc:sldMk cId="3973355849" sldId="264"/>
+            <ac:picMk id="25" creationId="{D68D6AB6-9E6A-E765-5D96-AC979A71DFEC}"/>
+          </ac:picMkLst>
+        </pc:picChg>
+        <pc:picChg chg="add del mod">
+          <ac:chgData name="Douwe Ravers" userId="c8d85bf50e360dd6" providerId="LiveId" clId="{581F2EE1-DDE8-4C81-8886-E39EC1CD3DCF}" dt="2023-05-01T02:30:43.216" v="2576" actId="478"/>
+          <ac:picMkLst>
+            <pc:docMk/>
+            <pc:sldMk cId="3973355849" sldId="264"/>
+            <ac:picMk id="26" creationId="{9EA3522C-5A82-ECDE-3C8B-F4D21C4A7702}"/>
+          </ac:picMkLst>
+        </pc:picChg>
+        <pc:picChg chg="add mod">
+          <ac:chgData name="Douwe Ravers" userId="c8d85bf50e360dd6" providerId="LiveId" clId="{581F2EE1-DDE8-4C81-8886-E39EC1CD3DCF}" dt="2023-05-01T02:32:04.315" v="2636" actId="1076"/>
+          <ac:picMkLst>
+            <pc:docMk/>
+            <pc:sldMk cId="3973355849" sldId="264"/>
+            <ac:picMk id="27" creationId="{28C2CF6A-4C3B-018A-A1E0-6298D75C579E}"/>
+          </ac:picMkLst>
+        </pc:picChg>
+        <pc:picChg chg="add del mod">
+          <ac:chgData name="Douwe Ravers" userId="c8d85bf50e360dd6" providerId="LiveId" clId="{581F2EE1-DDE8-4C81-8886-E39EC1CD3DCF}" dt="2023-05-01T02:30:43.216" v="2576" actId="478"/>
+          <ac:picMkLst>
+            <pc:docMk/>
+            <pc:sldMk cId="3973355849" sldId="264"/>
+            <ac:picMk id="29" creationId="{0F07ED42-5AB4-16C9-AC82-C7994586C3EC}"/>
+          </ac:picMkLst>
+        </pc:picChg>
+        <pc:picChg chg="add mod">
+          <ac:chgData name="Douwe Ravers" userId="c8d85bf50e360dd6" providerId="LiveId" clId="{581F2EE1-DDE8-4C81-8886-E39EC1CD3DCF}" dt="2023-05-01T02:32:07.599" v="2637" actId="1076"/>
+          <ac:picMkLst>
+            <pc:docMk/>
+            <pc:sldMk cId="3973355849" sldId="264"/>
+            <ac:picMk id="31" creationId="{08B273DA-8E8E-BC16-8DDE-FE2693233FA6}"/>
+          </ac:picMkLst>
+        </pc:picChg>
+        <pc:picChg chg="del">
+          <ac:chgData name="Douwe Ravers" userId="c8d85bf50e360dd6" providerId="LiveId" clId="{581F2EE1-DDE8-4C81-8886-E39EC1CD3DCF}" dt="2023-05-01T02:25:58.177" v="2409" actId="478"/>
+          <ac:picMkLst>
+            <pc:docMk/>
+            <pc:sldMk cId="3973355849" sldId="264"/>
+            <ac:picMk id="33" creationId="{D447A3EA-0D33-FC3C-8718-6D957CBD5D7F}"/>
+          </ac:picMkLst>
+        </pc:picChg>
+        <pc:picChg chg="add mod">
+          <ac:chgData name="Douwe Ravers" userId="c8d85bf50e360dd6" providerId="LiveId" clId="{581F2EE1-DDE8-4C81-8886-E39EC1CD3DCF}" dt="2023-05-01T02:32:04.315" v="2636" actId="1076"/>
+          <ac:picMkLst>
+            <pc:docMk/>
+            <pc:sldMk cId="3973355849" sldId="264"/>
+            <ac:picMk id="34" creationId="{DA980B16-8677-04A4-7D5D-BBC8E8F10F71}"/>
+          </ac:picMkLst>
+        </pc:picChg>
+        <pc:picChg chg="add mod">
+          <ac:chgData name="Douwe Ravers" userId="c8d85bf50e360dd6" providerId="LiveId" clId="{581F2EE1-DDE8-4C81-8886-E39EC1CD3DCF}" dt="2023-05-01T02:33:21.553" v="2670" actId="1076"/>
+          <ac:picMkLst>
+            <pc:docMk/>
+            <pc:sldMk cId="3973355849" sldId="264"/>
+            <ac:picMk id="37" creationId="{BEA9BBB8-FFEA-EFEF-6AFD-0ECA81E8C1DF}"/>
+          </ac:picMkLst>
+        </pc:picChg>
+        <pc:picChg chg="del">
+          <ac:chgData name="Douwe Ravers" userId="c8d85bf50e360dd6" providerId="LiveId" clId="{581F2EE1-DDE8-4C81-8886-E39EC1CD3DCF}" dt="2023-05-01T02:25:51.306" v="2407" actId="478"/>
+          <ac:picMkLst>
+            <pc:docMk/>
+            <pc:sldMk cId="3973355849" sldId="264"/>
+            <ac:picMk id="38" creationId="{C9B8EBE7-3BE2-AD9B-B8D3-E0D010809725}"/>
+          </ac:picMkLst>
+        </pc:picChg>
+        <pc:picChg chg="del">
+          <ac:chgData name="Douwe Ravers" userId="c8d85bf50e360dd6" providerId="LiveId" clId="{581F2EE1-DDE8-4C81-8886-E39EC1CD3DCF}" dt="2023-05-01T02:25:51.306" v="2407" actId="478"/>
+          <ac:picMkLst>
+            <pc:docMk/>
+            <pc:sldMk cId="3973355849" sldId="264"/>
+            <ac:picMk id="39" creationId="{0A8A5695-55CE-6220-FB3B-CD6252811681}"/>
+          </ac:picMkLst>
+        </pc:picChg>
+        <pc:picChg chg="add mod">
+          <ac:chgData name="Douwe Ravers" userId="c8d85bf50e360dd6" providerId="LiveId" clId="{581F2EE1-DDE8-4C81-8886-E39EC1CD3DCF}" dt="2023-05-01T02:33:21.553" v="2670" actId="1076"/>
+          <ac:picMkLst>
+            <pc:docMk/>
+            <pc:sldMk cId="3973355849" sldId="264"/>
+            <ac:picMk id="41" creationId="{E205D2B8-22EB-D2D1-4CE7-654133A7B626}"/>
+          </ac:picMkLst>
+        </pc:picChg>
+        <pc:picChg chg="del">
+          <ac:chgData name="Douwe Ravers" userId="c8d85bf50e360dd6" providerId="LiveId" clId="{581F2EE1-DDE8-4C81-8886-E39EC1CD3DCF}" dt="2023-05-01T02:25:51.306" v="2407" actId="478"/>
+          <ac:picMkLst>
+            <pc:docMk/>
+            <pc:sldMk cId="3973355849" sldId="264"/>
+            <ac:picMk id="42" creationId="{F884CF73-0A51-FB77-1240-2834495DC33C}"/>
+          </ac:picMkLst>
+        </pc:picChg>
+        <pc:picChg chg="del">
+          <ac:chgData name="Douwe Ravers" userId="c8d85bf50e360dd6" providerId="LiveId" clId="{581F2EE1-DDE8-4C81-8886-E39EC1CD3DCF}" dt="2023-05-01T02:25:51.306" v="2407" actId="478"/>
+          <ac:picMkLst>
+            <pc:docMk/>
+            <pc:sldMk cId="3973355849" sldId="264"/>
+            <ac:picMk id="44" creationId="{84860609-A298-E69D-C903-42A745EE6143}"/>
+          </ac:picMkLst>
+        </pc:picChg>
+        <pc:picChg chg="del">
+          <ac:chgData name="Douwe Ravers" userId="c8d85bf50e360dd6" providerId="LiveId" clId="{581F2EE1-DDE8-4C81-8886-E39EC1CD3DCF}" dt="2023-05-01T02:25:51.306" v="2407" actId="478"/>
+          <ac:picMkLst>
+            <pc:docMk/>
+            <pc:sldMk cId="3973355849" sldId="264"/>
+            <ac:picMk id="46" creationId="{24F4D718-0357-BC0F-640B-3EAD2D35C213}"/>
+          </ac:picMkLst>
+        </pc:picChg>
+        <pc:picChg chg="add mod">
+          <ac:chgData name="Douwe Ravers" userId="c8d85bf50e360dd6" providerId="LiveId" clId="{581F2EE1-DDE8-4C81-8886-E39EC1CD3DCF}" dt="2023-05-01T02:33:24.070" v="2672" actId="1076"/>
+          <ac:picMkLst>
+            <pc:docMk/>
+            <pc:sldMk cId="3973355849" sldId="264"/>
+            <ac:picMk id="48" creationId="{7653418C-4D7F-DE3C-45FD-6F1B449E1B90}"/>
+          </ac:picMkLst>
+        </pc:picChg>
+        <pc:picChg chg="add del mod">
+          <ac:chgData name="Douwe Ravers" userId="c8d85bf50e360dd6" providerId="LiveId" clId="{581F2EE1-DDE8-4C81-8886-E39EC1CD3DCF}" dt="2023-05-01T02:33:26.610" v="2673" actId="478"/>
+          <ac:picMkLst>
+            <pc:docMk/>
+            <pc:sldMk cId="3973355849" sldId="264"/>
+            <ac:picMk id="49" creationId="{5F7FD3DE-93B1-9FB7-410D-B64B478370E0}"/>
+          </ac:picMkLst>
+        </pc:picChg>
+        <pc:picChg chg="add mod">
+          <ac:chgData name="Douwe Ravers" userId="c8d85bf50e360dd6" providerId="LiveId" clId="{581F2EE1-DDE8-4C81-8886-E39EC1CD3DCF}" dt="2023-05-01T02:33:36.964" v="2677" actId="1076"/>
+          <ac:picMkLst>
+            <pc:docMk/>
+            <pc:sldMk cId="3973355849" sldId="264"/>
+            <ac:picMk id="50" creationId="{B8BF6EFD-6E57-E5A4-B59E-7B6FD4BB0D16}"/>
+          </ac:picMkLst>
+        </pc:picChg>
+        <pc:picChg chg="mod">
+          <ac:chgData name="Douwe Ravers" userId="c8d85bf50e360dd6" providerId="LiveId" clId="{581F2EE1-DDE8-4C81-8886-E39EC1CD3DCF}" dt="2023-05-01T02:30:03.866" v="2568" actId="1076"/>
+          <ac:picMkLst>
+            <pc:docMk/>
+            <pc:sldMk cId="3973355849" sldId="264"/>
+            <ac:picMk id="59" creationId="{7227C457-22E8-C992-7ADF-D83C086C8EF7}"/>
           </ac:picMkLst>
         </pc:picChg>
       </pc:sldChg>
@@ -1646,7 +2926,7 @@
           <a:p>
             <a:fld id="{ED3CD964-667C-461F-8BA0-24C0A81EF331}" type="datetimeFigureOut">
               <a:rPr lang="en-US" smtClean="0"/>
-              <a:t>4/30/2023</a:t>
+              <a:t>5/1/2023</a:t>
             </a:fld>
             <a:endParaRPr lang="en-US"/>
           </a:p>
@@ -1844,7 +3124,7 @@
           <a:p>
             <a:fld id="{ED3CD964-667C-461F-8BA0-24C0A81EF331}" type="datetimeFigureOut">
               <a:rPr lang="en-US" smtClean="0"/>
-              <a:t>4/30/2023</a:t>
+              <a:t>5/1/2023</a:t>
             </a:fld>
             <a:endParaRPr lang="en-US"/>
           </a:p>
@@ -2052,7 +3332,7 @@
           <a:p>
             <a:fld id="{ED3CD964-667C-461F-8BA0-24C0A81EF331}" type="datetimeFigureOut">
               <a:rPr lang="en-US" smtClean="0"/>
-              <a:t>4/30/2023</a:t>
+              <a:t>5/1/2023</a:t>
             </a:fld>
             <a:endParaRPr lang="en-US"/>
           </a:p>
@@ -2250,7 +3530,7 @@
           <a:p>
             <a:fld id="{ED3CD964-667C-461F-8BA0-24C0A81EF331}" type="datetimeFigureOut">
               <a:rPr lang="en-US" smtClean="0"/>
-              <a:t>4/30/2023</a:t>
+              <a:t>5/1/2023</a:t>
             </a:fld>
             <a:endParaRPr lang="en-US"/>
           </a:p>
@@ -2525,7 +3805,7 @@
           <a:p>
             <a:fld id="{ED3CD964-667C-461F-8BA0-24C0A81EF331}" type="datetimeFigureOut">
               <a:rPr lang="en-US" smtClean="0"/>
-              <a:t>4/30/2023</a:t>
+              <a:t>5/1/2023</a:t>
             </a:fld>
             <a:endParaRPr lang="en-US"/>
           </a:p>
@@ -2790,7 +4070,7 @@
           <a:p>
             <a:fld id="{ED3CD964-667C-461F-8BA0-24C0A81EF331}" type="datetimeFigureOut">
               <a:rPr lang="en-US" smtClean="0"/>
-              <a:t>4/30/2023</a:t>
+              <a:t>5/1/2023</a:t>
             </a:fld>
             <a:endParaRPr lang="en-US"/>
           </a:p>
@@ -3202,7 +4482,7 @@
           <a:p>
             <a:fld id="{ED3CD964-667C-461F-8BA0-24C0A81EF331}" type="datetimeFigureOut">
               <a:rPr lang="en-US" smtClean="0"/>
-              <a:t>4/30/2023</a:t>
+              <a:t>5/1/2023</a:t>
             </a:fld>
             <a:endParaRPr lang="en-US"/>
           </a:p>
@@ -3343,7 +4623,7 @@
           <a:p>
             <a:fld id="{ED3CD964-667C-461F-8BA0-24C0A81EF331}" type="datetimeFigureOut">
               <a:rPr lang="en-US" smtClean="0"/>
-              <a:t>4/30/2023</a:t>
+              <a:t>5/1/2023</a:t>
             </a:fld>
             <a:endParaRPr lang="en-US"/>
           </a:p>
@@ -3456,7 +4736,7 @@
           <a:p>
             <a:fld id="{ED3CD964-667C-461F-8BA0-24C0A81EF331}" type="datetimeFigureOut">
               <a:rPr lang="en-US" smtClean="0"/>
-              <a:t>4/30/2023</a:t>
+              <a:t>5/1/2023</a:t>
             </a:fld>
             <a:endParaRPr lang="en-US"/>
           </a:p>
@@ -3767,7 +5047,7 @@
           <a:p>
             <a:fld id="{ED3CD964-667C-461F-8BA0-24C0A81EF331}" type="datetimeFigureOut">
               <a:rPr lang="en-US" smtClean="0"/>
-              <a:t>4/30/2023</a:t>
+              <a:t>5/1/2023</a:t>
             </a:fld>
             <a:endParaRPr lang="en-US"/>
           </a:p>
@@ -4055,7 +5335,7 @@
           <a:p>
             <a:fld id="{ED3CD964-667C-461F-8BA0-24C0A81EF331}" type="datetimeFigureOut">
               <a:rPr lang="en-US" smtClean="0"/>
-              <a:t>4/30/2023</a:t>
+              <a:t>5/1/2023</a:t>
             </a:fld>
             <a:endParaRPr lang="en-US"/>
           </a:p>
@@ -4299,7 +5579,7 @@
           <a:p>
             <a:fld id="{ED3CD964-667C-461F-8BA0-24C0A81EF331}" type="datetimeFigureOut">
               <a:rPr lang="en-US" smtClean="0"/>
-              <a:t>4/30/2023</a:t>
+              <a:t>5/1/2023</a:t>
             </a:fld>
             <a:endParaRPr lang="en-US"/>
           </a:p>
@@ -4716,43 +5996,6 @@
           <a:chExt cx="0" cy="0"/>
         </a:xfrm>
       </p:grpSpPr>
-      <p:sp>
-        <p:nvSpPr>
-          <p:cNvPr id="2" name="Title 1">
-            <a:extLst>
-              <a:ext uri="{FF2B5EF4-FFF2-40B4-BE49-F238E27FC236}">
-                <a16:creationId xmlns:a16="http://schemas.microsoft.com/office/drawing/2014/main" id="{0C4DE95C-AF44-B196-31D1-911B992140AF}"/>
-              </a:ext>
-            </a:extLst>
-          </p:cNvPr>
-          <p:cNvSpPr>
-            <a:spLocks noGrp="1"/>
-          </p:cNvSpPr>
-          <p:nvPr>
-            <p:ph type="title"/>
-          </p:nvPr>
-        </p:nvSpPr>
-        <p:spPr>
-          <a:xfrm>
-            <a:off x="838200" y="365125"/>
-            <a:ext cx="4829175" cy="1325563"/>
-          </a:xfrm>
-        </p:spPr>
-        <p:txBody>
-          <a:bodyPr/>
-          <a:lstStyle/>
-          <a:p>
-            <a:r>
-              <a:rPr lang="en-US" b="1" dirty="0">
-                <a:solidFill>
-                  <a:schemeClr val="bg1"/>
-                </a:solidFill>
-              </a:rPr>
-              <a:t>Title of game</a:t>
-            </a:r>
-          </a:p>
-        </p:txBody>
-      </p:sp>
       <p:pic>
         <p:nvPicPr>
           <p:cNvPr id="5" name="Content Placeholder 4" descr="A picture containing toy&#10;&#10;Description automatically generated">
@@ -5128,6 +6371,78 @@
           </a:p>
         </p:txBody>
       </p:sp>
+      <p:pic>
+        <p:nvPicPr>
+          <p:cNvPr id="4" name="Picture 3" descr="Icon&#10;&#10;Description automatically generated with medium confidence">
+            <a:extLst>
+              <a:ext uri="{FF2B5EF4-FFF2-40B4-BE49-F238E27FC236}">
+                <a16:creationId xmlns:a16="http://schemas.microsoft.com/office/drawing/2014/main" id="{74427DB3-499E-1A89-2A22-96AC84760185}"/>
+              </a:ext>
+            </a:extLst>
+          </p:cNvPr>
+          <p:cNvPicPr>
+            <a:picLocks noChangeAspect="1"/>
+          </p:cNvPicPr>
+          <p:nvPr/>
+        </p:nvPicPr>
+        <p:blipFill>
+          <a:blip r:embed="rId5">
+            <a:extLst>
+              <a:ext uri="{28A0092B-C50C-407E-A947-70E740481C1C}">
+                <a14:useLocalDpi xmlns:a14="http://schemas.microsoft.com/office/drawing/2010/main" val="0"/>
+              </a:ext>
+            </a:extLst>
+          </a:blip>
+          <a:stretch>
+            <a:fillRect/>
+          </a:stretch>
+        </p:blipFill>
+        <p:spPr>
+          <a:xfrm>
+            <a:off x="281430" y="582116"/>
+            <a:ext cx="5338907" cy="1158087"/>
+          </a:xfrm>
+          <a:prstGeom prst="rect">
+            <a:avLst/>
+          </a:prstGeom>
+        </p:spPr>
+      </p:pic>
+      <p:pic>
+        <p:nvPicPr>
+          <p:cNvPr id="17" name="Picture 16" descr="Icon&#10;&#10;Description automatically generated">
+            <a:extLst>
+              <a:ext uri="{FF2B5EF4-FFF2-40B4-BE49-F238E27FC236}">
+                <a16:creationId xmlns:a16="http://schemas.microsoft.com/office/drawing/2014/main" id="{B773132E-8259-5D60-8871-3A32AAD3770F}"/>
+              </a:ext>
+            </a:extLst>
+          </p:cNvPr>
+          <p:cNvPicPr>
+            <a:picLocks noChangeAspect="1"/>
+          </p:cNvPicPr>
+          <p:nvPr/>
+        </p:nvPicPr>
+        <p:blipFill>
+          <a:blip r:embed="rId6">
+            <a:extLst>
+              <a:ext uri="{28A0092B-C50C-407E-A947-70E740481C1C}">
+                <a14:useLocalDpi xmlns:a14="http://schemas.microsoft.com/office/drawing/2010/main" val="0"/>
+              </a:ext>
+            </a:extLst>
+          </a:blip>
+          <a:stretch>
+            <a:fillRect/>
+          </a:stretch>
+        </p:blipFill>
+        <p:spPr>
+          <a:xfrm>
+            <a:off x="11033185" y="5699185"/>
+            <a:ext cx="1158815" cy="1158815"/>
+          </a:xfrm>
+          <a:prstGeom prst="rect">
+            <a:avLst/>
+          </a:prstGeom>
+        </p:spPr>
+      </p:pic>
     </p:spTree>
     <p:extLst>
       <p:ext uri="{BB962C8B-B14F-4D97-AF65-F5344CB8AC3E}">
@@ -6044,6 +7359,130 @@
           </a:p>
         </p:txBody>
       </p:sp>
+      <p:pic>
+        <p:nvPicPr>
+          <p:cNvPr id="6" name="Picture 5" descr="Icon&#10;&#10;Description automatically generated">
+            <a:extLst>
+              <a:ext uri="{FF2B5EF4-FFF2-40B4-BE49-F238E27FC236}">
+                <a16:creationId xmlns:a16="http://schemas.microsoft.com/office/drawing/2014/main" id="{5FC0299F-22C8-9EB0-C955-9DF0E24113FB}"/>
+              </a:ext>
+            </a:extLst>
+          </p:cNvPr>
+          <p:cNvPicPr>
+            <a:picLocks noChangeAspect="1"/>
+          </p:cNvPicPr>
+          <p:nvPr/>
+        </p:nvPicPr>
+        <p:blipFill>
+          <a:blip r:embed="rId14">
+            <a:extLst>
+              <a:ext uri="{28A0092B-C50C-407E-A947-70E740481C1C}">
+                <a14:useLocalDpi xmlns:a14="http://schemas.microsoft.com/office/drawing/2010/main" val="0"/>
+              </a:ext>
+            </a:extLst>
+          </a:blip>
+          <a:stretch>
+            <a:fillRect/>
+          </a:stretch>
+        </p:blipFill>
+        <p:spPr>
+          <a:xfrm>
+            <a:off x="11033185" y="5699185"/>
+            <a:ext cx="1158815" cy="1158815"/>
+          </a:xfrm>
+          <a:prstGeom prst="rect">
+            <a:avLst/>
+          </a:prstGeom>
+        </p:spPr>
+      </p:pic>
+      <p:pic>
+        <p:nvPicPr>
+          <p:cNvPr id="4" name="Graphic 3" descr="Badge 9 with solid fill">
+            <a:extLst>
+              <a:ext uri="{FF2B5EF4-FFF2-40B4-BE49-F238E27FC236}">
+                <a16:creationId xmlns:a16="http://schemas.microsoft.com/office/drawing/2014/main" id="{C5B7A151-0943-9407-8E7E-F275595CD0C2}"/>
+              </a:ext>
+            </a:extLst>
+          </p:cNvPr>
+          <p:cNvPicPr>
+            <a:picLocks noChangeAspect="1"/>
+          </p:cNvPicPr>
+          <p:nvPr/>
+        </p:nvPicPr>
+        <p:blipFill>
+          <a:blip r:embed="rId15">
+            <a:extLst>
+              <a:ext uri="{28A0092B-C50C-407E-A947-70E740481C1C}">
+                <a14:useLocalDpi xmlns:a14="http://schemas.microsoft.com/office/drawing/2010/main" val="0"/>
+              </a:ext>
+              <a:ext uri="{96DAC541-7B7A-43D3-8B79-37D633B846F1}">
+                <asvg:svgBlip xmlns:asvg="http://schemas.microsoft.com/office/drawing/2016/SVG/main" r:embed="rId16"/>
+              </a:ext>
+            </a:extLst>
+          </a:blip>
+          <a:stretch>
+            <a:fillRect/>
+          </a:stretch>
+        </p:blipFill>
+        <p:spPr>
+          <a:xfrm>
+            <a:off x="6856404" y="5610160"/>
+            <a:ext cx="914400" cy="914400"/>
+          </a:xfrm>
+          <a:prstGeom prst="rect">
+            <a:avLst/>
+          </a:prstGeom>
+        </p:spPr>
+      </p:pic>
+      <p:sp>
+        <p:nvSpPr>
+          <p:cNvPr id="5" name="TextBox 4">
+            <a:extLst>
+              <a:ext uri="{FF2B5EF4-FFF2-40B4-BE49-F238E27FC236}">
+                <a16:creationId xmlns:a16="http://schemas.microsoft.com/office/drawing/2014/main" id="{417C88E7-183E-F4DB-7BB0-4099CF3D538A}"/>
+              </a:ext>
+            </a:extLst>
+          </p:cNvPr>
+          <p:cNvSpPr txBox="1"/>
+          <p:nvPr/>
+        </p:nvSpPr>
+        <p:spPr>
+          <a:xfrm>
+            <a:off x="8093406" y="5623866"/>
+            <a:ext cx="2911438" cy="923330"/>
+          </a:xfrm>
+          <a:prstGeom prst="rect">
+            <a:avLst/>
+          </a:prstGeom>
+          <a:noFill/>
+        </p:spPr>
+        <p:txBody>
+          <a:bodyPr wrap="square" rtlCol="0">
+            <a:spAutoFit/>
+          </a:bodyPr>
+          <a:lstStyle/>
+          <a:p>
+            <a:r>
+              <a:rPr lang="en-US" dirty="0">
+                <a:solidFill>
+                  <a:schemeClr val="bg1"/>
+                </a:solidFill>
+              </a:rPr>
+              <a:t>There are nine levels</a:t>
+            </a:r>
+          </a:p>
+          <a:p>
+            <a:r>
+              <a:rPr lang="en-US" dirty="0">
+                <a:solidFill>
+                  <a:schemeClr val="bg1"/>
+                </a:solidFill>
+              </a:rPr>
+              <a:t>Every level introduces a new thing.</a:t>
+            </a:r>
+          </a:p>
+        </p:txBody>
+      </p:sp>
     </p:spTree>
     <p:extLst>
       <p:ext uri="{BB962C8B-B14F-4D97-AF65-F5344CB8AC3E}">
@@ -6058,6 +7497,1557 @@
 </file>
 
 <file path=ppt/slides/slide3.xml><?xml version="1.0" encoding="utf-8"?>
+<p:sld xmlns:a="http://schemas.openxmlformats.org/drawingml/2006/main" xmlns:r="http://schemas.openxmlformats.org/officeDocument/2006/relationships" xmlns:p="http://schemas.openxmlformats.org/presentationml/2006/main">
+  <p:cSld>
+    <p:spTree>
+      <p:nvGrpSpPr>
+        <p:cNvPr id="1" name=""/>
+        <p:cNvGrpSpPr/>
+        <p:nvPr/>
+      </p:nvGrpSpPr>
+      <p:grpSpPr>
+        <a:xfrm>
+          <a:off x="0" y="0"/>
+          <a:ext cx="0" cy="0"/>
+          <a:chOff x="0" y="0"/>
+          <a:chExt cx="0" cy="0"/>
+        </a:xfrm>
+      </p:grpSpPr>
+      <p:sp>
+        <p:nvSpPr>
+          <p:cNvPr id="2" name="Title 1">
+            <a:extLst>
+              <a:ext uri="{FF2B5EF4-FFF2-40B4-BE49-F238E27FC236}">
+                <a16:creationId xmlns:a16="http://schemas.microsoft.com/office/drawing/2014/main" id="{0C4DE95C-AF44-B196-31D1-911B992140AF}"/>
+              </a:ext>
+            </a:extLst>
+          </p:cNvPr>
+          <p:cNvSpPr>
+            <a:spLocks noGrp="1"/>
+          </p:cNvSpPr>
+          <p:nvPr>
+            <p:ph type="title"/>
+          </p:nvPr>
+        </p:nvSpPr>
+        <p:spPr>
+          <a:xfrm>
+            <a:off x="838200" y="365125"/>
+            <a:ext cx="4829175" cy="1325563"/>
+          </a:xfrm>
+        </p:spPr>
+        <p:txBody>
+          <a:bodyPr/>
+          <a:lstStyle/>
+          <a:p>
+            <a:r>
+              <a:rPr lang="en-US" b="1" dirty="0">
+                <a:solidFill>
+                  <a:schemeClr val="bg1"/>
+                </a:solidFill>
+              </a:rPr>
+              <a:t>Controls</a:t>
+            </a:r>
+          </a:p>
+        </p:txBody>
+      </p:sp>
+      <p:pic>
+        <p:nvPicPr>
+          <p:cNvPr id="17" name="Content Placeholder 4" descr="A picture containing toy&#10;&#10;Description automatically generated">
+            <a:extLst>
+              <a:ext uri="{FF2B5EF4-FFF2-40B4-BE49-F238E27FC236}">
+                <a16:creationId xmlns:a16="http://schemas.microsoft.com/office/drawing/2014/main" id="{59C4C2A1-83D0-0928-0F5B-561A29788211}"/>
+              </a:ext>
+            </a:extLst>
+          </p:cNvPr>
+          <p:cNvPicPr>
+            <a:picLocks noChangeAspect="1"/>
+          </p:cNvPicPr>
+          <p:nvPr/>
+        </p:nvPicPr>
+        <p:blipFill>
+          <a:blip r:embed="rId2">
+            <a:extLst>
+              <a:ext uri="{28A0092B-C50C-407E-A947-70E740481C1C}">
+                <a14:useLocalDpi xmlns:a14="http://schemas.microsoft.com/office/drawing/2010/main" val="0"/>
+              </a:ext>
+            </a:extLst>
+          </a:blip>
+          <a:stretch>
+            <a:fillRect/>
+          </a:stretch>
+        </p:blipFill>
+        <p:spPr>
+          <a:xfrm>
+            <a:off x="5352345" y="206375"/>
+            <a:ext cx="6477706" cy="3643710"/>
+          </a:xfrm>
+          <a:prstGeom prst="rect">
+            <a:avLst/>
+          </a:prstGeom>
+        </p:spPr>
+      </p:pic>
+      <p:pic>
+        <p:nvPicPr>
+          <p:cNvPr id="6" name="Picture 5" descr="Icon&#10;&#10;Description automatically generated">
+            <a:extLst>
+              <a:ext uri="{FF2B5EF4-FFF2-40B4-BE49-F238E27FC236}">
+                <a16:creationId xmlns:a16="http://schemas.microsoft.com/office/drawing/2014/main" id="{5FC0299F-22C8-9EB0-C955-9DF0E24113FB}"/>
+              </a:ext>
+            </a:extLst>
+          </p:cNvPr>
+          <p:cNvPicPr>
+            <a:picLocks noChangeAspect="1"/>
+          </p:cNvPicPr>
+          <p:nvPr/>
+        </p:nvPicPr>
+        <p:blipFill>
+          <a:blip r:embed="rId3">
+            <a:extLst>
+              <a:ext uri="{28A0092B-C50C-407E-A947-70E740481C1C}">
+                <a14:useLocalDpi xmlns:a14="http://schemas.microsoft.com/office/drawing/2010/main" val="0"/>
+              </a:ext>
+            </a:extLst>
+          </a:blip>
+          <a:stretch>
+            <a:fillRect/>
+          </a:stretch>
+        </p:blipFill>
+        <p:spPr>
+          <a:xfrm>
+            <a:off x="11033185" y="5699185"/>
+            <a:ext cx="1158815" cy="1158815"/>
+          </a:xfrm>
+          <a:prstGeom prst="rect">
+            <a:avLst/>
+          </a:prstGeom>
+        </p:spPr>
+      </p:pic>
+      <p:grpSp>
+        <p:nvGrpSpPr>
+          <p:cNvPr id="9" name="Group 8">
+            <a:extLst>
+              <a:ext uri="{FF2B5EF4-FFF2-40B4-BE49-F238E27FC236}">
+                <a16:creationId xmlns:a16="http://schemas.microsoft.com/office/drawing/2014/main" id="{D6DCCAA1-E1FD-1083-9D3F-1C3CE51AF952}"/>
+              </a:ext>
+            </a:extLst>
+          </p:cNvPr>
+          <p:cNvGrpSpPr/>
+          <p:nvPr/>
+        </p:nvGrpSpPr>
+        <p:grpSpPr>
+          <a:xfrm>
+            <a:off x="1737977" y="2861342"/>
+            <a:ext cx="1069676" cy="1069676"/>
+            <a:chOff x="1811547" y="2518913"/>
+            <a:chExt cx="1069676" cy="1069676"/>
+          </a:xfrm>
+        </p:grpSpPr>
+        <p:sp>
+          <p:nvSpPr>
+            <p:cNvPr id="10" name="Rectangle: Rounded Corners 9">
+              <a:extLst>
+                <a:ext uri="{FF2B5EF4-FFF2-40B4-BE49-F238E27FC236}">
+                  <a16:creationId xmlns:a16="http://schemas.microsoft.com/office/drawing/2014/main" id="{96BB3229-2211-C718-2451-9A5841410D18}"/>
+                </a:ext>
+              </a:extLst>
+            </p:cNvPr>
+            <p:cNvSpPr/>
+            <p:nvPr/>
+          </p:nvSpPr>
+          <p:spPr>
+            <a:xfrm>
+              <a:off x="1811547" y="2518913"/>
+              <a:ext cx="1069676" cy="1069676"/>
+            </a:xfrm>
+            <a:prstGeom prst="roundRect">
+              <a:avLst/>
+            </a:prstGeom>
+          </p:spPr>
+          <p:style>
+            <a:lnRef idx="0">
+              <a:schemeClr val="accent3"/>
+            </a:lnRef>
+            <a:fillRef idx="3">
+              <a:schemeClr val="accent3"/>
+            </a:fillRef>
+            <a:effectRef idx="3">
+              <a:schemeClr val="accent3"/>
+            </a:effectRef>
+            <a:fontRef idx="minor">
+              <a:schemeClr val="lt1"/>
+            </a:fontRef>
+          </p:style>
+          <p:txBody>
+            <a:bodyPr rtlCol="0" anchor="ctr"/>
+            <a:lstStyle/>
+            <a:p>
+              <a:pPr algn="ctr"/>
+              <a:endParaRPr lang="en-US"/>
+            </a:p>
+          </p:txBody>
+        </p:sp>
+        <p:sp>
+          <p:nvSpPr>
+            <p:cNvPr id="11" name="Rectangle: Rounded Corners 10">
+              <a:extLst>
+                <a:ext uri="{FF2B5EF4-FFF2-40B4-BE49-F238E27FC236}">
+                  <a16:creationId xmlns:a16="http://schemas.microsoft.com/office/drawing/2014/main" id="{686ACEBB-1264-E7FD-6625-F7EFB49AF210}"/>
+                </a:ext>
+              </a:extLst>
+            </p:cNvPr>
+            <p:cNvSpPr/>
+            <p:nvPr/>
+          </p:nvSpPr>
+          <p:spPr>
+            <a:xfrm>
+              <a:off x="1811547" y="2518913"/>
+              <a:ext cx="914400" cy="914400"/>
+            </a:xfrm>
+            <a:prstGeom prst="roundRect">
+              <a:avLst/>
+            </a:prstGeom>
+            <a:solidFill>
+              <a:schemeClr val="bg2">
+                <a:lumMod val="90000"/>
+              </a:schemeClr>
+            </a:solidFill>
+          </p:spPr>
+          <p:style>
+            <a:lnRef idx="1">
+              <a:schemeClr val="accent3"/>
+            </a:lnRef>
+            <a:fillRef idx="3">
+              <a:schemeClr val="accent3"/>
+            </a:fillRef>
+            <a:effectRef idx="2">
+              <a:schemeClr val="accent3"/>
+            </a:effectRef>
+            <a:fontRef idx="minor">
+              <a:schemeClr val="lt1"/>
+            </a:fontRef>
+          </p:style>
+          <p:txBody>
+            <a:bodyPr rtlCol="0" anchor="ctr"/>
+            <a:lstStyle/>
+            <a:p>
+              <a:pPr algn="ctr"/>
+              <a:r>
+                <a:rPr lang="en-US" sz="4400" b="1" dirty="0">
+                  <a:solidFill>
+                    <a:schemeClr val="tx1"/>
+                  </a:solidFill>
+                </a:rPr>
+                <a:t>S</a:t>
+              </a:r>
+            </a:p>
+          </p:txBody>
+        </p:sp>
+      </p:grpSp>
+      <p:grpSp>
+        <p:nvGrpSpPr>
+          <p:cNvPr id="8" name="Group 7">
+            <a:extLst>
+              <a:ext uri="{FF2B5EF4-FFF2-40B4-BE49-F238E27FC236}">
+                <a16:creationId xmlns:a16="http://schemas.microsoft.com/office/drawing/2014/main" id="{E6E8C8D8-9190-1DF1-4BC7-B7F53D6C2CD2}"/>
+              </a:ext>
+            </a:extLst>
+          </p:cNvPr>
+          <p:cNvGrpSpPr/>
+          <p:nvPr/>
+        </p:nvGrpSpPr>
+        <p:grpSpPr>
+          <a:xfrm>
+            <a:off x="381059" y="2894162"/>
+            <a:ext cx="1069676" cy="1069676"/>
+            <a:chOff x="1811547" y="2518913"/>
+            <a:chExt cx="1069676" cy="1069676"/>
+          </a:xfrm>
+        </p:grpSpPr>
+        <p:sp>
+          <p:nvSpPr>
+            <p:cNvPr id="7" name="Rectangle: Rounded Corners 6">
+              <a:extLst>
+                <a:ext uri="{FF2B5EF4-FFF2-40B4-BE49-F238E27FC236}">
+                  <a16:creationId xmlns:a16="http://schemas.microsoft.com/office/drawing/2014/main" id="{F047936E-CC0E-9CD6-45DB-FB6E5C3D32C1}"/>
+                </a:ext>
+              </a:extLst>
+            </p:cNvPr>
+            <p:cNvSpPr/>
+            <p:nvPr/>
+          </p:nvSpPr>
+          <p:spPr>
+            <a:xfrm>
+              <a:off x="1811547" y="2518913"/>
+              <a:ext cx="1069676" cy="1069676"/>
+            </a:xfrm>
+            <a:prstGeom prst="roundRect">
+              <a:avLst/>
+            </a:prstGeom>
+          </p:spPr>
+          <p:style>
+            <a:lnRef idx="0">
+              <a:schemeClr val="accent3"/>
+            </a:lnRef>
+            <a:fillRef idx="3">
+              <a:schemeClr val="accent3"/>
+            </a:fillRef>
+            <a:effectRef idx="3">
+              <a:schemeClr val="accent3"/>
+            </a:effectRef>
+            <a:fontRef idx="minor">
+              <a:schemeClr val="lt1"/>
+            </a:fontRef>
+          </p:style>
+          <p:txBody>
+            <a:bodyPr rtlCol="0" anchor="ctr"/>
+            <a:lstStyle/>
+            <a:p>
+              <a:pPr algn="ctr"/>
+              <a:endParaRPr lang="en-US"/>
+            </a:p>
+          </p:txBody>
+        </p:sp>
+        <p:sp>
+          <p:nvSpPr>
+            <p:cNvPr id="3" name="Rectangle: Rounded Corners 2">
+              <a:extLst>
+                <a:ext uri="{FF2B5EF4-FFF2-40B4-BE49-F238E27FC236}">
+                  <a16:creationId xmlns:a16="http://schemas.microsoft.com/office/drawing/2014/main" id="{0051D99D-F126-80C3-9FA5-587C43A393E0}"/>
+                </a:ext>
+              </a:extLst>
+            </p:cNvPr>
+            <p:cNvSpPr/>
+            <p:nvPr/>
+          </p:nvSpPr>
+          <p:spPr>
+            <a:xfrm>
+              <a:off x="1811547" y="2518913"/>
+              <a:ext cx="914400" cy="914400"/>
+            </a:xfrm>
+            <a:prstGeom prst="roundRect">
+              <a:avLst/>
+            </a:prstGeom>
+            <a:solidFill>
+              <a:schemeClr val="bg2">
+                <a:lumMod val="90000"/>
+              </a:schemeClr>
+            </a:solidFill>
+          </p:spPr>
+          <p:style>
+            <a:lnRef idx="1">
+              <a:schemeClr val="accent3"/>
+            </a:lnRef>
+            <a:fillRef idx="3">
+              <a:schemeClr val="accent3"/>
+            </a:fillRef>
+            <a:effectRef idx="2">
+              <a:schemeClr val="accent3"/>
+            </a:effectRef>
+            <a:fontRef idx="minor">
+              <a:schemeClr val="lt1"/>
+            </a:fontRef>
+          </p:style>
+          <p:txBody>
+            <a:bodyPr rtlCol="0" anchor="ctr"/>
+            <a:lstStyle/>
+            <a:p>
+              <a:pPr algn="ctr"/>
+              <a:r>
+                <a:rPr lang="en-US" sz="3200" b="1" dirty="0">
+                  <a:solidFill>
+                    <a:schemeClr val="tx1"/>
+                  </a:solidFill>
+                </a:rPr>
+                <a:t>W</a:t>
+              </a:r>
+            </a:p>
+          </p:txBody>
+        </p:sp>
+      </p:grpSp>
+      <p:pic>
+        <p:nvPicPr>
+          <p:cNvPr id="55" name="Picture 54">
+            <a:extLst>
+              <a:ext uri="{FF2B5EF4-FFF2-40B4-BE49-F238E27FC236}">
+                <a16:creationId xmlns:a16="http://schemas.microsoft.com/office/drawing/2014/main" id="{07A8B345-EF2E-C528-6C69-8C445F9F85A7}"/>
+              </a:ext>
+            </a:extLst>
+          </p:cNvPr>
+          <p:cNvPicPr>
+            <a:picLocks noChangeAspect="1"/>
+          </p:cNvPicPr>
+          <p:nvPr/>
+        </p:nvPicPr>
+        <p:blipFill>
+          <a:blip r:embed="rId4"/>
+          <a:stretch>
+            <a:fillRect/>
+          </a:stretch>
+        </p:blipFill>
+        <p:spPr>
+          <a:xfrm>
+            <a:off x="702025" y="1472478"/>
+            <a:ext cx="1845471" cy="1325564"/>
+          </a:xfrm>
+          <a:prstGeom prst="rect">
+            <a:avLst/>
+          </a:prstGeom>
+        </p:spPr>
+      </p:pic>
+      <p:pic>
+        <p:nvPicPr>
+          <p:cNvPr id="52" name="Graphic 51" descr="Arrow: Straight with solid fill">
+            <a:extLst>
+              <a:ext uri="{FF2B5EF4-FFF2-40B4-BE49-F238E27FC236}">
+                <a16:creationId xmlns:a16="http://schemas.microsoft.com/office/drawing/2014/main" id="{8F28D28A-9052-D75D-7B3E-A095F75EA1F1}"/>
+              </a:ext>
+            </a:extLst>
+          </p:cNvPr>
+          <p:cNvPicPr>
+            <a:picLocks noChangeAspect="1"/>
+          </p:cNvPicPr>
+          <p:nvPr/>
+        </p:nvPicPr>
+        <p:blipFill>
+          <a:blip r:embed="rId5">
+            <a:extLst>
+              <a:ext uri="{28A0092B-C50C-407E-A947-70E740481C1C}">
+                <a14:useLocalDpi xmlns:a14="http://schemas.microsoft.com/office/drawing/2010/main" val="0"/>
+              </a:ext>
+              <a:ext uri="{96DAC541-7B7A-43D3-8B79-37D633B846F1}">
+                <asvg:svgBlip xmlns:asvg="http://schemas.microsoft.com/office/drawing/2016/SVG/main" r:embed="rId6"/>
+              </a:ext>
+            </a:extLst>
+          </a:blip>
+          <a:stretch>
+            <a:fillRect/>
+          </a:stretch>
+        </p:blipFill>
+        <p:spPr>
+          <a:xfrm>
+            <a:off x="122267" y="1915292"/>
+            <a:ext cx="914400" cy="914400"/>
+          </a:xfrm>
+          <a:prstGeom prst="rect">
+            <a:avLst/>
+          </a:prstGeom>
+        </p:spPr>
+      </p:pic>
+      <p:pic>
+        <p:nvPicPr>
+          <p:cNvPr id="56" name="Picture 55">
+            <a:extLst>
+              <a:ext uri="{FF2B5EF4-FFF2-40B4-BE49-F238E27FC236}">
+                <a16:creationId xmlns:a16="http://schemas.microsoft.com/office/drawing/2014/main" id="{26FD961C-0135-9360-B979-07F01C3E96EC}"/>
+              </a:ext>
+            </a:extLst>
+          </p:cNvPr>
+          <p:cNvPicPr>
+            <a:picLocks noChangeAspect="1"/>
+          </p:cNvPicPr>
+          <p:nvPr/>
+        </p:nvPicPr>
+        <p:blipFill>
+          <a:blip r:embed="rId4"/>
+          <a:stretch>
+            <a:fillRect/>
+          </a:stretch>
+        </p:blipFill>
+        <p:spPr>
+          <a:xfrm>
+            <a:off x="696894" y="4565848"/>
+            <a:ext cx="1845471" cy="1325564"/>
+          </a:xfrm>
+          <a:prstGeom prst="rect">
+            <a:avLst/>
+          </a:prstGeom>
+        </p:spPr>
+      </p:pic>
+      <p:pic>
+        <p:nvPicPr>
+          <p:cNvPr id="57" name="Graphic 56" descr="Arrow: Straight with solid fill">
+            <a:extLst>
+              <a:ext uri="{FF2B5EF4-FFF2-40B4-BE49-F238E27FC236}">
+                <a16:creationId xmlns:a16="http://schemas.microsoft.com/office/drawing/2014/main" id="{9DB188B0-B8F8-E7A4-1764-39B7C608F6D9}"/>
+              </a:ext>
+            </a:extLst>
+          </p:cNvPr>
+          <p:cNvPicPr>
+            <a:picLocks noChangeAspect="1"/>
+          </p:cNvPicPr>
+          <p:nvPr/>
+        </p:nvPicPr>
+        <p:blipFill>
+          <a:blip r:embed="rId5">
+            <a:extLst>
+              <a:ext uri="{28A0092B-C50C-407E-A947-70E740481C1C}">
+                <a14:useLocalDpi xmlns:a14="http://schemas.microsoft.com/office/drawing/2010/main" val="0"/>
+              </a:ext>
+              <a:ext uri="{96DAC541-7B7A-43D3-8B79-37D633B846F1}">
+                <asvg:svgBlip xmlns:asvg="http://schemas.microsoft.com/office/drawing/2016/SVG/main" r:embed="rId6"/>
+              </a:ext>
+            </a:extLst>
+          </a:blip>
+          <a:stretch>
+            <a:fillRect/>
+          </a:stretch>
+        </p:blipFill>
+        <p:spPr>
+          <a:xfrm rot="5400000">
+            <a:off x="1162429" y="4263924"/>
+            <a:ext cx="914400" cy="914400"/>
+          </a:xfrm>
+          <a:prstGeom prst="rect">
+            <a:avLst/>
+          </a:prstGeom>
+        </p:spPr>
+      </p:pic>
+      <p:grpSp>
+        <p:nvGrpSpPr>
+          <p:cNvPr id="58" name="Group 57">
+            <a:extLst>
+              <a:ext uri="{FF2B5EF4-FFF2-40B4-BE49-F238E27FC236}">
+                <a16:creationId xmlns:a16="http://schemas.microsoft.com/office/drawing/2014/main" id="{61973827-0884-AA99-B93D-BB72BE57D3D1}"/>
+              </a:ext>
+            </a:extLst>
+          </p:cNvPr>
+          <p:cNvGrpSpPr/>
+          <p:nvPr/>
+        </p:nvGrpSpPr>
+        <p:grpSpPr>
+          <a:xfrm>
+            <a:off x="2652377" y="4158954"/>
+            <a:ext cx="2064432" cy="1069676"/>
+            <a:chOff x="1811547" y="2518913"/>
+            <a:chExt cx="1069676" cy="1069676"/>
+          </a:xfrm>
+        </p:grpSpPr>
+        <p:sp>
+          <p:nvSpPr>
+            <p:cNvPr id="59" name="Rectangle: Rounded Corners 58">
+              <a:extLst>
+                <a:ext uri="{FF2B5EF4-FFF2-40B4-BE49-F238E27FC236}">
+                  <a16:creationId xmlns:a16="http://schemas.microsoft.com/office/drawing/2014/main" id="{F1FA7974-891A-9093-6D2A-2E0F14F893F4}"/>
+                </a:ext>
+              </a:extLst>
+            </p:cNvPr>
+            <p:cNvSpPr/>
+            <p:nvPr/>
+          </p:nvSpPr>
+          <p:spPr>
+            <a:xfrm>
+              <a:off x="1811547" y="2518913"/>
+              <a:ext cx="1069676" cy="1069676"/>
+            </a:xfrm>
+            <a:prstGeom prst="roundRect">
+              <a:avLst/>
+            </a:prstGeom>
+          </p:spPr>
+          <p:style>
+            <a:lnRef idx="0">
+              <a:schemeClr val="accent3"/>
+            </a:lnRef>
+            <a:fillRef idx="3">
+              <a:schemeClr val="accent3"/>
+            </a:fillRef>
+            <a:effectRef idx="3">
+              <a:schemeClr val="accent3"/>
+            </a:effectRef>
+            <a:fontRef idx="minor">
+              <a:schemeClr val="lt1"/>
+            </a:fontRef>
+          </p:style>
+          <p:txBody>
+            <a:bodyPr rtlCol="0" anchor="ctr"/>
+            <a:lstStyle/>
+            <a:p>
+              <a:pPr algn="ctr"/>
+              <a:endParaRPr lang="en-US"/>
+            </a:p>
+          </p:txBody>
+        </p:sp>
+        <p:sp>
+          <p:nvSpPr>
+            <p:cNvPr id="60" name="Rectangle: Rounded Corners 59">
+              <a:extLst>
+                <a:ext uri="{FF2B5EF4-FFF2-40B4-BE49-F238E27FC236}">
+                  <a16:creationId xmlns:a16="http://schemas.microsoft.com/office/drawing/2014/main" id="{22C8D6A7-FBB2-2345-CBC7-EAB03D8C140F}"/>
+                </a:ext>
+              </a:extLst>
+            </p:cNvPr>
+            <p:cNvSpPr/>
+            <p:nvPr/>
+          </p:nvSpPr>
+          <p:spPr>
+            <a:xfrm>
+              <a:off x="1811547" y="2518913"/>
+              <a:ext cx="914400" cy="914400"/>
+            </a:xfrm>
+            <a:prstGeom prst="roundRect">
+              <a:avLst/>
+            </a:prstGeom>
+            <a:solidFill>
+              <a:schemeClr val="bg2">
+                <a:lumMod val="90000"/>
+              </a:schemeClr>
+            </a:solidFill>
+          </p:spPr>
+          <p:style>
+            <a:lnRef idx="1">
+              <a:schemeClr val="accent3"/>
+            </a:lnRef>
+            <a:fillRef idx="3">
+              <a:schemeClr val="accent3"/>
+            </a:fillRef>
+            <a:effectRef idx="2">
+              <a:schemeClr val="accent3"/>
+            </a:effectRef>
+            <a:fontRef idx="minor">
+              <a:schemeClr val="lt1"/>
+            </a:fontRef>
+          </p:style>
+          <p:txBody>
+            <a:bodyPr rtlCol="0" anchor="ctr"/>
+            <a:lstStyle/>
+            <a:p>
+              <a:pPr algn="ctr"/>
+              <a:r>
+                <a:rPr lang="en-US" sz="3200" b="1" dirty="0">
+                  <a:solidFill>
+                    <a:schemeClr val="tx1"/>
+                  </a:solidFill>
+                </a:rPr>
+                <a:t>space</a:t>
+              </a:r>
+            </a:p>
+          </p:txBody>
+        </p:sp>
+      </p:grpSp>
+      <p:grpSp>
+        <p:nvGrpSpPr>
+          <p:cNvPr id="61" name="Group 60">
+            <a:extLst>
+              <a:ext uri="{FF2B5EF4-FFF2-40B4-BE49-F238E27FC236}">
+                <a16:creationId xmlns:a16="http://schemas.microsoft.com/office/drawing/2014/main" id="{5E0467A6-1E28-CFEF-F459-F3C08C9372C2}"/>
+              </a:ext>
+            </a:extLst>
+          </p:cNvPr>
+          <p:cNvGrpSpPr/>
+          <p:nvPr/>
+        </p:nvGrpSpPr>
+        <p:grpSpPr>
+          <a:xfrm>
+            <a:off x="2652377" y="5423199"/>
+            <a:ext cx="2064432" cy="1069676"/>
+            <a:chOff x="1811547" y="2518913"/>
+            <a:chExt cx="1069676" cy="1069676"/>
+          </a:xfrm>
+        </p:grpSpPr>
+        <p:sp>
+          <p:nvSpPr>
+            <p:cNvPr id="62" name="Rectangle: Rounded Corners 61">
+              <a:extLst>
+                <a:ext uri="{FF2B5EF4-FFF2-40B4-BE49-F238E27FC236}">
+                  <a16:creationId xmlns:a16="http://schemas.microsoft.com/office/drawing/2014/main" id="{AAE5F5D0-15E8-EB3E-D4CE-F49BAEC95E9D}"/>
+                </a:ext>
+              </a:extLst>
+            </p:cNvPr>
+            <p:cNvSpPr/>
+            <p:nvPr/>
+          </p:nvSpPr>
+          <p:spPr>
+            <a:xfrm>
+              <a:off x="1811547" y="2518913"/>
+              <a:ext cx="1069676" cy="1069676"/>
+            </a:xfrm>
+            <a:prstGeom prst="roundRect">
+              <a:avLst/>
+            </a:prstGeom>
+          </p:spPr>
+          <p:style>
+            <a:lnRef idx="0">
+              <a:schemeClr val="accent3"/>
+            </a:lnRef>
+            <a:fillRef idx="3">
+              <a:schemeClr val="accent3"/>
+            </a:fillRef>
+            <a:effectRef idx="3">
+              <a:schemeClr val="accent3"/>
+            </a:effectRef>
+            <a:fontRef idx="minor">
+              <a:schemeClr val="lt1"/>
+            </a:fontRef>
+          </p:style>
+          <p:txBody>
+            <a:bodyPr rtlCol="0" anchor="ctr"/>
+            <a:lstStyle/>
+            <a:p>
+              <a:pPr algn="ctr"/>
+              <a:endParaRPr lang="en-US"/>
+            </a:p>
+          </p:txBody>
+        </p:sp>
+        <p:sp>
+          <p:nvSpPr>
+            <p:cNvPr id="63" name="Rectangle: Rounded Corners 62">
+              <a:extLst>
+                <a:ext uri="{FF2B5EF4-FFF2-40B4-BE49-F238E27FC236}">
+                  <a16:creationId xmlns:a16="http://schemas.microsoft.com/office/drawing/2014/main" id="{F0AD0AD1-8B31-15E1-5DD0-10578A72AD67}"/>
+                </a:ext>
+              </a:extLst>
+            </p:cNvPr>
+            <p:cNvSpPr/>
+            <p:nvPr/>
+          </p:nvSpPr>
+          <p:spPr>
+            <a:xfrm>
+              <a:off x="1811547" y="2518913"/>
+              <a:ext cx="914400" cy="914400"/>
+            </a:xfrm>
+            <a:prstGeom prst="roundRect">
+              <a:avLst/>
+            </a:prstGeom>
+            <a:solidFill>
+              <a:schemeClr val="bg2">
+                <a:lumMod val="90000"/>
+              </a:schemeClr>
+            </a:solidFill>
+          </p:spPr>
+          <p:style>
+            <a:lnRef idx="1">
+              <a:schemeClr val="accent3"/>
+            </a:lnRef>
+            <a:fillRef idx="3">
+              <a:schemeClr val="accent3"/>
+            </a:fillRef>
+            <a:effectRef idx="2">
+              <a:schemeClr val="accent3"/>
+            </a:effectRef>
+            <a:fontRef idx="minor">
+              <a:schemeClr val="lt1"/>
+            </a:fontRef>
+          </p:style>
+          <p:txBody>
+            <a:bodyPr rtlCol="0" anchor="ctr"/>
+            <a:lstStyle/>
+            <a:p>
+              <a:pPr algn="ctr"/>
+              <a:r>
+                <a:rPr lang="en-US" sz="3200" b="1" dirty="0">
+                  <a:solidFill>
+                    <a:schemeClr val="tx1"/>
+                  </a:solidFill>
+                </a:rPr>
+                <a:t>Shift</a:t>
+              </a:r>
+            </a:p>
+          </p:txBody>
+        </p:sp>
+      </p:grpSp>
+      <p:pic>
+        <p:nvPicPr>
+          <p:cNvPr id="64" name="Content Placeholder 4" descr="A picture containing toy&#10;&#10;Description automatically generated">
+            <a:extLst>
+              <a:ext uri="{FF2B5EF4-FFF2-40B4-BE49-F238E27FC236}">
+                <a16:creationId xmlns:a16="http://schemas.microsoft.com/office/drawing/2014/main" id="{87798E28-C550-0DDC-3C1B-234DC2BC7422}"/>
+              </a:ext>
+            </a:extLst>
+          </p:cNvPr>
+          <p:cNvPicPr>
+            <a:picLocks noChangeAspect="1"/>
+          </p:cNvPicPr>
+          <p:nvPr/>
+        </p:nvPicPr>
+        <p:blipFill>
+          <a:blip r:embed="rId2">
+            <a:extLst>
+              <a:ext uri="{28A0092B-C50C-407E-A947-70E740481C1C}">
+                <a14:useLocalDpi xmlns:a14="http://schemas.microsoft.com/office/drawing/2010/main" val="0"/>
+              </a:ext>
+            </a:extLst>
+          </a:blip>
+          <a:stretch>
+            <a:fillRect/>
+          </a:stretch>
+        </p:blipFill>
+        <p:spPr>
+          <a:xfrm>
+            <a:off x="5449881" y="4141754"/>
+            <a:ext cx="2278124" cy="1281445"/>
+          </a:xfrm>
+          <a:prstGeom prst="rect">
+            <a:avLst/>
+          </a:prstGeom>
+        </p:spPr>
+      </p:pic>
+      <p:pic>
+        <p:nvPicPr>
+          <p:cNvPr id="65" name="Graphic 64" descr="Arrow: Straight with solid fill">
+            <a:extLst>
+              <a:ext uri="{FF2B5EF4-FFF2-40B4-BE49-F238E27FC236}">
+                <a16:creationId xmlns:a16="http://schemas.microsoft.com/office/drawing/2014/main" id="{5031FFF6-7AB0-DBD2-1AD6-1983549EAF06}"/>
+              </a:ext>
+            </a:extLst>
+          </p:cNvPr>
+          <p:cNvPicPr>
+            <a:picLocks noChangeAspect="1"/>
+          </p:cNvPicPr>
+          <p:nvPr/>
+        </p:nvPicPr>
+        <p:blipFill>
+          <a:blip r:embed="rId5">
+            <a:extLst>
+              <a:ext uri="{28A0092B-C50C-407E-A947-70E740481C1C}">
+                <a14:useLocalDpi xmlns:a14="http://schemas.microsoft.com/office/drawing/2010/main" val="0"/>
+              </a:ext>
+              <a:ext uri="{96DAC541-7B7A-43D3-8B79-37D633B846F1}">
+                <asvg:svgBlip xmlns:asvg="http://schemas.microsoft.com/office/drawing/2016/SVG/main" r:embed="rId6"/>
+              </a:ext>
+            </a:extLst>
+          </a:blip>
+          <a:stretch>
+            <a:fillRect/>
+          </a:stretch>
+        </p:blipFill>
+        <p:spPr>
+          <a:xfrm flipH="1">
+            <a:off x="2085165" y="1899467"/>
+            <a:ext cx="914400" cy="914400"/>
+          </a:xfrm>
+          <a:prstGeom prst="rect">
+            <a:avLst/>
+          </a:prstGeom>
+        </p:spPr>
+      </p:pic>
+      <p:pic>
+        <p:nvPicPr>
+          <p:cNvPr id="66" name="Graphic 65" descr="Arrow: Straight with solid fill">
+            <a:extLst>
+              <a:ext uri="{FF2B5EF4-FFF2-40B4-BE49-F238E27FC236}">
+                <a16:creationId xmlns:a16="http://schemas.microsoft.com/office/drawing/2014/main" id="{36F0A75B-50BD-DBFE-A851-78060824913C}"/>
+              </a:ext>
+            </a:extLst>
+          </p:cNvPr>
+          <p:cNvPicPr>
+            <a:picLocks noChangeAspect="1"/>
+          </p:cNvPicPr>
+          <p:nvPr/>
+        </p:nvPicPr>
+        <p:blipFill>
+          <a:blip r:embed="rId5">
+            <a:extLst>
+              <a:ext uri="{28A0092B-C50C-407E-A947-70E740481C1C}">
+                <a14:useLocalDpi xmlns:a14="http://schemas.microsoft.com/office/drawing/2010/main" val="0"/>
+              </a:ext>
+              <a:ext uri="{96DAC541-7B7A-43D3-8B79-37D633B846F1}">
+                <asvg:svgBlip xmlns:asvg="http://schemas.microsoft.com/office/drawing/2016/SVG/main" r:embed="rId6"/>
+              </a:ext>
+            </a:extLst>
+          </a:blip>
+          <a:stretch>
+            <a:fillRect/>
+          </a:stretch>
+        </p:blipFill>
+        <p:spPr>
+          <a:xfrm rot="16200000" flipV="1">
+            <a:off x="1170765" y="5699185"/>
+            <a:ext cx="914400" cy="914400"/>
+          </a:xfrm>
+          <a:prstGeom prst="rect">
+            <a:avLst/>
+          </a:prstGeom>
+        </p:spPr>
+      </p:pic>
+      <p:pic>
+        <p:nvPicPr>
+          <p:cNvPr id="68" name="Graphic 67" descr="Arrow: Rotate left with solid fill">
+            <a:extLst>
+              <a:ext uri="{FF2B5EF4-FFF2-40B4-BE49-F238E27FC236}">
+                <a16:creationId xmlns:a16="http://schemas.microsoft.com/office/drawing/2014/main" id="{7BD80AD5-B85B-7BB8-304A-98A90E2294FA}"/>
+              </a:ext>
+            </a:extLst>
+          </p:cNvPr>
+          <p:cNvPicPr>
+            <a:picLocks noChangeAspect="1"/>
+          </p:cNvPicPr>
+          <p:nvPr/>
+        </p:nvPicPr>
+        <p:blipFill>
+          <a:blip r:embed="rId7">
+            <a:extLst>
+              <a:ext uri="{28A0092B-C50C-407E-A947-70E740481C1C}">
+                <a14:useLocalDpi xmlns:a14="http://schemas.microsoft.com/office/drawing/2010/main" val="0"/>
+              </a:ext>
+              <a:ext uri="{96DAC541-7B7A-43D3-8B79-37D633B846F1}">
+                <asvg:svgBlip xmlns:asvg="http://schemas.microsoft.com/office/drawing/2016/SVG/main" r:embed="rId8"/>
+              </a:ext>
+            </a:extLst>
+          </a:blip>
+          <a:stretch>
+            <a:fillRect/>
+          </a:stretch>
+        </p:blipFill>
+        <p:spPr>
+          <a:xfrm rot="16200000">
+            <a:off x="4992681" y="4318061"/>
+            <a:ext cx="914400" cy="914400"/>
+          </a:xfrm>
+          <a:prstGeom prst="rect">
+            <a:avLst/>
+          </a:prstGeom>
+        </p:spPr>
+      </p:pic>
+      <p:pic>
+        <p:nvPicPr>
+          <p:cNvPr id="69" name="Graphic 68" descr="Arrow: Rotate left with solid fill">
+            <a:extLst>
+              <a:ext uri="{FF2B5EF4-FFF2-40B4-BE49-F238E27FC236}">
+                <a16:creationId xmlns:a16="http://schemas.microsoft.com/office/drawing/2014/main" id="{8330DDE4-9FEA-D48B-6781-2D67E1C61265}"/>
+              </a:ext>
+            </a:extLst>
+          </p:cNvPr>
+          <p:cNvPicPr>
+            <a:picLocks noChangeAspect="1"/>
+          </p:cNvPicPr>
+          <p:nvPr/>
+        </p:nvPicPr>
+        <p:blipFill>
+          <a:blip r:embed="rId7">
+            <a:extLst>
+              <a:ext uri="{28A0092B-C50C-407E-A947-70E740481C1C}">
+                <a14:useLocalDpi xmlns:a14="http://schemas.microsoft.com/office/drawing/2010/main" val="0"/>
+              </a:ext>
+              <a:ext uri="{96DAC541-7B7A-43D3-8B79-37D633B846F1}">
+                <asvg:svgBlip xmlns:asvg="http://schemas.microsoft.com/office/drawing/2016/SVG/main" r:embed="rId8"/>
+              </a:ext>
+            </a:extLst>
+          </a:blip>
+          <a:stretch>
+            <a:fillRect/>
+          </a:stretch>
+        </p:blipFill>
+        <p:spPr>
+          <a:xfrm rot="5400000" flipH="1">
+            <a:off x="7167125" y="4375583"/>
+            <a:ext cx="914400" cy="914400"/>
+          </a:xfrm>
+          <a:prstGeom prst="rect">
+            <a:avLst/>
+          </a:prstGeom>
+        </p:spPr>
+      </p:pic>
+      <p:grpSp>
+        <p:nvGrpSpPr>
+          <p:cNvPr id="70" name="Group 69">
+            <a:extLst>
+              <a:ext uri="{FF2B5EF4-FFF2-40B4-BE49-F238E27FC236}">
+                <a16:creationId xmlns:a16="http://schemas.microsoft.com/office/drawing/2014/main" id="{34128D05-3152-D6B2-77F5-1E7F934D87CD}"/>
+              </a:ext>
+            </a:extLst>
+          </p:cNvPr>
+          <p:cNvGrpSpPr/>
+          <p:nvPr/>
+        </p:nvGrpSpPr>
+        <p:grpSpPr>
+          <a:xfrm>
+            <a:off x="6588943" y="5423199"/>
+            <a:ext cx="1069676" cy="1069676"/>
+            <a:chOff x="1811547" y="2518913"/>
+            <a:chExt cx="1069676" cy="1069676"/>
+          </a:xfrm>
+        </p:grpSpPr>
+        <p:sp>
+          <p:nvSpPr>
+            <p:cNvPr id="71" name="Rectangle: Rounded Corners 70">
+              <a:extLst>
+                <a:ext uri="{FF2B5EF4-FFF2-40B4-BE49-F238E27FC236}">
+                  <a16:creationId xmlns:a16="http://schemas.microsoft.com/office/drawing/2014/main" id="{52A18678-8D00-458B-ABB0-A1ADAA67487D}"/>
+                </a:ext>
+              </a:extLst>
+            </p:cNvPr>
+            <p:cNvSpPr/>
+            <p:nvPr/>
+          </p:nvSpPr>
+          <p:spPr>
+            <a:xfrm>
+              <a:off x="1811547" y="2518913"/>
+              <a:ext cx="1069676" cy="1069676"/>
+            </a:xfrm>
+            <a:prstGeom prst="roundRect">
+              <a:avLst/>
+            </a:prstGeom>
+          </p:spPr>
+          <p:style>
+            <a:lnRef idx="0">
+              <a:schemeClr val="accent3"/>
+            </a:lnRef>
+            <a:fillRef idx="3">
+              <a:schemeClr val="accent3"/>
+            </a:fillRef>
+            <a:effectRef idx="3">
+              <a:schemeClr val="accent3"/>
+            </a:effectRef>
+            <a:fontRef idx="minor">
+              <a:schemeClr val="lt1"/>
+            </a:fontRef>
+          </p:style>
+          <p:txBody>
+            <a:bodyPr rtlCol="0" anchor="ctr"/>
+            <a:lstStyle/>
+            <a:p>
+              <a:pPr algn="ctr"/>
+              <a:endParaRPr lang="en-US"/>
+            </a:p>
+          </p:txBody>
+        </p:sp>
+        <p:sp>
+          <p:nvSpPr>
+            <p:cNvPr id="72" name="Rectangle: Rounded Corners 71">
+              <a:extLst>
+                <a:ext uri="{FF2B5EF4-FFF2-40B4-BE49-F238E27FC236}">
+                  <a16:creationId xmlns:a16="http://schemas.microsoft.com/office/drawing/2014/main" id="{F8D83813-6B4C-BBE4-BADA-B058FFF59DFF}"/>
+                </a:ext>
+              </a:extLst>
+            </p:cNvPr>
+            <p:cNvSpPr/>
+            <p:nvPr/>
+          </p:nvSpPr>
+          <p:spPr>
+            <a:xfrm>
+              <a:off x="1811547" y="2518913"/>
+              <a:ext cx="914400" cy="914400"/>
+            </a:xfrm>
+            <a:prstGeom prst="roundRect">
+              <a:avLst/>
+            </a:prstGeom>
+            <a:solidFill>
+              <a:schemeClr val="bg2">
+                <a:lumMod val="90000"/>
+              </a:schemeClr>
+            </a:solidFill>
+          </p:spPr>
+          <p:style>
+            <a:lnRef idx="1">
+              <a:schemeClr val="accent3"/>
+            </a:lnRef>
+            <a:fillRef idx="3">
+              <a:schemeClr val="accent3"/>
+            </a:fillRef>
+            <a:effectRef idx="2">
+              <a:schemeClr val="accent3"/>
+            </a:effectRef>
+            <a:fontRef idx="minor">
+              <a:schemeClr val="lt1"/>
+            </a:fontRef>
+          </p:style>
+          <p:txBody>
+            <a:bodyPr rtlCol="0" anchor="ctr"/>
+            <a:lstStyle/>
+            <a:p>
+              <a:pPr algn="ctr"/>
+              <a:r>
+                <a:rPr lang="en-US" sz="4400" b="1" dirty="0">
+                  <a:solidFill>
+                    <a:schemeClr val="tx1"/>
+                  </a:solidFill>
+                </a:rPr>
+                <a:t>D</a:t>
+              </a:r>
+            </a:p>
+          </p:txBody>
+        </p:sp>
+      </p:grpSp>
+      <p:grpSp>
+        <p:nvGrpSpPr>
+          <p:cNvPr id="73" name="Group 72">
+            <a:extLst>
+              <a:ext uri="{FF2B5EF4-FFF2-40B4-BE49-F238E27FC236}">
+                <a16:creationId xmlns:a16="http://schemas.microsoft.com/office/drawing/2014/main" id="{C5D83871-C6C1-31FC-DBAB-92B696756343}"/>
+              </a:ext>
+            </a:extLst>
+          </p:cNvPr>
+          <p:cNvGrpSpPr/>
+          <p:nvPr/>
+        </p:nvGrpSpPr>
+        <p:grpSpPr>
+          <a:xfrm>
+            <a:off x="5363991" y="5404509"/>
+            <a:ext cx="1069676" cy="1069676"/>
+            <a:chOff x="1811547" y="2518913"/>
+            <a:chExt cx="1069676" cy="1069676"/>
+          </a:xfrm>
+        </p:grpSpPr>
+        <p:sp>
+          <p:nvSpPr>
+            <p:cNvPr id="74" name="Rectangle: Rounded Corners 73">
+              <a:extLst>
+                <a:ext uri="{FF2B5EF4-FFF2-40B4-BE49-F238E27FC236}">
+                  <a16:creationId xmlns:a16="http://schemas.microsoft.com/office/drawing/2014/main" id="{1A117355-58F1-0209-2067-48C2F6FE5E14}"/>
+                </a:ext>
+              </a:extLst>
+            </p:cNvPr>
+            <p:cNvSpPr/>
+            <p:nvPr/>
+          </p:nvSpPr>
+          <p:spPr>
+            <a:xfrm>
+              <a:off x="1811547" y="2518913"/>
+              <a:ext cx="1069676" cy="1069676"/>
+            </a:xfrm>
+            <a:prstGeom prst="roundRect">
+              <a:avLst/>
+            </a:prstGeom>
+          </p:spPr>
+          <p:style>
+            <a:lnRef idx="0">
+              <a:schemeClr val="accent3"/>
+            </a:lnRef>
+            <a:fillRef idx="3">
+              <a:schemeClr val="accent3"/>
+            </a:fillRef>
+            <a:effectRef idx="3">
+              <a:schemeClr val="accent3"/>
+            </a:effectRef>
+            <a:fontRef idx="minor">
+              <a:schemeClr val="lt1"/>
+            </a:fontRef>
+          </p:style>
+          <p:txBody>
+            <a:bodyPr rtlCol="0" anchor="ctr"/>
+            <a:lstStyle/>
+            <a:p>
+              <a:pPr algn="ctr"/>
+              <a:endParaRPr lang="en-US"/>
+            </a:p>
+          </p:txBody>
+        </p:sp>
+        <p:sp>
+          <p:nvSpPr>
+            <p:cNvPr id="75" name="Rectangle: Rounded Corners 74">
+              <a:extLst>
+                <a:ext uri="{FF2B5EF4-FFF2-40B4-BE49-F238E27FC236}">
+                  <a16:creationId xmlns:a16="http://schemas.microsoft.com/office/drawing/2014/main" id="{66EF9B27-5B3F-95C5-11B9-3307E958234E}"/>
+                </a:ext>
+              </a:extLst>
+            </p:cNvPr>
+            <p:cNvSpPr/>
+            <p:nvPr/>
+          </p:nvSpPr>
+          <p:spPr>
+            <a:xfrm>
+              <a:off x="1811547" y="2518913"/>
+              <a:ext cx="914400" cy="914400"/>
+            </a:xfrm>
+            <a:prstGeom prst="roundRect">
+              <a:avLst/>
+            </a:prstGeom>
+            <a:solidFill>
+              <a:schemeClr val="bg2">
+                <a:lumMod val="90000"/>
+              </a:schemeClr>
+            </a:solidFill>
+          </p:spPr>
+          <p:style>
+            <a:lnRef idx="1">
+              <a:schemeClr val="accent3"/>
+            </a:lnRef>
+            <a:fillRef idx="3">
+              <a:schemeClr val="accent3"/>
+            </a:fillRef>
+            <a:effectRef idx="2">
+              <a:schemeClr val="accent3"/>
+            </a:effectRef>
+            <a:fontRef idx="minor">
+              <a:schemeClr val="lt1"/>
+            </a:fontRef>
+          </p:style>
+          <p:txBody>
+            <a:bodyPr rtlCol="0" anchor="ctr"/>
+            <a:lstStyle/>
+            <a:p>
+              <a:pPr algn="ctr"/>
+              <a:r>
+                <a:rPr lang="en-US" sz="4400" b="1" dirty="0">
+                  <a:solidFill>
+                    <a:schemeClr val="tx1"/>
+                  </a:solidFill>
+                </a:rPr>
+                <a:t>A</a:t>
+              </a:r>
+            </a:p>
+          </p:txBody>
+        </p:sp>
+      </p:grpSp>
+      <p:pic>
+        <p:nvPicPr>
+          <p:cNvPr id="76" name="Content Placeholder 4" descr="A picture containing toy&#10;&#10;Description automatically generated">
+            <a:extLst>
+              <a:ext uri="{FF2B5EF4-FFF2-40B4-BE49-F238E27FC236}">
+                <a16:creationId xmlns:a16="http://schemas.microsoft.com/office/drawing/2014/main" id="{5D0FE51C-3F96-1C3B-43E2-E61E7BB685DB}"/>
+              </a:ext>
+            </a:extLst>
+          </p:cNvPr>
+          <p:cNvPicPr>
+            <a:picLocks noChangeAspect="1"/>
+          </p:cNvPicPr>
+          <p:nvPr/>
+        </p:nvPicPr>
+        <p:blipFill>
+          <a:blip r:embed="rId2">
+            <a:extLst>
+              <a:ext uri="{28A0092B-C50C-407E-A947-70E740481C1C}">
+                <a14:useLocalDpi xmlns:a14="http://schemas.microsoft.com/office/drawing/2010/main" val="0"/>
+              </a:ext>
+            </a:extLst>
+          </a:blip>
+          <a:stretch>
+            <a:fillRect/>
+          </a:stretch>
+        </p:blipFill>
+        <p:spPr>
+          <a:xfrm>
+            <a:off x="8669171" y="4104373"/>
+            <a:ext cx="2278124" cy="1281445"/>
+          </a:xfrm>
+          <a:prstGeom prst="rect">
+            <a:avLst/>
+          </a:prstGeom>
+        </p:spPr>
+      </p:pic>
+      <p:grpSp>
+        <p:nvGrpSpPr>
+          <p:cNvPr id="79" name="Group 78">
+            <a:extLst>
+              <a:ext uri="{FF2B5EF4-FFF2-40B4-BE49-F238E27FC236}">
+                <a16:creationId xmlns:a16="http://schemas.microsoft.com/office/drawing/2014/main" id="{E7FAF1FC-C6F5-0FE0-DA2D-B6A2B3EF89C8}"/>
+              </a:ext>
+            </a:extLst>
+          </p:cNvPr>
+          <p:cNvGrpSpPr/>
+          <p:nvPr/>
+        </p:nvGrpSpPr>
+        <p:grpSpPr>
+          <a:xfrm>
+            <a:off x="9808233" y="5367128"/>
+            <a:ext cx="1069676" cy="1069676"/>
+            <a:chOff x="1811547" y="2518913"/>
+            <a:chExt cx="1069676" cy="1069676"/>
+          </a:xfrm>
+        </p:grpSpPr>
+        <p:sp>
+          <p:nvSpPr>
+            <p:cNvPr id="80" name="Rectangle: Rounded Corners 79">
+              <a:extLst>
+                <a:ext uri="{FF2B5EF4-FFF2-40B4-BE49-F238E27FC236}">
+                  <a16:creationId xmlns:a16="http://schemas.microsoft.com/office/drawing/2014/main" id="{C6E64D04-C6AC-56CF-8290-6BD3DC937062}"/>
+                </a:ext>
+              </a:extLst>
+            </p:cNvPr>
+            <p:cNvSpPr/>
+            <p:nvPr/>
+          </p:nvSpPr>
+          <p:spPr>
+            <a:xfrm>
+              <a:off x="1811547" y="2518913"/>
+              <a:ext cx="1069676" cy="1069676"/>
+            </a:xfrm>
+            <a:prstGeom prst="roundRect">
+              <a:avLst/>
+            </a:prstGeom>
+          </p:spPr>
+          <p:style>
+            <a:lnRef idx="0">
+              <a:schemeClr val="accent3"/>
+            </a:lnRef>
+            <a:fillRef idx="3">
+              <a:schemeClr val="accent3"/>
+            </a:fillRef>
+            <a:effectRef idx="3">
+              <a:schemeClr val="accent3"/>
+            </a:effectRef>
+            <a:fontRef idx="minor">
+              <a:schemeClr val="lt1"/>
+            </a:fontRef>
+          </p:style>
+          <p:txBody>
+            <a:bodyPr rtlCol="0" anchor="ctr"/>
+            <a:lstStyle/>
+            <a:p>
+              <a:pPr algn="ctr"/>
+              <a:endParaRPr lang="en-US"/>
+            </a:p>
+          </p:txBody>
+        </p:sp>
+        <p:sp>
+          <p:nvSpPr>
+            <p:cNvPr id="81" name="Rectangle: Rounded Corners 80">
+              <a:extLst>
+                <a:ext uri="{FF2B5EF4-FFF2-40B4-BE49-F238E27FC236}">
+                  <a16:creationId xmlns:a16="http://schemas.microsoft.com/office/drawing/2014/main" id="{DC834460-4B2B-5C09-55A4-8294127D7FBA}"/>
+                </a:ext>
+              </a:extLst>
+            </p:cNvPr>
+            <p:cNvSpPr/>
+            <p:nvPr/>
+          </p:nvSpPr>
+          <p:spPr>
+            <a:xfrm>
+              <a:off x="1811547" y="2518913"/>
+              <a:ext cx="914400" cy="914400"/>
+            </a:xfrm>
+            <a:prstGeom prst="roundRect">
+              <a:avLst/>
+            </a:prstGeom>
+            <a:solidFill>
+              <a:schemeClr val="bg2">
+                <a:lumMod val="90000"/>
+              </a:schemeClr>
+            </a:solidFill>
+          </p:spPr>
+          <p:style>
+            <a:lnRef idx="1">
+              <a:schemeClr val="accent3"/>
+            </a:lnRef>
+            <a:fillRef idx="3">
+              <a:schemeClr val="accent3"/>
+            </a:fillRef>
+            <a:effectRef idx="2">
+              <a:schemeClr val="accent3"/>
+            </a:effectRef>
+            <a:fontRef idx="minor">
+              <a:schemeClr val="lt1"/>
+            </a:fontRef>
+          </p:style>
+          <p:txBody>
+            <a:bodyPr rtlCol="0" anchor="ctr"/>
+            <a:lstStyle/>
+            <a:p>
+              <a:pPr algn="ctr"/>
+              <a:r>
+                <a:rPr lang="en-US" sz="4400" b="1" dirty="0">
+                  <a:solidFill>
+                    <a:schemeClr val="tx1"/>
+                  </a:solidFill>
+                </a:rPr>
+                <a:t>E</a:t>
+              </a:r>
+            </a:p>
+          </p:txBody>
+        </p:sp>
+      </p:grpSp>
+      <p:grpSp>
+        <p:nvGrpSpPr>
+          <p:cNvPr id="82" name="Group 81">
+            <a:extLst>
+              <a:ext uri="{FF2B5EF4-FFF2-40B4-BE49-F238E27FC236}">
+                <a16:creationId xmlns:a16="http://schemas.microsoft.com/office/drawing/2014/main" id="{D9FC0811-BDCF-BC42-0F8E-87C5E752EE99}"/>
+              </a:ext>
+            </a:extLst>
+          </p:cNvPr>
+          <p:cNvGrpSpPr/>
+          <p:nvPr/>
+        </p:nvGrpSpPr>
+        <p:grpSpPr>
+          <a:xfrm>
+            <a:off x="8583281" y="5367128"/>
+            <a:ext cx="1069676" cy="1069676"/>
+            <a:chOff x="1811547" y="2518913"/>
+            <a:chExt cx="1069676" cy="1069676"/>
+          </a:xfrm>
+        </p:grpSpPr>
+        <p:sp>
+          <p:nvSpPr>
+            <p:cNvPr id="83" name="Rectangle: Rounded Corners 82">
+              <a:extLst>
+                <a:ext uri="{FF2B5EF4-FFF2-40B4-BE49-F238E27FC236}">
+                  <a16:creationId xmlns:a16="http://schemas.microsoft.com/office/drawing/2014/main" id="{8F61F13C-5439-8014-73A4-BE7080BE3ECC}"/>
+                </a:ext>
+              </a:extLst>
+            </p:cNvPr>
+            <p:cNvSpPr/>
+            <p:nvPr/>
+          </p:nvSpPr>
+          <p:spPr>
+            <a:xfrm>
+              <a:off x="1811547" y="2518913"/>
+              <a:ext cx="1069676" cy="1069676"/>
+            </a:xfrm>
+            <a:prstGeom prst="roundRect">
+              <a:avLst/>
+            </a:prstGeom>
+          </p:spPr>
+          <p:style>
+            <a:lnRef idx="0">
+              <a:schemeClr val="accent3"/>
+            </a:lnRef>
+            <a:fillRef idx="3">
+              <a:schemeClr val="accent3"/>
+            </a:fillRef>
+            <a:effectRef idx="3">
+              <a:schemeClr val="accent3"/>
+            </a:effectRef>
+            <a:fontRef idx="minor">
+              <a:schemeClr val="lt1"/>
+            </a:fontRef>
+          </p:style>
+          <p:txBody>
+            <a:bodyPr rtlCol="0" anchor="ctr"/>
+            <a:lstStyle/>
+            <a:p>
+              <a:pPr algn="ctr"/>
+              <a:endParaRPr lang="en-US"/>
+            </a:p>
+          </p:txBody>
+        </p:sp>
+        <p:sp>
+          <p:nvSpPr>
+            <p:cNvPr id="84" name="Rectangle: Rounded Corners 83">
+              <a:extLst>
+                <a:ext uri="{FF2B5EF4-FFF2-40B4-BE49-F238E27FC236}">
+                  <a16:creationId xmlns:a16="http://schemas.microsoft.com/office/drawing/2014/main" id="{6BE653C7-702B-76BB-AF95-9D2699314FB5}"/>
+                </a:ext>
+              </a:extLst>
+            </p:cNvPr>
+            <p:cNvSpPr/>
+            <p:nvPr/>
+          </p:nvSpPr>
+          <p:spPr>
+            <a:xfrm>
+              <a:off x="1811547" y="2518913"/>
+              <a:ext cx="914400" cy="914400"/>
+            </a:xfrm>
+            <a:prstGeom prst="roundRect">
+              <a:avLst/>
+            </a:prstGeom>
+            <a:solidFill>
+              <a:schemeClr val="bg2">
+                <a:lumMod val="90000"/>
+              </a:schemeClr>
+            </a:solidFill>
+          </p:spPr>
+          <p:style>
+            <a:lnRef idx="1">
+              <a:schemeClr val="accent3"/>
+            </a:lnRef>
+            <a:fillRef idx="3">
+              <a:schemeClr val="accent3"/>
+            </a:fillRef>
+            <a:effectRef idx="2">
+              <a:schemeClr val="accent3"/>
+            </a:effectRef>
+            <a:fontRef idx="minor">
+              <a:schemeClr val="lt1"/>
+            </a:fontRef>
+          </p:style>
+          <p:txBody>
+            <a:bodyPr rtlCol="0" anchor="ctr"/>
+            <a:lstStyle/>
+            <a:p>
+              <a:pPr algn="ctr"/>
+              <a:r>
+                <a:rPr lang="en-US" sz="4400" b="1" dirty="0">
+                  <a:solidFill>
+                    <a:schemeClr val="tx1"/>
+                  </a:solidFill>
+                </a:rPr>
+                <a:t>Q</a:t>
+              </a:r>
+            </a:p>
+          </p:txBody>
+        </p:sp>
+      </p:grpSp>
+      <p:pic>
+        <p:nvPicPr>
+          <p:cNvPr id="85" name="Graphic 84" descr="Arrow: Straight with solid fill">
+            <a:extLst>
+              <a:ext uri="{FF2B5EF4-FFF2-40B4-BE49-F238E27FC236}">
+                <a16:creationId xmlns:a16="http://schemas.microsoft.com/office/drawing/2014/main" id="{E2A9E910-5FD3-2182-5DE3-98B3D793B766}"/>
+              </a:ext>
+            </a:extLst>
+          </p:cNvPr>
+          <p:cNvPicPr>
+            <a:picLocks noChangeAspect="1"/>
+          </p:cNvPicPr>
+          <p:nvPr/>
+        </p:nvPicPr>
+        <p:blipFill>
+          <a:blip r:embed="rId5">
+            <a:extLst>
+              <a:ext uri="{28A0092B-C50C-407E-A947-70E740481C1C}">
+                <a14:useLocalDpi xmlns:a14="http://schemas.microsoft.com/office/drawing/2010/main" val="0"/>
+              </a:ext>
+              <a:ext uri="{96DAC541-7B7A-43D3-8B79-37D633B846F1}">
+                <asvg:svgBlip xmlns:asvg="http://schemas.microsoft.com/office/drawing/2016/SVG/main" r:embed="rId6"/>
+              </a:ext>
+            </a:extLst>
+          </a:blip>
+          <a:stretch>
+            <a:fillRect/>
+          </a:stretch>
+        </p:blipFill>
+        <p:spPr>
+          <a:xfrm>
+            <a:off x="8302535" y="4455823"/>
+            <a:ext cx="914400" cy="914400"/>
+          </a:xfrm>
+          <a:prstGeom prst="rect">
+            <a:avLst/>
+          </a:prstGeom>
+        </p:spPr>
+      </p:pic>
+      <p:pic>
+        <p:nvPicPr>
+          <p:cNvPr id="86" name="Graphic 85" descr="Arrow: Straight with solid fill">
+            <a:extLst>
+              <a:ext uri="{FF2B5EF4-FFF2-40B4-BE49-F238E27FC236}">
+                <a16:creationId xmlns:a16="http://schemas.microsoft.com/office/drawing/2014/main" id="{4970C3D1-FEDB-8BF7-604D-B463C5488122}"/>
+              </a:ext>
+            </a:extLst>
+          </p:cNvPr>
+          <p:cNvPicPr>
+            <a:picLocks noChangeAspect="1"/>
+          </p:cNvPicPr>
+          <p:nvPr/>
+        </p:nvPicPr>
+        <p:blipFill>
+          <a:blip r:embed="rId5">
+            <a:extLst>
+              <a:ext uri="{28A0092B-C50C-407E-A947-70E740481C1C}">
+                <a14:useLocalDpi xmlns:a14="http://schemas.microsoft.com/office/drawing/2010/main" val="0"/>
+              </a:ext>
+              <a:ext uri="{96DAC541-7B7A-43D3-8B79-37D633B846F1}">
+                <asvg:svgBlip xmlns:asvg="http://schemas.microsoft.com/office/drawing/2016/SVG/main" r:embed="rId6"/>
+              </a:ext>
+            </a:extLst>
+          </a:blip>
+          <a:stretch>
+            <a:fillRect/>
+          </a:stretch>
+        </p:blipFill>
+        <p:spPr>
+          <a:xfrm flipH="1">
+            <a:off x="10265433" y="4439998"/>
+            <a:ext cx="914400" cy="914400"/>
+          </a:xfrm>
+          <a:prstGeom prst="rect">
+            <a:avLst/>
+          </a:prstGeom>
+        </p:spPr>
+      </p:pic>
+    </p:spTree>
+    <p:extLst>
+      <p:ext uri="{BB962C8B-B14F-4D97-AF65-F5344CB8AC3E}">
+        <p14:creationId xmlns:p14="http://schemas.microsoft.com/office/powerpoint/2010/main" val="120876259"/>
+      </p:ext>
+    </p:extLst>
+  </p:cSld>
+  <p:clrMapOvr>
+    <a:masterClrMapping/>
+  </p:clrMapOvr>
+</p:sld>
+</file>
+
+<file path=ppt/slides/slide4.xml><?xml version="1.0" encoding="utf-8"?>
 <p:sld xmlns:a="http://schemas.openxmlformats.org/drawingml/2006/main" xmlns:r="http://schemas.openxmlformats.org/officeDocument/2006/relationships" xmlns:p="http://schemas.openxmlformats.org/presentationml/2006/main">
   <p:cSld>
     <p:spTree>
@@ -6852,42 +9842,12 @@
           </a:p>
         </p:txBody>
       </p:sp>
-    </p:spTree>
-    <p:extLst>
-      <p:ext uri="{BB962C8B-B14F-4D97-AF65-F5344CB8AC3E}">
-        <p14:creationId xmlns:p14="http://schemas.microsoft.com/office/powerpoint/2010/main" val="47746131"/>
-      </p:ext>
-    </p:extLst>
-  </p:cSld>
-  <p:clrMapOvr>
-    <a:masterClrMapping/>
-  </p:clrMapOvr>
-</p:sld>
-</file>
-
-<file path=ppt/slides/slide4.xml><?xml version="1.0" encoding="utf-8"?>
-<p:sld xmlns:a="http://schemas.openxmlformats.org/drawingml/2006/main" xmlns:r="http://schemas.openxmlformats.org/officeDocument/2006/relationships" xmlns:p="http://schemas.openxmlformats.org/presentationml/2006/main">
-  <p:cSld>
-    <p:spTree>
-      <p:nvGrpSpPr>
-        <p:cNvPr id="1" name=""/>
-        <p:cNvGrpSpPr/>
-        <p:nvPr/>
-      </p:nvGrpSpPr>
-      <p:grpSpPr>
-        <a:xfrm>
-          <a:off x="0" y="0"/>
-          <a:ext cx="0" cy="0"/>
-          <a:chOff x="0" y="0"/>
-          <a:chExt cx="0" cy="0"/>
-        </a:xfrm>
-      </p:grpSpPr>
       <p:pic>
         <p:nvPicPr>
-          <p:cNvPr id="5" name="Picture 4">
-            <a:extLst>
-              <a:ext uri="{FF2B5EF4-FFF2-40B4-BE49-F238E27FC236}">
-                <a16:creationId xmlns:a16="http://schemas.microsoft.com/office/drawing/2014/main" id="{1DF86290-6D87-6F00-B6BF-593F74F430B2}"/>
+          <p:cNvPr id="4" name="Picture 3" descr="Icon&#10;&#10;Description automatically generated">
+            <a:extLst>
+              <a:ext uri="{FF2B5EF4-FFF2-40B4-BE49-F238E27FC236}">
+                <a16:creationId xmlns:a16="http://schemas.microsoft.com/office/drawing/2014/main" id="{86D37864-7E09-EAD9-4F60-363B1348FEB4}"/>
               </a:ext>
             </a:extLst>
           </p:cNvPr>
@@ -6897,27 +9857,154 @@
           <p:nvPr/>
         </p:nvPicPr>
         <p:blipFill>
-          <a:blip r:embed="rId2"/>
+          <a:blip r:embed="rId5">
+            <a:extLst>
+              <a:ext uri="{28A0092B-C50C-407E-A947-70E740481C1C}">
+                <a14:useLocalDpi xmlns:a14="http://schemas.microsoft.com/office/drawing/2010/main" val="0"/>
+              </a:ext>
+            </a:extLst>
+          </a:blip>
           <a:stretch>
             <a:fillRect/>
           </a:stretch>
         </p:blipFill>
         <p:spPr>
           <a:xfrm>
-            <a:off x="4933949" y="718125"/>
-            <a:ext cx="2276475" cy="2315895"/>
+            <a:off x="11033185" y="5699185"/>
+            <a:ext cx="1158815" cy="1158815"/>
           </a:xfrm>
           <a:prstGeom prst="rect">
             <a:avLst/>
           </a:prstGeom>
         </p:spPr>
       </p:pic>
+      <p:grpSp>
+        <p:nvGrpSpPr>
+          <p:cNvPr id="3" name="Group 2">
+            <a:extLst>
+              <a:ext uri="{FF2B5EF4-FFF2-40B4-BE49-F238E27FC236}">
+                <a16:creationId xmlns:a16="http://schemas.microsoft.com/office/drawing/2014/main" id="{02ADE3CF-1B8D-DC4C-6DAE-82214797D87F}"/>
+              </a:ext>
+            </a:extLst>
+          </p:cNvPr>
+          <p:cNvGrpSpPr/>
+          <p:nvPr/>
+        </p:nvGrpSpPr>
+        <p:grpSpPr>
+          <a:xfrm>
+            <a:off x="7752566" y="1877494"/>
+            <a:ext cx="767949" cy="767949"/>
+            <a:chOff x="1811547" y="2518913"/>
+            <a:chExt cx="1069676" cy="1069676"/>
+          </a:xfrm>
+        </p:grpSpPr>
+        <p:sp>
+          <p:nvSpPr>
+            <p:cNvPr id="14" name="Rectangle: Rounded Corners 13">
+              <a:extLst>
+                <a:ext uri="{FF2B5EF4-FFF2-40B4-BE49-F238E27FC236}">
+                  <a16:creationId xmlns:a16="http://schemas.microsoft.com/office/drawing/2014/main" id="{D2A01DE4-9F17-E472-B66D-ECFB59D3318D}"/>
+                </a:ext>
+              </a:extLst>
+            </p:cNvPr>
+            <p:cNvSpPr/>
+            <p:nvPr/>
+          </p:nvSpPr>
+          <p:spPr>
+            <a:xfrm>
+              <a:off x="1811547" y="2518913"/>
+              <a:ext cx="1069676" cy="1069676"/>
+            </a:xfrm>
+            <a:prstGeom prst="roundRect">
+              <a:avLst/>
+            </a:prstGeom>
+          </p:spPr>
+          <p:style>
+            <a:lnRef idx="0">
+              <a:schemeClr val="accent3"/>
+            </a:lnRef>
+            <a:fillRef idx="3">
+              <a:schemeClr val="accent3"/>
+            </a:fillRef>
+            <a:effectRef idx="3">
+              <a:schemeClr val="accent3"/>
+            </a:effectRef>
+            <a:fontRef idx="minor">
+              <a:schemeClr val="lt1"/>
+            </a:fontRef>
+          </p:style>
+          <p:txBody>
+            <a:bodyPr rtlCol="0" anchor="ctr"/>
+            <a:lstStyle/>
+            <a:p>
+              <a:pPr algn="ctr"/>
+              <a:endParaRPr lang="en-US"/>
+            </a:p>
+          </p:txBody>
+        </p:sp>
+        <p:sp>
+          <p:nvSpPr>
+            <p:cNvPr id="16" name="Rectangle: Rounded Corners 15">
+              <a:extLst>
+                <a:ext uri="{FF2B5EF4-FFF2-40B4-BE49-F238E27FC236}">
+                  <a16:creationId xmlns:a16="http://schemas.microsoft.com/office/drawing/2014/main" id="{6C3AD5C3-E692-8966-2894-18C83A2D2682}"/>
+                </a:ext>
+              </a:extLst>
+            </p:cNvPr>
+            <p:cNvSpPr/>
+            <p:nvPr/>
+          </p:nvSpPr>
+          <p:spPr>
+            <a:xfrm>
+              <a:off x="1811547" y="2518913"/>
+              <a:ext cx="914400" cy="914400"/>
+            </a:xfrm>
+            <a:prstGeom prst="roundRect">
+              <a:avLst/>
+            </a:prstGeom>
+            <a:solidFill>
+              <a:schemeClr val="bg2">
+                <a:lumMod val="90000"/>
+              </a:schemeClr>
+            </a:solidFill>
+          </p:spPr>
+          <p:style>
+            <a:lnRef idx="1">
+              <a:schemeClr val="accent3"/>
+            </a:lnRef>
+            <a:fillRef idx="3">
+              <a:schemeClr val="accent3"/>
+            </a:fillRef>
+            <a:effectRef idx="2">
+              <a:schemeClr val="accent3"/>
+            </a:effectRef>
+            <a:fontRef idx="minor">
+              <a:schemeClr val="lt1"/>
+            </a:fontRef>
+          </p:style>
+          <p:txBody>
+            <a:bodyPr rtlCol="0" anchor="ctr"/>
+            <a:lstStyle/>
+            <a:p>
+              <a:pPr algn="ctr"/>
+              <a:r>
+                <a:rPr lang="en-US" sz="4400" b="1" dirty="0">
+                  <a:solidFill>
+                    <a:schemeClr val="tx1"/>
+                  </a:solidFill>
+                </a:rPr>
+                <a:t>T</a:t>
+              </a:r>
+            </a:p>
+          </p:txBody>
+        </p:sp>
+      </p:grpSp>
       <p:sp>
         <p:nvSpPr>
-          <p:cNvPr id="11" name="TextBox 10">
-            <a:extLst>
-              <a:ext uri="{FF2B5EF4-FFF2-40B4-BE49-F238E27FC236}">
-                <a16:creationId xmlns:a16="http://schemas.microsoft.com/office/drawing/2014/main" id="{13A726F4-4F1A-0E43-5DDB-DF59D3337A06}"/>
+          <p:cNvPr id="17" name="TextBox 16">
+            <a:extLst>
+              <a:ext uri="{FF2B5EF4-FFF2-40B4-BE49-F238E27FC236}">
+                <a16:creationId xmlns:a16="http://schemas.microsoft.com/office/drawing/2014/main" id="{FD35058F-AB2E-9072-2CD0-0B48CBCE9EDD}"/>
               </a:ext>
             </a:extLst>
           </p:cNvPr>
@@ -6926,8 +10013,8 @@
         </p:nvSpPr>
         <p:spPr>
           <a:xfrm>
-            <a:off x="0" y="0"/>
-            <a:ext cx="12192000" cy="584775"/>
+            <a:off x="7596304" y="2626113"/>
+            <a:ext cx="1086792" cy="400110"/>
           </a:xfrm>
           <a:prstGeom prst="rect">
             <a:avLst/>
@@ -6940,482 +10027,13 @@
           </a:bodyPr>
           <a:lstStyle/>
           <a:p>
-            <a:pPr algn="ctr"/>
             <a:r>
-              <a:rPr lang="en-US" sz="3200" dirty="0">
+              <a:rPr lang="en-US" sz="2000" dirty="0">
                 <a:solidFill>
                   <a:schemeClr val="bg1"/>
                 </a:solidFill>
               </a:rPr>
-              <a:t>Collecting apples 🍏, tomatoes 🍅 or wheat🌾 </a:t>
-            </a:r>
-          </a:p>
-        </p:txBody>
-      </p:sp>
-      <p:pic>
-        <p:nvPicPr>
-          <p:cNvPr id="48" name="Picture 47">
-            <a:extLst>
-              <a:ext uri="{FF2B5EF4-FFF2-40B4-BE49-F238E27FC236}">
-                <a16:creationId xmlns:a16="http://schemas.microsoft.com/office/drawing/2014/main" id="{2B0B7EBE-7EE7-1C7B-A52D-EC65C6853AFE}"/>
-              </a:ext>
-            </a:extLst>
-          </p:cNvPr>
-          <p:cNvPicPr>
-            <a:picLocks noChangeAspect="1"/>
-          </p:cNvPicPr>
-          <p:nvPr/>
-        </p:nvPicPr>
-        <p:blipFill>
-          <a:blip r:embed="rId3">
-            <a:extLst>
-              <a:ext uri="{28A0092B-C50C-407E-A947-70E740481C1C}">
-                <a14:useLocalDpi xmlns:a14="http://schemas.microsoft.com/office/drawing/2010/main" val="0"/>
-              </a:ext>
-            </a:extLst>
-          </a:blip>
-          <a:stretch>
-            <a:fillRect/>
-          </a:stretch>
-        </p:blipFill>
-        <p:spPr>
-          <a:xfrm>
-            <a:off x="-209551" y="584775"/>
-            <a:ext cx="2276475" cy="2276475"/>
-          </a:xfrm>
-          <a:prstGeom prst="rect">
-            <a:avLst/>
-          </a:prstGeom>
-        </p:spPr>
-      </p:pic>
-      <p:pic>
-        <p:nvPicPr>
-          <p:cNvPr id="50" name="Picture 49" descr="A picture containing umbrella, accessory&#10;&#10;Description automatically generated">
-            <a:extLst>
-              <a:ext uri="{FF2B5EF4-FFF2-40B4-BE49-F238E27FC236}">
-                <a16:creationId xmlns:a16="http://schemas.microsoft.com/office/drawing/2014/main" id="{FF57BF49-A2ED-58DF-D8D3-A99E0E3A34AC}"/>
-              </a:ext>
-            </a:extLst>
-          </p:cNvPr>
-          <p:cNvPicPr>
-            <a:picLocks noChangeAspect="1"/>
-          </p:cNvPicPr>
-          <p:nvPr/>
-        </p:nvPicPr>
-        <p:blipFill>
-          <a:blip r:embed="rId4">
-            <a:extLst>
-              <a:ext uri="{28A0092B-C50C-407E-A947-70E740481C1C}">
-                <a14:useLocalDpi xmlns:a14="http://schemas.microsoft.com/office/drawing/2010/main" val="0"/>
-              </a:ext>
-            </a:extLst>
-          </a:blip>
-          <a:stretch>
-            <a:fillRect/>
-          </a:stretch>
-        </p:blipFill>
-        <p:spPr>
-          <a:xfrm>
-            <a:off x="73125" y="2849700"/>
-            <a:ext cx="1711122" cy="1711122"/>
-          </a:xfrm>
-          <a:prstGeom prst="rect">
-            <a:avLst/>
-          </a:prstGeom>
-        </p:spPr>
-      </p:pic>
-      <p:pic>
-        <p:nvPicPr>
-          <p:cNvPr id="52" name="Picture 51" descr="A picture containing light&#10;&#10;Description automatically generated">
-            <a:extLst>
-              <a:ext uri="{FF2B5EF4-FFF2-40B4-BE49-F238E27FC236}">
-                <a16:creationId xmlns:a16="http://schemas.microsoft.com/office/drawing/2014/main" id="{E8768698-E89C-AB60-02A5-9B15967B85FB}"/>
-              </a:ext>
-            </a:extLst>
-          </p:cNvPr>
-          <p:cNvPicPr>
-            <a:picLocks noChangeAspect="1"/>
-          </p:cNvPicPr>
-          <p:nvPr/>
-        </p:nvPicPr>
-        <p:blipFill>
-          <a:blip r:embed="rId5">
-            <a:extLst>
-              <a:ext uri="{28A0092B-C50C-407E-A947-70E740481C1C}">
-                <a14:useLocalDpi xmlns:a14="http://schemas.microsoft.com/office/drawing/2010/main" val="0"/>
-              </a:ext>
-            </a:extLst>
-          </a:blip>
-          <a:stretch>
-            <a:fillRect/>
-          </a:stretch>
-        </p:blipFill>
-        <p:spPr>
-          <a:xfrm>
-            <a:off x="31364" y="4716607"/>
-            <a:ext cx="1794643" cy="1794643"/>
-          </a:xfrm>
-          <a:prstGeom prst="rect">
-            <a:avLst/>
-          </a:prstGeom>
-        </p:spPr>
-      </p:pic>
-      <p:sp>
-        <p:nvSpPr>
-          <p:cNvPr id="54" name="Arrow: Right 53">
-            <a:extLst>
-              <a:ext uri="{FF2B5EF4-FFF2-40B4-BE49-F238E27FC236}">
-                <a16:creationId xmlns:a16="http://schemas.microsoft.com/office/drawing/2014/main" id="{7DD01F3F-713C-A20A-D1B3-6AFAE0AE02A7}"/>
-              </a:ext>
-            </a:extLst>
-          </p:cNvPr>
-          <p:cNvSpPr/>
-          <p:nvPr/>
-        </p:nvSpPr>
-        <p:spPr>
-          <a:xfrm>
-            <a:off x="7426667" y="3166200"/>
-            <a:ext cx="1787992" cy="1078120"/>
-          </a:xfrm>
-          <a:prstGeom prst="rightArrow">
-            <a:avLst/>
-          </a:prstGeom>
-        </p:spPr>
-        <p:style>
-          <a:lnRef idx="0">
-            <a:schemeClr val="accent6"/>
-          </a:lnRef>
-          <a:fillRef idx="3">
-            <a:schemeClr val="accent6"/>
-          </a:fillRef>
-          <a:effectRef idx="3">
-            <a:schemeClr val="accent6"/>
-          </a:effectRef>
-          <a:fontRef idx="minor">
-            <a:schemeClr val="lt1"/>
-          </a:fontRef>
-        </p:style>
-        <p:txBody>
-          <a:bodyPr rtlCol="0" anchor="ctr"/>
-          <a:lstStyle/>
-          <a:p>
-            <a:pPr algn="ctr"/>
-            <a:r>
-              <a:rPr lang="en-US" dirty="0"/>
-              <a:t>Click on tomatoes</a:t>
-            </a:r>
-          </a:p>
-        </p:txBody>
-      </p:sp>
-      <p:pic>
-        <p:nvPicPr>
-          <p:cNvPr id="57" name="Graphic 56" descr="Cursor with solid fill">
-            <a:extLst>
-              <a:ext uri="{FF2B5EF4-FFF2-40B4-BE49-F238E27FC236}">
-                <a16:creationId xmlns:a16="http://schemas.microsoft.com/office/drawing/2014/main" id="{A5E61D8A-7430-C274-D400-FA93A1B6EE33}"/>
-              </a:ext>
-            </a:extLst>
-          </p:cNvPr>
-          <p:cNvPicPr>
-            <a:picLocks noChangeAspect="1"/>
-          </p:cNvPicPr>
-          <p:nvPr/>
-        </p:nvPicPr>
-        <p:blipFill>
-          <a:blip r:embed="rId6">
-            <a:extLst>
-              <a:ext uri="{28A0092B-C50C-407E-A947-70E740481C1C}">
-                <a14:useLocalDpi xmlns:a14="http://schemas.microsoft.com/office/drawing/2010/main" val="0"/>
-              </a:ext>
-              <a:ext uri="{96DAC541-7B7A-43D3-8B79-37D633B846F1}">
-                <asvg:svgBlip xmlns:asvg="http://schemas.microsoft.com/office/drawing/2016/SVG/main" r:embed="rId7"/>
-              </a:ext>
-            </a:extLst>
-          </a:blip>
-          <a:stretch>
-            <a:fillRect/>
-          </a:stretch>
-        </p:blipFill>
-        <p:spPr>
-          <a:xfrm>
-            <a:off x="6237662" y="1545218"/>
-            <a:ext cx="789988" cy="789988"/>
-          </a:xfrm>
-          <a:prstGeom prst="rect">
-            <a:avLst/>
-          </a:prstGeom>
-        </p:spPr>
-      </p:pic>
-      <p:pic>
-        <p:nvPicPr>
-          <p:cNvPr id="59" name="Picture 58" descr="A picture containing toy&#10;&#10;Description automatically generated">
-            <a:extLst>
-              <a:ext uri="{FF2B5EF4-FFF2-40B4-BE49-F238E27FC236}">
-                <a16:creationId xmlns:a16="http://schemas.microsoft.com/office/drawing/2014/main" id="{7227C457-22E8-C992-7ADF-D83C086C8EF7}"/>
-              </a:ext>
-            </a:extLst>
-          </p:cNvPr>
-          <p:cNvPicPr>
-            <a:picLocks noChangeAspect="1"/>
-          </p:cNvPicPr>
-          <p:nvPr/>
-        </p:nvPicPr>
-        <p:blipFill>
-          <a:blip r:embed="rId8">
-            <a:extLst>
-              <a:ext uri="{28A0092B-C50C-407E-A947-70E740481C1C}">
-                <a14:useLocalDpi xmlns:a14="http://schemas.microsoft.com/office/drawing/2010/main" val="0"/>
-              </a:ext>
-            </a:extLst>
-          </a:blip>
-          <a:stretch>
-            <a:fillRect/>
-          </a:stretch>
-        </p:blipFill>
-        <p:spPr>
-          <a:xfrm>
-            <a:off x="9267822" y="2896231"/>
-            <a:ext cx="2876550" cy="1618059"/>
-          </a:xfrm>
-          <a:prstGeom prst="rect">
-            <a:avLst/>
-          </a:prstGeom>
-        </p:spPr>
-      </p:pic>
-      <p:pic>
-        <p:nvPicPr>
-          <p:cNvPr id="61" name="Picture 60">
-            <a:extLst>
-              <a:ext uri="{FF2B5EF4-FFF2-40B4-BE49-F238E27FC236}">
-                <a16:creationId xmlns:a16="http://schemas.microsoft.com/office/drawing/2014/main" id="{8AAD23B2-4E02-101B-9528-65A73C13B498}"/>
-              </a:ext>
-            </a:extLst>
-          </p:cNvPr>
-          <p:cNvPicPr>
-            <a:picLocks noChangeAspect="1"/>
-          </p:cNvPicPr>
-          <p:nvPr/>
-        </p:nvPicPr>
-        <p:blipFill>
-          <a:blip r:embed="rId9"/>
-          <a:stretch>
-            <a:fillRect/>
-          </a:stretch>
-        </p:blipFill>
-        <p:spPr>
-          <a:xfrm>
-            <a:off x="5446139" y="2881168"/>
-            <a:ext cx="1711122" cy="2315476"/>
-          </a:xfrm>
-          <a:prstGeom prst="rect">
-            <a:avLst/>
-          </a:prstGeom>
-        </p:spPr>
-      </p:pic>
-      <p:pic>
-        <p:nvPicPr>
-          <p:cNvPr id="63" name="Picture 62" descr="A picture containing light&#10;&#10;Description automatically generated">
-            <a:extLst>
-              <a:ext uri="{FF2B5EF4-FFF2-40B4-BE49-F238E27FC236}">
-                <a16:creationId xmlns:a16="http://schemas.microsoft.com/office/drawing/2014/main" id="{74B4B859-6DA5-58F3-4D6C-EB22985B1852}"/>
-              </a:ext>
-            </a:extLst>
-          </p:cNvPr>
-          <p:cNvPicPr>
-            <a:picLocks noChangeAspect="1"/>
-          </p:cNvPicPr>
-          <p:nvPr/>
-        </p:nvPicPr>
-        <p:blipFill>
-          <a:blip r:embed="rId5">
-            <a:extLst>
-              <a:ext uri="{28A0092B-C50C-407E-A947-70E740481C1C}">
-                <a14:useLocalDpi xmlns:a14="http://schemas.microsoft.com/office/drawing/2010/main" val="0"/>
-              </a:ext>
-            </a:extLst>
-          </a:blip>
-          <a:stretch>
-            <a:fillRect/>
-          </a:stretch>
-        </p:blipFill>
-        <p:spPr>
-          <a:xfrm>
-            <a:off x="5340340" y="4845284"/>
-            <a:ext cx="1794643" cy="1794643"/>
-          </a:xfrm>
-          <a:prstGeom prst="rect">
-            <a:avLst/>
-          </a:prstGeom>
-        </p:spPr>
-      </p:pic>
-      <p:pic>
-        <p:nvPicPr>
-          <p:cNvPr id="67" name="Graphic 66" descr="Cursor with solid fill">
-            <a:extLst>
-              <a:ext uri="{FF2B5EF4-FFF2-40B4-BE49-F238E27FC236}">
-                <a16:creationId xmlns:a16="http://schemas.microsoft.com/office/drawing/2014/main" id="{E0CC7214-3623-BF11-DB43-0526DA5D6C71}"/>
-              </a:ext>
-            </a:extLst>
-          </p:cNvPr>
-          <p:cNvPicPr>
-            <a:picLocks noChangeAspect="1"/>
-          </p:cNvPicPr>
-          <p:nvPr/>
-        </p:nvPicPr>
-        <p:blipFill>
-          <a:blip r:embed="rId6">
-            <a:extLst>
-              <a:ext uri="{28A0092B-C50C-407E-A947-70E740481C1C}">
-                <a14:useLocalDpi xmlns:a14="http://schemas.microsoft.com/office/drawing/2010/main" val="0"/>
-              </a:ext>
-              <a:ext uri="{96DAC541-7B7A-43D3-8B79-37D633B846F1}">
-                <asvg:svgBlip xmlns:asvg="http://schemas.microsoft.com/office/drawing/2016/SVG/main" r:embed="rId7"/>
-              </a:ext>
-            </a:extLst>
-          </a:blip>
-          <a:stretch>
-            <a:fillRect/>
-          </a:stretch>
-        </p:blipFill>
-        <p:spPr>
-          <a:xfrm>
-            <a:off x="6133156" y="3508839"/>
-            <a:ext cx="789988" cy="789988"/>
-          </a:xfrm>
-          <a:prstGeom prst="rect">
-            <a:avLst/>
-          </a:prstGeom>
-        </p:spPr>
-      </p:pic>
-      <p:pic>
-        <p:nvPicPr>
-          <p:cNvPr id="68" name="Graphic 67" descr="Cursor with solid fill">
-            <a:extLst>
-              <a:ext uri="{FF2B5EF4-FFF2-40B4-BE49-F238E27FC236}">
-                <a16:creationId xmlns:a16="http://schemas.microsoft.com/office/drawing/2014/main" id="{BC4AE79A-D5C1-1AB5-9F7D-AAED1E61FC98}"/>
-              </a:ext>
-            </a:extLst>
-          </p:cNvPr>
-          <p:cNvPicPr>
-            <a:picLocks noChangeAspect="1"/>
-          </p:cNvPicPr>
-          <p:nvPr/>
-        </p:nvPicPr>
-        <p:blipFill>
-          <a:blip r:embed="rId6">
-            <a:extLst>
-              <a:ext uri="{28A0092B-C50C-407E-A947-70E740481C1C}">
-                <a14:useLocalDpi xmlns:a14="http://schemas.microsoft.com/office/drawing/2010/main" val="0"/>
-              </a:ext>
-              <a:ext uri="{96DAC541-7B7A-43D3-8B79-37D633B846F1}">
-                <asvg:svgBlip xmlns:asvg="http://schemas.microsoft.com/office/drawing/2016/SVG/main" r:embed="rId7"/>
-              </a:ext>
-            </a:extLst>
-          </a:blip>
-          <a:stretch>
-            <a:fillRect/>
-          </a:stretch>
-        </p:blipFill>
-        <p:spPr>
-          <a:xfrm>
-            <a:off x="6019553" y="5495022"/>
-            <a:ext cx="789988" cy="789988"/>
-          </a:xfrm>
-          <a:prstGeom prst="rect">
-            <a:avLst/>
-          </a:prstGeom>
-        </p:spPr>
-      </p:pic>
-      <p:sp>
-        <p:nvSpPr>
-          <p:cNvPr id="69" name="Arrow: Right 68">
-            <a:extLst>
-              <a:ext uri="{FF2B5EF4-FFF2-40B4-BE49-F238E27FC236}">
-                <a16:creationId xmlns:a16="http://schemas.microsoft.com/office/drawing/2014/main" id="{B2075F2A-E7EF-9BBC-3FBE-1B3E0253E216}"/>
-              </a:ext>
-            </a:extLst>
-          </p:cNvPr>
-          <p:cNvSpPr/>
-          <p:nvPr/>
-        </p:nvSpPr>
-        <p:spPr>
-          <a:xfrm rot="20133203">
-            <a:off x="7479830" y="4680839"/>
-            <a:ext cx="1787992" cy="1078120"/>
-          </a:xfrm>
-          <a:prstGeom prst="rightArrow">
-            <a:avLst/>
-          </a:prstGeom>
-        </p:spPr>
-        <p:style>
-          <a:lnRef idx="0">
-            <a:schemeClr val="accent6"/>
-          </a:lnRef>
-          <a:fillRef idx="3">
-            <a:schemeClr val="accent6"/>
-          </a:fillRef>
-          <a:effectRef idx="3">
-            <a:schemeClr val="accent6"/>
-          </a:effectRef>
-          <a:fontRef idx="minor">
-            <a:schemeClr val="lt1"/>
-          </a:fontRef>
-        </p:style>
-        <p:txBody>
-          <a:bodyPr rtlCol="0" anchor="ctr"/>
-          <a:lstStyle/>
-          <a:p>
-            <a:pPr algn="ctr"/>
-            <a:r>
-              <a:rPr lang="en-US" dirty="0"/>
-              <a:t>Click on wheat</a:t>
-            </a:r>
-          </a:p>
-        </p:txBody>
-      </p:sp>
-      <p:sp>
-        <p:nvSpPr>
-          <p:cNvPr id="70" name="Arrow: Right 69">
-            <a:extLst>
-              <a:ext uri="{FF2B5EF4-FFF2-40B4-BE49-F238E27FC236}">
-                <a16:creationId xmlns:a16="http://schemas.microsoft.com/office/drawing/2014/main" id="{9574F44D-C879-0215-F12D-589C70E7ED12}"/>
-              </a:ext>
-            </a:extLst>
-          </p:cNvPr>
-          <p:cNvSpPr/>
-          <p:nvPr/>
-        </p:nvSpPr>
-        <p:spPr>
-          <a:xfrm rot="1623653">
-            <a:off x="7425134" y="1713808"/>
-            <a:ext cx="1787992" cy="1078120"/>
-          </a:xfrm>
-          <a:prstGeom prst="rightArrow">
-            <a:avLst/>
-          </a:prstGeom>
-        </p:spPr>
-        <p:style>
-          <a:lnRef idx="0">
-            <a:schemeClr val="accent6"/>
-          </a:lnRef>
-          <a:fillRef idx="3">
-            <a:schemeClr val="accent6"/>
-          </a:fillRef>
-          <a:effectRef idx="3">
-            <a:schemeClr val="accent6"/>
-          </a:effectRef>
-          <a:fontRef idx="minor">
-            <a:schemeClr val="lt1"/>
-          </a:fontRef>
-        </p:style>
-        <p:txBody>
-          <a:bodyPr rtlCol="0" anchor="ctr"/>
-          <a:lstStyle/>
-          <a:p>
-            <a:pPr algn="ctr"/>
-            <a:r>
-              <a:rPr lang="en-US" dirty="0"/>
-              <a:t>Click on apples</a:t>
+              <a:t>Shortcut</a:t>
             </a:r>
           </a:p>
         </p:txBody>
@@ -7423,7 +10041,7 @@
     </p:spTree>
     <p:extLst>
       <p:ext uri="{BB962C8B-B14F-4D97-AF65-F5344CB8AC3E}">
-        <p14:creationId xmlns:p14="http://schemas.microsoft.com/office/powerpoint/2010/main" val="603461540"/>
+        <p14:creationId xmlns:p14="http://schemas.microsoft.com/office/powerpoint/2010/main" val="47746131"/>
       </p:ext>
     </p:extLst>
   </p:cSld>
@@ -7450,6 +10068,36 @@
           <a:chExt cx="0" cy="0"/>
         </a:xfrm>
       </p:grpSpPr>
+      <p:pic>
+        <p:nvPicPr>
+          <p:cNvPr id="5" name="Picture 4">
+            <a:extLst>
+              <a:ext uri="{FF2B5EF4-FFF2-40B4-BE49-F238E27FC236}">
+                <a16:creationId xmlns:a16="http://schemas.microsoft.com/office/drawing/2014/main" id="{1DF86290-6D87-6F00-B6BF-593F74F430B2}"/>
+              </a:ext>
+            </a:extLst>
+          </p:cNvPr>
+          <p:cNvPicPr>
+            <a:picLocks noChangeAspect="1"/>
+          </p:cNvPicPr>
+          <p:nvPr/>
+        </p:nvPicPr>
+        <p:blipFill>
+          <a:blip r:embed="rId2"/>
+          <a:stretch>
+            <a:fillRect/>
+          </a:stretch>
+        </p:blipFill>
+        <p:spPr>
+          <a:xfrm>
+            <a:off x="4933949" y="718125"/>
+            <a:ext cx="2276475" cy="2315895"/>
+          </a:xfrm>
+          <a:prstGeom prst="rect">
+            <a:avLst/>
+          </a:prstGeom>
+        </p:spPr>
+      </p:pic>
       <p:sp>
         <p:nvSpPr>
           <p:cNvPr id="11" name="TextBox 10">
@@ -7485,17 +10133,17 @@
                   <a:schemeClr val="bg1"/>
                 </a:solidFill>
               </a:rPr>
-              <a:t>Collecting buckets, water and milk</a:t>
+              <a:t>Collecting apples 🍏, tomatoes 🍅 or wheat🌾 </a:t>
             </a:r>
           </a:p>
         </p:txBody>
       </p:sp>
       <p:pic>
         <p:nvPicPr>
-          <p:cNvPr id="59" name="Picture 58" descr="A picture containing toy&#10;&#10;Description automatically generated">
-            <a:extLst>
-              <a:ext uri="{FF2B5EF4-FFF2-40B4-BE49-F238E27FC236}">
-                <a16:creationId xmlns:a16="http://schemas.microsoft.com/office/drawing/2014/main" id="{7227C457-22E8-C992-7ADF-D83C086C8EF7}"/>
+          <p:cNvPr id="48" name="Picture 47">
+            <a:extLst>
+              <a:ext uri="{FF2B5EF4-FFF2-40B4-BE49-F238E27FC236}">
+                <a16:creationId xmlns:a16="http://schemas.microsoft.com/office/drawing/2014/main" id="{2B0B7EBE-7EE7-1C7B-A52D-EC65C6853AFE}"/>
               </a:ext>
             </a:extLst>
           </p:cNvPr>
@@ -7505,7 +10153,7 @@
           <p:nvPr/>
         </p:nvPicPr>
         <p:blipFill>
-          <a:blip r:embed="rId2">
+          <a:blip r:embed="rId3">
             <a:extLst>
               <a:ext uri="{28A0092B-C50C-407E-A947-70E740481C1C}">
                 <a14:useLocalDpi xmlns:a14="http://schemas.microsoft.com/office/drawing/2010/main" val="0"/>
@@ -7518,8 +10166,8 @@
         </p:blipFill>
         <p:spPr>
           <a:xfrm>
-            <a:off x="9425170" y="2984740"/>
-            <a:ext cx="2719201" cy="1529550"/>
+            <a:off x="-209551" y="584775"/>
+            <a:ext cx="2276475" cy="2276475"/>
           </a:xfrm>
           <a:prstGeom prst="rect">
             <a:avLst/>
@@ -7528,10 +10176,10 @@
       </p:pic>
       <p:pic>
         <p:nvPicPr>
-          <p:cNvPr id="3" name="Picture 2" descr="A picture containing yellow&#10;&#10;Description automatically generated">
-            <a:extLst>
-              <a:ext uri="{FF2B5EF4-FFF2-40B4-BE49-F238E27FC236}">
-                <a16:creationId xmlns:a16="http://schemas.microsoft.com/office/drawing/2014/main" id="{DB24A937-2A5C-0E97-5346-8441C55CEE65}"/>
+          <p:cNvPr id="50" name="Picture 49" descr="A picture containing umbrella, accessory&#10;&#10;Description automatically generated">
+            <a:extLst>
+              <a:ext uri="{FF2B5EF4-FFF2-40B4-BE49-F238E27FC236}">
+                <a16:creationId xmlns:a16="http://schemas.microsoft.com/office/drawing/2014/main" id="{FF57BF49-A2ED-58DF-D8D3-A99E0E3A34AC}"/>
               </a:ext>
             </a:extLst>
           </p:cNvPr>
@@ -7541,7 +10189,7 @@
           <p:nvPr/>
         </p:nvPicPr>
         <p:blipFill>
-          <a:blip r:embed="rId3">
+          <a:blip r:embed="rId4">
             <a:extLst>
               <a:ext uri="{28A0092B-C50C-407E-A947-70E740481C1C}">
                 <a14:useLocalDpi xmlns:a14="http://schemas.microsoft.com/office/drawing/2010/main" val="0"/>
@@ -7554,8 +10202,8 @@
         </p:blipFill>
         <p:spPr>
           <a:xfrm>
-            <a:off x="466702" y="4761382"/>
-            <a:ext cx="1794643" cy="1794643"/>
+            <a:off x="73125" y="2849700"/>
+            <a:ext cx="1711122" cy="1711122"/>
           </a:xfrm>
           <a:prstGeom prst="rect">
             <a:avLst/>
@@ -7564,40 +10212,10 @@
       </p:pic>
       <p:pic>
         <p:nvPicPr>
-          <p:cNvPr id="9" name="Picture 8">
-            <a:extLst>
-              <a:ext uri="{FF2B5EF4-FFF2-40B4-BE49-F238E27FC236}">
-                <a16:creationId xmlns:a16="http://schemas.microsoft.com/office/drawing/2014/main" id="{AA4DA148-BF79-4521-F433-F00CC51C7FC9}"/>
-              </a:ext>
-            </a:extLst>
-          </p:cNvPr>
-          <p:cNvPicPr>
-            <a:picLocks noChangeAspect="1"/>
-          </p:cNvPicPr>
-          <p:nvPr/>
-        </p:nvPicPr>
-        <p:blipFill>
-          <a:blip r:embed="rId4"/>
-          <a:stretch>
-            <a:fillRect/>
-          </a:stretch>
-        </p:blipFill>
-        <p:spPr>
-          <a:xfrm>
-            <a:off x="3419520" y="927741"/>
-            <a:ext cx="1639787" cy="1517414"/>
-          </a:xfrm>
-          <a:prstGeom prst="rect">
-            <a:avLst/>
-          </a:prstGeom>
-        </p:spPr>
-      </p:pic>
-      <p:pic>
-        <p:nvPicPr>
-          <p:cNvPr id="6" name="Picture 5" descr="A picture containing yellow&#10;&#10;Description automatically generated">
-            <a:extLst>
-              <a:ext uri="{FF2B5EF4-FFF2-40B4-BE49-F238E27FC236}">
-                <a16:creationId xmlns:a16="http://schemas.microsoft.com/office/drawing/2014/main" id="{D1FF5F0A-AD35-2A8F-29B6-BFC594322DBA}"/>
+          <p:cNvPr id="52" name="Picture 51" descr="A picture containing light&#10;&#10;Description automatically generated">
+            <a:extLst>
+              <a:ext uri="{FF2B5EF4-FFF2-40B4-BE49-F238E27FC236}">
+                <a16:creationId xmlns:a16="http://schemas.microsoft.com/office/drawing/2014/main" id="{E8768698-E89C-AB60-02A5-9B15967B85FB}"/>
               </a:ext>
             </a:extLst>
           </p:cNvPr>
@@ -7620,44 +10238,8 @@
         </p:blipFill>
         <p:spPr>
           <a:xfrm>
-            <a:off x="412509" y="2753744"/>
-            <a:ext cx="1903031" cy="1903031"/>
-          </a:xfrm>
-          <a:prstGeom prst="rect">
-            <a:avLst/>
-          </a:prstGeom>
-        </p:spPr>
-      </p:pic>
-      <p:pic>
-        <p:nvPicPr>
-          <p:cNvPr id="8" name="Picture 7" descr="A picture containing box&#10;&#10;Description automatically generated">
-            <a:extLst>
-              <a:ext uri="{FF2B5EF4-FFF2-40B4-BE49-F238E27FC236}">
-                <a16:creationId xmlns:a16="http://schemas.microsoft.com/office/drawing/2014/main" id="{76CD83DF-A6C8-E58F-6B72-92A4F089205A}"/>
-              </a:ext>
-            </a:extLst>
-          </p:cNvPr>
-          <p:cNvPicPr>
-            <a:picLocks noChangeAspect="1"/>
-          </p:cNvPicPr>
-          <p:nvPr/>
-        </p:nvPicPr>
-        <p:blipFill>
-          <a:blip r:embed="rId6">
-            <a:extLst>
-              <a:ext uri="{28A0092B-C50C-407E-A947-70E740481C1C}">
-                <a14:useLocalDpi xmlns:a14="http://schemas.microsoft.com/office/drawing/2010/main" val="0"/>
-              </a:ext>
-            </a:extLst>
-          </a:blip>
-          <a:stretch>
-            <a:fillRect/>
-          </a:stretch>
-        </p:blipFill>
-        <p:spPr>
-          <a:xfrm>
-            <a:off x="359023" y="730307"/>
-            <a:ext cx="2020391" cy="2020391"/>
+            <a:off x="31364" y="4716607"/>
+            <a:ext cx="1794643" cy="1794643"/>
           </a:xfrm>
           <a:prstGeom prst="rect">
             <a:avLst/>
@@ -7666,10 +10248,10 @@
       </p:pic>
       <p:sp>
         <p:nvSpPr>
-          <p:cNvPr id="12" name="Arrow: Bent 11">
-            <a:extLst>
-              <a:ext uri="{FF2B5EF4-FFF2-40B4-BE49-F238E27FC236}">
-                <a16:creationId xmlns:a16="http://schemas.microsoft.com/office/drawing/2014/main" id="{43B66A1A-1E52-F235-C98B-C2FCA32819C6}"/>
+          <p:cNvPr id="54" name="Arrow: Right 53">
+            <a:extLst>
+              <a:ext uri="{FF2B5EF4-FFF2-40B4-BE49-F238E27FC236}">
+                <a16:creationId xmlns:a16="http://schemas.microsoft.com/office/drawing/2014/main" id="{7DD01F3F-713C-A20A-D1B3-6AFAE0AE02A7}"/>
               </a:ext>
             </a:extLst>
           </p:cNvPr>
@@ -7678,10 +10260,10 @@
         </p:nvSpPr>
         <p:spPr>
           <a:xfrm>
-            <a:off x="3113368" y="1397479"/>
-            <a:ext cx="759892" cy="871268"/>
-          </a:xfrm>
-          <a:prstGeom prst="bentArrow">
+            <a:off x="7426667" y="3166200"/>
+            <a:ext cx="1787992" cy="1078120"/>
+          </a:xfrm>
+          <a:prstGeom prst="rightArrow">
             <a:avLst/>
           </a:prstGeom>
         </p:spPr>
@@ -7704,20 +10286,19 @@
           <a:lstStyle/>
           <a:p>
             <a:pPr algn="ctr"/>
-            <a:endParaRPr lang="en-US">
-              <a:solidFill>
-                <a:schemeClr val="tx1"/>
-              </a:solidFill>
-            </a:endParaRPr>
+            <a:r>
+              <a:rPr lang="en-US" dirty="0"/>
+              <a:t>Click on tomatoes</a:t>
+            </a:r>
           </a:p>
         </p:txBody>
       </p:sp>
       <p:pic>
         <p:nvPicPr>
-          <p:cNvPr id="14" name="Picture 13" descr="A picture containing toy&#10;&#10;Description automatically generated">
-            <a:extLst>
-              <a:ext uri="{FF2B5EF4-FFF2-40B4-BE49-F238E27FC236}">
-                <a16:creationId xmlns:a16="http://schemas.microsoft.com/office/drawing/2014/main" id="{6E71BF46-26F3-691C-32E1-82DC7057FEA8}"/>
+          <p:cNvPr id="57" name="Graphic 56" descr="Cursor with solid fill">
+            <a:extLst>
+              <a:ext uri="{FF2B5EF4-FFF2-40B4-BE49-F238E27FC236}">
+                <a16:creationId xmlns:a16="http://schemas.microsoft.com/office/drawing/2014/main" id="{A5E61D8A-7430-C274-D400-FA93A1B6EE33}"/>
               </a:ext>
             </a:extLst>
           </p:cNvPr>
@@ -7727,10 +10308,13 @@
           <p:nvPr/>
         </p:nvPicPr>
         <p:blipFill>
-          <a:blip r:embed="rId2">
+          <a:blip r:embed="rId6">
             <a:extLst>
               <a:ext uri="{28A0092B-C50C-407E-A947-70E740481C1C}">
                 <a14:useLocalDpi xmlns:a14="http://schemas.microsoft.com/office/drawing/2010/main" val="0"/>
+              </a:ext>
+              <a:ext uri="{96DAC541-7B7A-43D3-8B79-37D633B846F1}">
+                <asvg:svgBlip xmlns:asvg="http://schemas.microsoft.com/office/drawing/2016/SVG/main" r:embed="rId7"/>
               </a:ext>
             </a:extLst>
           </a:blip>
@@ -7740,8 +10324,188 @@
         </p:blipFill>
         <p:spPr>
           <a:xfrm>
-            <a:off x="2543289" y="2394099"/>
-            <a:ext cx="1267906" cy="713197"/>
+            <a:off x="6237662" y="1545218"/>
+            <a:ext cx="789988" cy="789988"/>
+          </a:xfrm>
+          <a:prstGeom prst="rect">
+            <a:avLst/>
+          </a:prstGeom>
+        </p:spPr>
+      </p:pic>
+      <p:pic>
+        <p:nvPicPr>
+          <p:cNvPr id="59" name="Picture 58" descr="A picture containing toy&#10;&#10;Description automatically generated">
+            <a:extLst>
+              <a:ext uri="{FF2B5EF4-FFF2-40B4-BE49-F238E27FC236}">
+                <a16:creationId xmlns:a16="http://schemas.microsoft.com/office/drawing/2014/main" id="{7227C457-22E8-C992-7ADF-D83C086C8EF7}"/>
+              </a:ext>
+            </a:extLst>
+          </p:cNvPr>
+          <p:cNvPicPr>
+            <a:picLocks noChangeAspect="1"/>
+          </p:cNvPicPr>
+          <p:nvPr/>
+        </p:nvPicPr>
+        <p:blipFill>
+          <a:blip r:embed="rId8">
+            <a:extLst>
+              <a:ext uri="{28A0092B-C50C-407E-A947-70E740481C1C}">
+                <a14:useLocalDpi xmlns:a14="http://schemas.microsoft.com/office/drawing/2010/main" val="0"/>
+              </a:ext>
+            </a:extLst>
+          </a:blip>
+          <a:stretch>
+            <a:fillRect/>
+          </a:stretch>
+        </p:blipFill>
+        <p:spPr>
+          <a:xfrm>
+            <a:off x="9267822" y="2896231"/>
+            <a:ext cx="2876550" cy="1618059"/>
+          </a:xfrm>
+          <a:prstGeom prst="rect">
+            <a:avLst/>
+          </a:prstGeom>
+        </p:spPr>
+      </p:pic>
+      <p:pic>
+        <p:nvPicPr>
+          <p:cNvPr id="61" name="Picture 60">
+            <a:extLst>
+              <a:ext uri="{FF2B5EF4-FFF2-40B4-BE49-F238E27FC236}">
+                <a16:creationId xmlns:a16="http://schemas.microsoft.com/office/drawing/2014/main" id="{8AAD23B2-4E02-101B-9528-65A73C13B498}"/>
+              </a:ext>
+            </a:extLst>
+          </p:cNvPr>
+          <p:cNvPicPr>
+            <a:picLocks noChangeAspect="1"/>
+          </p:cNvPicPr>
+          <p:nvPr/>
+        </p:nvPicPr>
+        <p:blipFill>
+          <a:blip r:embed="rId9"/>
+          <a:stretch>
+            <a:fillRect/>
+          </a:stretch>
+        </p:blipFill>
+        <p:spPr>
+          <a:xfrm>
+            <a:off x="5446139" y="2881168"/>
+            <a:ext cx="1711122" cy="2315476"/>
+          </a:xfrm>
+          <a:prstGeom prst="rect">
+            <a:avLst/>
+          </a:prstGeom>
+        </p:spPr>
+      </p:pic>
+      <p:pic>
+        <p:nvPicPr>
+          <p:cNvPr id="63" name="Picture 62" descr="A picture containing light&#10;&#10;Description automatically generated">
+            <a:extLst>
+              <a:ext uri="{FF2B5EF4-FFF2-40B4-BE49-F238E27FC236}">
+                <a16:creationId xmlns:a16="http://schemas.microsoft.com/office/drawing/2014/main" id="{74B4B859-6DA5-58F3-4D6C-EB22985B1852}"/>
+              </a:ext>
+            </a:extLst>
+          </p:cNvPr>
+          <p:cNvPicPr>
+            <a:picLocks noChangeAspect="1"/>
+          </p:cNvPicPr>
+          <p:nvPr/>
+        </p:nvPicPr>
+        <p:blipFill>
+          <a:blip r:embed="rId5">
+            <a:extLst>
+              <a:ext uri="{28A0092B-C50C-407E-A947-70E740481C1C}">
+                <a14:useLocalDpi xmlns:a14="http://schemas.microsoft.com/office/drawing/2010/main" val="0"/>
+              </a:ext>
+            </a:extLst>
+          </a:blip>
+          <a:stretch>
+            <a:fillRect/>
+          </a:stretch>
+        </p:blipFill>
+        <p:spPr>
+          <a:xfrm>
+            <a:off x="5340340" y="4845284"/>
+            <a:ext cx="1794643" cy="1794643"/>
+          </a:xfrm>
+          <a:prstGeom prst="rect">
+            <a:avLst/>
+          </a:prstGeom>
+        </p:spPr>
+      </p:pic>
+      <p:pic>
+        <p:nvPicPr>
+          <p:cNvPr id="67" name="Graphic 66" descr="Cursor with solid fill">
+            <a:extLst>
+              <a:ext uri="{FF2B5EF4-FFF2-40B4-BE49-F238E27FC236}">
+                <a16:creationId xmlns:a16="http://schemas.microsoft.com/office/drawing/2014/main" id="{E0CC7214-3623-BF11-DB43-0526DA5D6C71}"/>
+              </a:ext>
+            </a:extLst>
+          </p:cNvPr>
+          <p:cNvPicPr>
+            <a:picLocks noChangeAspect="1"/>
+          </p:cNvPicPr>
+          <p:nvPr/>
+        </p:nvPicPr>
+        <p:blipFill>
+          <a:blip r:embed="rId6">
+            <a:extLst>
+              <a:ext uri="{28A0092B-C50C-407E-A947-70E740481C1C}">
+                <a14:useLocalDpi xmlns:a14="http://schemas.microsoft.com/office/drawing/2010/main" val="0"/>
+              </a:ext>
+              <a:ext uri="{96DAC541-7B7A-43D3-8B79-37D633B846F1}">
+                <asvg:svgBlip xmlns:asvg="http://schemas.microsoft.com/office/drawing/2016/SVG/main" r:embed="rId7"/>
+              </a:ext>
+            </a:extLst>
+          </a:blip>
+          <a:stretch>
+            <a:fillRect/>
+          </a:stretch>
+        </p:blipFill>
+        <p:spPr>
+          <a:xfrm>
+            <a:off x="6133156" y="3508839"/>
+            <a:ext cx="789988" cy="789988"/>
+          </a:xfrm>
+          <a:prstGeom prst="rect">
+            <a:avLst/>
+          </a:prstGeom>
+        </p:spPr>
+      </p:pic>
+      <p:pic>
+        <p:nvPicPr>
+          <p:cNvPr id="68" name="Graphic 67" descr="Cursor with solid fill">
+            <a:extLst>
+              <a:ext uri="{FF2B5EF4-FFF2-40B4-BE49-F238E27FC236}">
+                <a16:creationId xmlns:a16="http://schemas.microsoft.com/office/drawing/2014/main" id="{BC4AE79A-D5C1-1AB5-9F7D-AAED1E61FC98}"/>
+              </a:ext>
+            </a:extLst>
+          </p:cNvPr>
+          <p:cNvPicPr>
+            <a:picLocks noChangeAspect="1"/>
+          </p:cNvPicPr>
+          <p:nvPr/>
+        </p:nvPicPr>
+        <p:blipFill>
+          <a:blip r:embed="rId6">
+            <a:extLst>
+              <a:ext uri="{28A0092B-C50C-407E-A947-70E740481C1C}">
+                <a14:useLocalDpi xmlns:a14="http://schemas.microsoft.com/office/drawing/2010/main" val="0"/>
+              </a:ext>
+              <a:ext uri="{96DAC541-7B7A-43D3-8B79-37D633B846F1}">
+                <asvg:svgBlip xmlns:asvg="http://schemas.microsoft.com/office/drawing/2016/SVG/main" r:embed="rId7"/>
+              </a:ext>
+            </a:extLst>
+          </a:blip>
+          <a:stretch>
+            <a:fillRect/>
+          </a:stretch>
+        </p:blipFill>
+        <p:spPr>
+          <a:xfrm>
+            <a:off x="6019553" y="5495022"/>
+            <a:ext cx="789988" cy="789988"/>
           </a:xfrm>
           <a:prstGeom prst="rect">
             <a:avLst/>
@@ -7750,10 +10514,10 @@
       </p:pic>
       <p:sp>
         <p:nvSpPr>
-          <p:cNvPr id="16" name="Arrow: Right 15">
-            <a:extLst>
-              <a:ext uri="{FF2B5EF4-FFF2-40B4-BE49-F238E27FC236}">
-                <a16:creationId xmlns:a16="http://schemas.microsoft.com/office/drawing/2014/main" id="{3F3DD1B3-A258-09E7-BD25-DC226463AB84}"/>
+          <p:cNvPr id="69" name="Arrow: Right 68">
+            <a:extLst>
+              <a:ext uri="{FF2B5EF4-FFF2-40B4-BE49-F238E27FC236}">
+                <a16:creationId xmlns:a16="http://schemas.microsoft.com/office/drawing/2014/main" id="{B2075F2A-E7EF-9BBC-3FBE-1B3E0253E216}"/>
               </a:ext>
             </a:extLst>
           </p:cNvPr>
@@ -7761,8 +10525,8 @@
           <p:nvPr/>
         </p:nvSpPr>
         <p:spPr>
-          <a:xfrm rot="1623653">
-            <a:off x="8356242" y="1855038"/>
+          <a:xfrm rot="20133203">
+            <a:off x="7479830" y="4680839"/>
             <a:ext cx="1787992" cy="1078120"/>
           </a:xfrm>
           <a:prstGeom prst="rightArrow">
@@ -7790,164 +10554,17 @@
             <a:pPr algn="ctr"/>
             <a:r>
               <a:rPr lang="en-US" dirty="0"/>
-              <a:t>Click on apples</a:t>
+              <a:t>Click on wheat</a:t>
             </a:r>
           </a:p>
         </p:txBody>
       </p:sp>
-      <p:pic>
-        <p:nvPicPr>
-          <p:cNvPr id="17" name="Picture 16" descr="A picture containing box&#10;&#10;Description automatically generated">
-            <a:extLst>
-              <a:ext uri="{FF2B5EF4-FFF2-40B4-BE49-F238E27FC236}">
-                <a16:creationId xmlns:a16="http://schemas.microsoft.com/office/drawing/2014/main" id="{38771A27-B2EF-6BE6-2163-AF21E8092FC8}"/>
-              </a:ext>
-            </a:extLst>
-          </p:cNvPr>
-          <p:cNvPicPr>
-            <a:picLocks noChangeAspect="1"/>
-          </p:cNvPicPr>
-          <p:nvPr/>
-        </p:nvPicPr>
-        <p:blipFill>
-          <a:blip r:embed="rId6">
-            <a:extLst>
-              <a:ext uri="{28A0092B-C50C-407E-A947-70E740481C1C}">
-                <a14:useLocalDpi xmlns:a14="http://schemas.microsoft.com/office/drawing/2010/main" val="0"/>
-              </a:ext>
-            </a:extLst>
-          </a:blip>
-          <a:stretch>
-            <a:fillRect/>
-          </a:stretch>
-        </p:blipFill>
-        <p:spPr>
-          <a:xfrm>
-            <a:off x="6553153" y="730306"/>
-            <a:ext cx="2020391" cy="2020391"/>
-          </a:xfrm>
-          <a:prstGeom prst="rect">
-            <a:avLst/>
-          </a:prstGeom>
-        </p:spPr>
-      </p:pic>
-      <p:pic>
-        <p:nvPicPr>
-          <p:cNvPr id="15" name="Graphic 14" descr="Cursor with solid fill">
-            <a:extLst>
-              <a:ext uri="{FF2B5EF4-FFF2-40B4-BE49-F238E27FC236}">
-                <a16:creationId xmlns:a16="http://schemas.microsoft.com/office/drawing/2014/main" id="{F66C616F-5CC3-B43A-CDED-F6E3C888FA27}"/>
-              </a:ext>
-            </a:extLst>
-          </p:cNvPr>
-          <p:cNvPicPr>
-            <a:picLocks noChangeAspect="1"/>
-          </p:cNvPicPr>
-          <p:nvPr/>
-        </p:nvPicPr>
-        <p:blipFill>
-          <a:blip r:embed="rId7">
-            <a:extLst>
-              <a:ext uri="{28A0092B-C50C-407E-A947-70E740481C1C}">
-                <a14:useLocalDpi xmlns:a14="http://schemas.microsoft.com/office/drawing/2010/main" val="0"/>
-              </a:ext>
-              <a:ext uri="{96DAC541-7B7A-43D3-8B79-37D633B846F1}">
-                <asvg:svgBlip xmlns:asvg="http://schemas.microsoft.com/office/drawing/2016/SVG/main" r:embed="rId8"/>
-              </a:ext>
-            </a:extLst>
-          </a:blip>
-          <a:stretch>
-            <a:fillRect/>
-          </a:stretch>
-        </p:blipFill>
-        <p:spPr>
-          <a:xfrm>
-            <a:off x="7418887" y="1699388"/>
-            <a:ext cx="789988" cy="789988"/>
-          </a:xfrm>
-          <a:prstGeom prst="rect">
-            <a:avLst/>
-          </a:prstGeom>
-        </p:spPr>
-      </p:pic>
-      <p:pic>
-        <p:nvPicPr>
-          <p:cNvPr id="18" name="Picture 17" descr="A picture containing toy&#10;&#10;Description automatically generated">
-            <a:extLst>
-              <a:ext uri="{FF2B5EF4-FFF2-40B4-BE49-F238E27FC236}">
-                <a16:creationId xmlns:a16="http://schemas.microsoft.com/office/drawing/2014/main" id="{E75D81FA-D393-55DB-A657-EF48F2CC2DDD}"/>
-              </a:ext>
-            </a:extLst>
-          </p:cNvPr>
-          <p:cNvPicPr>
-            <a:picLocks noChangeAspect="1"/>
-          </p:cNvPicPr>
-          <p:nvPr/>
-        </p:nvPicPr>
-        <p:blipFill>
-          <a:blip r:embed="rId2">
-            <a:extLst>
-              <a:ext uri="{28A0092B-C50C-407E-A947-70E740481C1C}">
-                <a14:useLocalDpi xmlns:a14="http://schemas.microsoft.com/office/drawing/2010/main" val="0"/>
-              </a:ext>
-            </a:extLst>
-          </a:blip>
-          <a:stretch>
-            <a:fillRect/>
-          </a:stretch>
-        </p:blipFill>
-        <p:spPr>
-          <a:xfrm>
-            <a:off x="2315540" y="3244093"/>
-            <a:ext cx="1823966" cy="1025981"/>
-          </a:xfrm>
-          <a:prstGeom prst="rect">
-            <a:avLst/>
-          </a:prstGeom>
-        </p:spPr>
-      </p:pic>
-      <p:pic>
-        <p:nvPicPr>
-          <p:cNvPr id="19" name="Picture 18" descr="A picture containing box&#10;&#10;Description automatically generated">
-            <a:extLst>
-              <a:ext uri="{FF2B5EF4-FFF2-40B4-BE49-F238E27FC236}">
-                <a16:creationId xmlns:a16="http://schemas.microsoft.com/office/drawing/2014/main" id="{D8F3C3A9-08F8-8107-C890-EF9BEA07BA87}"/>
-              </a:ext>
-            </a:extLst>
-          </p:cNvPr>
-          <p:cNvPicPr>
-            <a:picLocks noChangeAspect="1"/>
-          </p:cNvPicPr>
-          <p:nvPr/>
-        </p:nvPicPr>
-        <p:blipFill>
-          <a:blip r:embed="rId6">
-            <a:extLst>
-              <a:ext uri="{28A0092B-C50C-407E-A947-70E740481C1C}">
-                <a14:useLocalDpi xmlns:a14="http://schemas.microsoft.com/office/drawing/2010/main" val="0"/>
-              </a:ext>
-            </a:extLst>
-          </a:blip>
-          <a:stretch>
-            <a:fillRect/>
-          </a:stretch>
-        </p:blipFill>
-        <p:spPr>
-          <a:xfrm>
-            <a:off x="3038116" y="3496476"/>
-            <a:ext cx="910395" cy="910395"/>
-          </a:xfrm>
-          <a:prstGeom prst="rect">
-            <a:avLst/>
-          </a:prstGeom>
-        </p:spPr>
-      </p:pic>
       <p:sp>
         <p:nvSpPr>
-          <p:cNvPr id="20" name="Arrow: Right 19">
-            <a:extLst>
-              <a:ext uri="{FF2B5EF4-FFF2-40B4-BE49-F238E27FC236}">
-                <a16:creationId xmlns:a16="http://schemas.microsoft.com/office/drawing/2014/main" id="{1E2E4E05-0086-E50E-B082-D62B29B550FA}"/>
+          <p:cNvPr id="70" name="Arrow: Right 69">
+            <a:extLst>
+              <a:ext uri="{FF2B5EF4-FFF2-40B4-BE49-F238E27FC236}">
+                <a16:creationId xmlns:a16="http://schemas.microsoft.com/office/drawing/2014/main" id="{9574F44D-C879-0215-F12D-589C70E7ED12}"/>
               </a:ext>
             </a:extLst>
           </p:cNvPr>
@@ -7955,15 +10572,12 @@
           <p:nvPr/>
         </p:nvSpPr>
         <p:spPr>
-          <a:xfrm rot="20774537">
-            <a:off x="3971000" y="2902334"/>
-            <a:ext cx="2593068" cy="768692"/>
+          <a:xfrm rot="1623653">
+            <a:off x="7425134" y="1713808"/>
+            <a:ext cx="1787992" cy="1078120"/>
           </a:xfrm>
           <a:prstGeom prst="rightArrow">
-            <a:avLst>
-              <a:gd name="adj1" fmla="val 53998"/>
-              <a:gd name="adj2" fmla="val 60662"/>
-            </a:avLst>
+            <a:avLst/>
           </a:prstGeom>
         </p:spPr>
         <p:style>
@@ -7987,17 +10601,17 @@
             <a:pPr algn="ctr"/>
             <a:r>
               <a:rPr lang="en-US" dirty="0"/>
-              <a:t>Have bucket in storage </a:t>
+              <a:t>Click on apples</a:t>
             </a:r>
           </a:p>
         </p:txBody>
       </p:sp>
       <p:pic>
         <p:nvPicPr>
-          <p:cNvPr id="22" name="Picture 21">
-            <a:extLst>
-              <a:ext uri="{FF2B5EF4-FFF2-40B4-BE49-F238E27FC236}">
-                <a16:creationId xmlns:a16="http://schemas.microsoft.com/office/drawing/2014/main" id="{ECE93F01-56FC-CFE0-F64C-5A4196D3FDA0}"/>
+          <p:cNvPr id="3" name="Picture 2" descr="Icon&#10;&#10;Description automatically generated">
+            <a:extLst>
+              <a:ext uri="{FF2B5EF4-FFF2-40B4-BE49-F238E27FC236}">
+                <a16:creationId xmlns:a16="http://schemas.microsoft.com/office/drawing/2014/main" id="{5B0EF7CB-EF00-FFBB-9328-8C912AAF9E22}"/>
               </a:ext>
             </a:extLst>
           </p:cNvPr>
@@ -8007,43 +10621,10 @@
           <p:nvPr/>
         </p:nvPicPr>
         <p:blipFill>
-          <a:blip r:embed="rId9"/>
-          <a:stretch>
-            <a:fillRect/>
-          </a:stretch>
-        </p:blipFill>
-        <p:spPr>
-          <a:xfrm>
-            <a:off x="6674314" y="2448432"/>
-            <a:ext cx="687107" cy="1173807"/>
-          </a:xfrm>
-          <a:prstGeom prst="rect">
-            <a:avLst/>
-          </a:prstGeom>
-        </p:spPr>
-      </p:pic>
-      <p:pic>
-        <p:nvPicPr>
-          <p:cNvPr id="23" name="Graphic 22" descr="Cursor with solid fill">
-            <a:extLst>
-              <a:ext uri="{FF2B5EF4-FFF2-40B4-BE49-F238E27FC236}">
-                <a16:creationId xmlns:a16="http://schemas.microsoft.com/office/drawing/2014/main" id="{984D1423-29D4-A148-552B-9F3F8AC5F715}"/>
-              </a:ext>
-            </a:extLst>
-          </p:cNvPr>
-          <p:cNvPicPr>
-            <a:picLocks noChangeAspect="1"/>
-          </p:cNvPicPr>
-          <p:nvPr/>
-        </p:nvPicPr>
-        <p:blipFill>
-          <a:blip r:embed="rId7">
+          <a:blip r:embed="rId10">
             <a:extLst>
               <a:ext uri="{28A0092B-C50C-407E-A947-70E740481C1C}">
                 <a14:useLocalDpi xmlns:a14="http://schemas.microsoft.com/office/drawing/2010/main" val="0"/>
-              </a:ext>
-              <a:ext uri="{96DAC541-7B7A-43D3-8B79-37D633B846F1}">
-                <asvg:svgBlip xmlns:asvg="http://schemas.microsoft.com/office/drawing/2016/SVG/main" r:embed="rId8"/>
               </a:ext>
             </a:extLst>
           </a:blip>
@@ -8053,8 +10634,252 @@
         </p:blipFill>
         <p:spPr>
           <a:xfrm>
-            <a:off x="7038562" y="3162696"/>
-            <a:ext cx="462114" cy="462114"/>
+            <a:off x="11033185" y="5699185"/>
+            <a:ext cx="1158815" cy="1158815"/>
+          </a:xfrm>
+          <a:prstGeom prst="rect">
+            <a:avLst/>
+          </a:prstGeom>
+        </p:spPr>
+      </p:pic>
+    </p:spTree>
+    <p:extLst>
+      <p:ext uri="{BB962C8B-B14F-4D97-AF65-F5344CB8AC3E}">
+        <p14:creationId xmlns:p14="http://schemas.microsoft.com/office/powerpoint/2010/main" val="603461540"/>
+      </p:ext>
+    </p:extLst>
+  </p:cSld>
+  <p:clrMapOvr>
+    <a:masterClrMapping/>
+  </p:clrMapOvr>
+</p:sld>
+</file>
+
+<file path=ppt/slides/slide6.xml><?xml version="1.0" encoding="utf-8"?>
+<p:sld xmlns:a="http://schemas.openxmlformats.org/drawingml/2006/main" xmlns:r="http://schemas.openxmlformats.org/officeDocument/2006/relationships" xmlns:p="http://schemas.openxmlformats.org/presentationml/2006/main">
+  <p:cSld>
+    <p:spTree>
+      <p:nvGrpSpPr>
+        <p:cNvPr id="1" name=""/>
+        <p:cNvGrpSpPr/>
+        <p:nvPr/>
+      </p:nvGrpSpPr>
+      <p:grpSpPr>
+        <a:xfrm>
+          <a:off x="0" y="0"/>
+          <a:ext cx="0" cy="0"/>
+          <a:chOff x="0" y="0"/>
+          <a:chExt cx="0" cy="0"/>
+        </a:xfrm>
+      </p:grpSpPr>
+      <p:sp>
+        <p:nvSpPr>
+          <p:cNvPr id="11" name="TextBox 10">
+            <a:extLst>
+              <a:ext uri="{FF2B5EF4-FFF2-40B4-BE49-F238E27FC236}">
+                <a16:creationId xmlns:a16="http://schemas.microsoft.com/office/drawing/2014/main" id="{13A726F4-4F1A-0E43-5DDB-DF59D3337A06}"/>
+              </a:ext>
+            </a:extLst>
+          </p:cNvPr>
+          <p:cNvSpPr txBox="1"/>
+          <p:nvPr/>
+        </p:nvSpPr>
+        <p:spPr>
+          <a:xfrm>
+            <a:off x="0" y="0"/>
+            <a:ext cx="12192000" cy="584775"/>
+          </a:xfrm>
+          <a:prstGeom prst="rect">
+            <a:avLst/>
+          </a:prstGeom>
+          <a:noFill/>
+        </p:spPr>
+        <p:txBody>
+          <a:bodyPr wrap="square" rtlCol="0">
+            <a:spAutoFit/>
+          </a:bodyPr>
+          <a:lstStyle/>
+          <a:p>
+            <a:pPr algn="ctr"/>
+            <a:r>
+              <a:rPr lang="en-US" sz="3200" dirty="0">
+                <a:solidFill>
+                  <a:schemeClr val="bg1"/>
+                </a:solidFill>
+              </a:rPr>
+              <a:t>Collecting buckets, water and milk</a:t>
+            </a:r>
+          </a:p>
+        </p:txBody>
+      </p:sp>
+      <p:pic>
+        <p:nvPicPr>
+          <p:cNvPr id="59" name="Picture 58" descr="A picture containing toy&#10;&#10;Description automatically generated">
+            <a:extLst>
+              <a:ext uri="{FF2B5EF4-FFF2-40B4-BE49-F238E27FC236}">
+                <a16:creationId xmlns:a16="http://schemas.microsoft.com/office/drawing/2014/main" id="{7227C457-22E8-C992-7ADF-D83C086C8EF7}"/>
+              </a:ext>
+            </a:extLst>
+          </p:cNvPr>
+          <p:cNvPicPr>
+            <a:picLocks noChangeAspect="1"/>
+          </p:cNvPicPr>
+          <p:nvPr/>
+        </p:nvPicPr>
+        <p:blipFill>
+          <a:blip r:embed="rId2">
+            <a:extLst>
+              <a:ext uri="{28A0092B-C50C-407E-A947-70E740481C1C}">
+                <a14:useLocalDpi xmlns:a14="http://schemas.microsoft.com/office/drawing/2010/main" val="0"/>
+              </a:ext>
+            </a:extLst>
+          </a:blip>
+          <a:stretch>
+            <a:fillRect/>
+          </a:stretch>
+        </p:blipFill>
+        <p:spPr>
+          <a:xfrm>
+            <a:off x="9425170" y="2984740"/>
+            <a:ext cx="2719201" cy="1529550"/>
+          </a:xfrm>
+          <a:prstGeom prst="rect">
+            <a:avLst/>
+          </a:prstGeom>
+        </p:spPr>
+      </p:pic>
+      <p:pic>
+        <p:nvPicPr>
+          <p:cNvPr id="3" name="Picture 2" descr="A picture containing yellow&#10;&#10;Description automatically generated">
+            <a:extLst>
+              <a:ext uri="{FF2B5EF4-FFF2-40B4-BE49-F238E27FC236}">
+                <a16:creationId xmlns:a16="http://schemas.microsoft.com/office/drawing/2014/main" id="{DB24A937-2A5C-0E97-5346-8441C55CEE65}"/>
+              </a:ext>
+            </a:extLst>
+          </p:cNvPr>
+          <p:cNvPicPr>
+            <a:picLocks noChangeAspect="1"/>
+          </p:cNvPicPr>
+          <p:nvPr/>
+        </p:nvPicPr>
+        <p:blipFill>
+          <a:blip r:embed="rId3">
+            <a:extLst>
+              <a:ext uri="{28A0092B-C50C-407E-A947-70E740481C1C}">
+                <a14:useLocalDpi xmlns:a14="http://schemas.microsoft.com/office/drawing/2010/main" val="0"/>
+              </a:ext>
+            </a:extLst>
+          </a:blip>
+          <a:stretch>
+            <a:fillRect/>
+          </a:stretch>
+        </p:blipFill>
+        <p:spPr>
+          <a:xfrm>
+            <a:off x="466702" y="4761382"/>
+            <a:ext cx="1794643" cy="1794643"/>
+          </a:xfrm>
+          <a:prstGeom prst="rect">
+            <a:avLst/>
+          </a:prstGeom>
+        </p:spPr>
+      </p:pic>
+      <p:pic>
+        <p:nvPicPr>
+          <p:cNvPr id="9" name="Picture 8">
+            <a:extLst>
+              <a:ext uri="{FF2B5EF4-FFF2-40B4-BE49-F238E27FC236}">
+                <a16:creationId xmlns:a16="http://schemas.microsoft.com/office/drawing/2014/main" id="{AA4DA148-BF79-4521-F433-F00CC51C7FC9}"/>
+              </a:ext>
+            </a:extLst>
+          </p:cNvPr>
+          <p:cNvPicPr>
+            <a:picLocks noChangeAspect="1"/>
+          </p:cNvPicPr>
+          <p:nvPr/>
+        </p:nvPicPr>
+        <p:blipFill>
+          <a:blip r:embed="rId4"/>
+          <a:stretch>
+            <a:fillRect/>
+          </a:stretch>
+        </p:blipFill>
+        <p:spPr>
+          <a:xfrm>
+            <a:off x="3419520" y="927741"/>
+            <a:ext cx="1639787" cy="1517414"/>
+          </a:xfrm>
+          <a:prstGeom prst="rect">
+            <a:avLst/>
+          </a:prstGeom>
+        </p:spPr>
+      </p:pic>
+      <p:pic>
+        <p:nvPicPr>
+          <p:cNvPr id="6" name="Picture 5" descr="A picture containing yellow&#10;&#10;Description automatically generated">
+            <a:extLst>
+              <a:ext uri="{FF2B5EF4-FFF2-40B4-BE49-F238E27FC236}">
+                <a16:creationId xmlns:a16="http://schemas.microsoft.com/office/drawing/2014/main" id="{D1FF5F0A-AD35-2A8F-29B6-BFC594322DBA}"/>
+              </a:ext>
+            </a:extLst>
+          </p:cNvPr>
+          <p:cNvPicPr>
+            <a:picLocks noChangeAspect="1"/>
+          </p:cNvPicPr>
+          <p:nvPr/>
+        </p:nvPicPr>
+        <p:blipFill>
+          <a:blip r:embed="rId5">
+            <a:extLst>
+              <a:ext uri="{28A0092B-C50C-407E-A947-70E740481C1C}">
+                <a14:useLocalDpi xmlns:a14="http://schemas.microsoft.com/office/drawing/2010/main" val="0"/>
+              </a:ext>
+            </a:extLst>
+          </a:blip>
+          <a:stretch>
+            <a:fillRect/>
+          </a:stretch>
+        </p:blipFill>
+        <p:spPr>
+          <a:xfrm>
+            <a:off x="412509" y="2753744"/>
+            <a:ext cx="1903031" cy="1903031"/>
+          </a:xfrm>
+          <a:prstGeom prst="rect">
+            <a:avLst/>
+          </a:prstGeom>
+        </p:spPr>
+      </p:pic>
+      <p:pic>
+        <p:nvPicPr>
+          <p:cNvPr id="8" name="Picture 7" descr="A picture containing box&#10;&#10;Description automatically generated">
+            <a:extLst>
+              <a:ext uri="{FF2B5EF4-FFF2-40B4-BE49-F238E27FC236}">
+                <a16:creationId xmlns:a16="http://schemas.microsoft.com/office/drawing/2014/main" id="{76CD83DF-A6C8-E58F-6B72-92A4F089205A}"/>
+              </a:ext>
+            </a:extLst>
+          </p:cNvPr>
+          <p:cNvPicPr>
+            <a:picLocks noChangeAspect="1"/>
+          </p:cNvPicPr>
+          <p:nvPr/>
+        </p:nvPicPr>
+        <p:blipFill>
+          <a:blip r:embed="rId6">
+            <a:extLst>
+              <a:ext uri="{28A0092B-C50C-407E-A947-70E740481C1C}">
+                <a14:useLocalDpi xmlns:a14="http://schemas.microsoft.com/office/drawing/2010/main" val="0"/>
+              </a:ext>
+            </a:extLst>
+          </a:blip>
+          <a:stretch>
+            <a:fillRect/>
+          </a:stretch>
+        </p:blipFill>
+        <p:spPr>
+          <a:xfrm>
+            <a:off x="359023" y="730307"/>
+            <a:ext cx="2020391" cy="2020391"/>
           </a:xfrm>
           <a:prstGeom prst="rect">
             <a:avLst/>
@@ -8063,10 +10888,10 @@
       </p:pic>
       <p:sp>
         <p:nvSpPr>
-          <p:cNvPr id="24" name="Arrow: Right 23">
-            <a:extLst>
-              <a:ext uri="{FF2B5EF4-FFF2-40B4-BE49-F238E27FC236}">
-                <a16:creationId xmlns:a16="http://schemas.microsoft.com/office/drawing/2014/main" id="{89B41EEC-E99D-D116-5A42-A2361DA3BF4D}"/>
+          <p:cNvPr id="12" name="Arrow: Bent 11">
+            <a:extLst>
+              <a:ext uri="{FF2B5EF4-FFF2-40B4-BE49-F238E27FC236}">
+                <a16:creationId xmlns:a16="http://schemas.microsoft.com/office/drawing/2014/main" id="{43B66A1A-1E52-F235-C98B-C2FCA32819C6}"/>
               </a:ext>
             </a:extLst>
           </p:cNvPr>
@@ -8074,11 +10899,11 @@
           <p:nvPr/>
         </p:nvSpPr>
         <p:spPr>
-          <a:xfrm rot="20496174">
-            <a:off x="7986411" y="3649476"/>
-            <a:ext cx="1811370" cy="1178365"/>
-          </a:xfrm>
-          <a:prstGeom prst="rightArrow">
+          <a:xfrm>
+            <a:off x="3113368" y="1397479"/>
+            <a:ext cx="759892" cy="871268"/>
+          </a:xfrm>
+          <a:prstGeom prst="bentArrow">
             <a:avLst/>
           </a:prstGeom>
         </p:spPr>
@@ -8101,26 +10926,56 @@
           <a:lstStyle/>
           <a:p>
             <a:pPr algn="ctr"/>
-            <a:r>
-              <a:rPr lang="en-US" dirty="0"/>
-              <a:t>Click on </a:t>
-            </a:r>
-            <a:br>
-              <a:rPr lang="en-US" dirty="0"/>
-            </a:br>
-            <a:r>
-              <a:rPr lang="en-US" dirty="0"/>
-              <a:t>water</a:t>
-            </a:r>
+            <a:endParaRPr lang="en-US">
+              <a:solidFill>
+                <a:schemeClr val="tx1"/>
+              </a:solidFill>
+            </a:endParaRPr>
           </a:p>
         </p:txBody>
       </p:sp>
+      <p:pic>
+        <p:nvPicPr>
+          <p:cNvPr id="14" name="Picture 13" descr="A picture containing toy&#10;&#10;Description automatically generated">
+            <a:extLst>
+              <a:ext uri="{FF2B5EF4-FFF2-40B4-BE49-F238E27FC236}">
+                <a16:creationId xmlns:a16="http://schemas.microsoft.com/office/drawing/2014/main" id="{6E71BF46-26F3-691C-32E1-82DC7057FEA8}"/>
+              </a:ext>
+            </a:extLst>
+          </p:cNvPr>
+          <p:cNvPicPr>
+            <a:picLocks noChangeAspect="1"/>
+          </p:cNvPicPr>
+          <p:nvPr/>
+        </p:nvPicPr>
+        <p:blipFill>
+          <a:blip r:embed="rId2">
+            <a:extLst>
+              <a:ext uri="{28A0092B-C50C-407E-A947-70E740481C1C}">
+                <a14:useLocalDpi xmlns:a14="http://schemas.microsoft.com/office/drawing/2010/main" val="0"/>
+              </a:ext>
+            </a:extLst>
+          </a:blip>
+          <a:stretch>
+            <a:fillRect/>
+          </a:stretch>
+        </p:blipFill>
+        <p:spPr>
+          <a:xfrm>
+            <a:off x="2543289" y="2394099"/>
+            <a:ext cx="1267906" cy="713197"/>
+          </a:xfrm>
+          <a:prstGeom prst="rect">
+            <a:avLst/>
+          </a:prstGeom>
+        </p:spPr>
+      </p:pic>
       <p:sp>
         <p:nvSpPr>
-          <p:cNvPr id="13" name="Arrow: Right 12">
-            <a:extLst>
-              <a:ext uri="{FF2B5EF4-FFF2-40B4-BE49-F238E27FC236}">
-                <a16:creationId xmlns:a16="http://schemas.microsoft.com/office/drawing/2014/main" id="{64677852-DDD3-D551-E68E-9A9218676E87}"/>
+          <p:cNvPr id="16" name="Arrow: Right 15">
+            <a:extLst>
+              <a:ext uri="{FF2B5EF4-FFF2-40B4-BE49-F238E27FC236}">
+                <a16:creationId xmlns:a16="http://schemas.microsoft.com/office/drawing/2014/main" id="{3F3DD1B3-A258-09E7-BD25-DC226463AB84}"/>
               </a:ext>
             </a:extLst>
           </p:cNvPr>
@@ -8128,8 +10983,8 @@
           <p:nvPr/>
         </p:nvSpPr>
         <p:spPr>
-          <a:xfrm>
-            <a:off x="4913366" y="1223009"/>
+          <a:xfrm rot="1623653">
+            <a:off x="8356242" y="1855038"/>
             <a:ext cx="1787992" cy="1078120"/>
           </a:xfrm>
           <a:prstGeom prst="rightArrow">
@@ -8157,17 +11012,17 @@
             <a:pPr algn="ctr"/>
             <a:r>
               <a:rPr lang="en-US" dirty="0"/>
-              <a:t>Fly in barn</a:t>
+              <a:t>Click on bucket</a:t>
             </a:r>
           </a:p>
         </p:txBody>
       </p:sp>
       <p:pic>
         <p:nvPicPr>
-          <p:cNvPr id="26" name="Picture 25" descr="A picture containing yellow&#10;&#10;Description automatically generated">
-            <a:extLst>
-              <a:ext uri="{FF2B5EF4-FFF2-40B4-BE49-F238E27FC236}">
-                <a16:creationId xmlns:a16="http://schemas.microsoft.com/office/drawing/2014/main" id="{A6E33105-9EE8-6924-61DC-CE15F84B1EF2}"/>
+          <p:cNvPr id="17" name="Picture 16" descr="A picture containing box&#10;&#10;Description automatically generated">
+            <a:extLst>
+              <a:ext uri="{FF2B5EF4-FFF2-40B4-BE49-F238E27FC236}">
+                <a16:creationId xmlns:a16="http://schemas.microsoft.com/office/drawing/2014/main" id="{38771A27-B2EF-6BE6-2163-AF21E8092FC8}"/>
               </a:ext>
             </a:extLst>
           </p:cNvPr>
@@ -8177,7 +11032,7 @@
           <p:nvPr/>
         </p:nvPicPr>
         <p:blipFill>
-          <a:blip r:embed="rId5">
+          <a:blip r:embed="rId6">
             <a:extLst>
               <a:ext uri="{28A0092B-C50C-407E-A947-70E740481C1C}">
                 <a14:useLocalDpi xmlns:a14="http://schemas.microsoft.com/office/drawing/2010/main" val="0"/>
@@ -8190,8 +11045,119 @@
         </p:blipFill>
         <p:spPr>
           <a:xfrm>
-            <a:off x="6431793" y="4270074"/>
-            <a:ext cx="1172145" cy="1172145"/>
+            <a:off x="6553153" y="730306"/>
+            <a:ext cx="2020391" cy="2020391"/>
+          </a:xfrm>
+          <a:prstGeom prst="rect">
+            <a:avLst/>
+          </a:prstGeom>
+        </p:spPr>
+      </p:pic>
+      <p:pic>
+        <p:nvPicPr>
+          <p:cNvPr id="15" name="Graphic 14" descr="Cursor with solid fill">
+            <a:extLst>
+              <a:ext uri="{FF2B5EF4-FFF2-40B4-BE49-F238E27FC236}">
+                <a16:creationId xmlns:a16="http://schemas.microsoft.com/office/drawing/2014/main" id="{F66C616F-5CC3-B43A-CDED-F6E3C888FA27}"/>
+              </a:ext>
+            </a:extLst>
+          </p:cNvPr>
+          <p:cNvPicPr>
+            <a:picLocks noChangeAspect="1"/>
+          </p:cNvPicPr>
+          <p:nvPr/>
+        </p:nvPicPr>
+        <p:blipFill>
+          <a:blip r:embed="rId7">
+            <a:extLst>
+              <a:ext uri="{28A0092B-C50C-407E-A947-70E740481C1C}">
+                <a14:useLocalDpi xmlns:a14="http://schemas.microsoft.com/office/drawing/2010/main" val="0"/>
+              </a:ext>
+              <a:ext uri="{96DAC541-7B7A-43D3-8B79-37D633B846F1}">
+                <asvg:svgBlip xmlns:asvg="http://schemas.microsoft.com/office/drawing/2016/SVG/main" r:embed="rId8"/>
+              </a:ext>
+            </a:extLst>
+          </a:blip>
+          <a:stretch>
+            <a:fillRect/>
+          </a:stretch>
+        </p:blipFill>
+        <p:spPr>
+          <a:xfrm>
+            <a:off x="7418887" y="1699388"/>
+            <a:ext cx="789988" cy="789988"/>
+          </a:xfrm>
+          <a:prstGeom prst="rect">
+            <a:avLst/>
+          </a:prstGeom>
+        </p:spPr>
+      </p:pic>
+      <p:pic>
+        <p:nvPicPr>
+          <p:cNvPr id="18" name="Picture 17" descr="A picture containing toy&#10;&#10;Description automatically generated">
+            <a:extLst>
+              <a:ext uri="{FF2B5EF4-FFF2-40B4-BE49-F238E27FC236}">
+                <a16:creationId xmlns:a16="http://schemas.microsoft.com/office/drawing/2014/main" id="{E75D81FA-D393-55DB-A657-EF48F2CC2DDD}"/>
+              </a:ext>
+            </a:extLst>
+          </p:cNvPr>
+          <p:cNvPicPr>
+            <a:picLocks noChangeAspect="1"/>
+          </p:cNvPicPr>
+          <p:nvPr/>
+        </p:nvPicPr>
+        <p:blipFill>
+          <a:blip r:embed="rId2">
+            <a:extLst>
+              <a:ext uri="{28A0092B-C50C-407E-A947-70E740481C1C}">
+                <a14:useLocalDpi xmlns:a14="http://schemas.microsoft.com/office/drawing/2010/main" val="0"/>
+              </a:ext>
+            </a:extLst>
+          </a:blip>
+          <a:stretch>
+            <a:fillRect/>
+          </a:stretch>
+        </p:blipFill>
+        <p:spPr>
+          <a:xfrm>
+            <a:off x="2315540" y="3244093"/>
+            <a:ext cx="1823966" cy="1025981"/>
+          </a:xfrm>
+          <a:prstGeom prst="rect">
+            <a:avLst/>
+          </a:prstGeom>
+        </p:spPr>
+      </p:pic>
+      <p:pic>
+        <p:nvPicPr>
+          <p:cNvPr id="19" name="Picture 18" descr="A picture containing box&#10;&#10;Description automatically generated">
+            <a:extLst>
+              <a:ext uri="{FF2B5EF4-FFF2-40B4-BE49-F238E27FC236}">
+                <a16:creationId xmlns:a16="http://schemas.microsoft.com/office/drawing/2014/main" id="{D8F3C3A9-08F8-8107-C890-EF9BEA07BA87}"/>
+              </a:ext>
+            </a:extLst>
+          </p:cNvPr>
+          <p:cNvPicPr>
+            <a:picLocks noChangeAspect="1"/>
+          </p:cNvPicPr>
+          <p:nvPr/>
+        </p:nvPicPr>
+        <p:blipFill>
+          <a:blip r:embed="rId6">
+            <a:extLst>
+              <a:ext uri="{28A0092B-C50C-407E-A947-70E740481C1C}">
+                <a14:useLocalDpi xmlns:a14="http://schemas.microsoft.com/office/drawing/2010/main" val="0"/>
+              </a:ext>
+            </a:extLst>
+          </a:blip>
+          <a:stretch>
+            <a:fillRect/>
+          </a:stretch>
+        </p:blipFill>
+        <p:spPr>
+          <a:xfrm>
+            <a:off x="3038116" y="3496476"/>
+            <a:ext cx="910395" cy="910395"/>
           </a:xfrm>
           <a:prstGeom prst="rect">
             <a:avLst/>
@@ -8200,10 +11166,10 @@
       </p:pic>
       <p:sp>
         <p:nvSpPr>
-          <p:cNvPr id="27" name="Arrow: Down 26">
-            <a:extLst>
-              <a:ext uri="{FF2B5EF4-FFF2-40B4-BE49-F238E27FC236}">
-                <a16:creationId xmlns:a16="http://schemas.microsoft.com/office/drawing/2014/main" id="{9E7FEB4B-8C21-7BC1-637A-85DA14D9DCAD}"/>
+          <p:cNvPr id="20" name="Arrow: Right 19">
+            <a:extLst>
+              <a:ext uri="{FF2B5EF4-FFF2-40B4-BE49-F238E27FC236}">
+                <a16:creationId xmlns:a16="http://schemas.microsoft.com/office/drawing/2014/main" id="{1E2E4E05-0086-E50E-B082-D62B29B550FA}"/>
               </a:ext>
             </a:extLst>
           </p:cNvPr>
@@ -8211,12 +11177,15 @@
           <p:nvPr/>
         </p:nvSpPr>
         <p:spPr>
-          <a:xfrm>
-            <a:off x="6105884" y="3664343"/>
-            <a:ext cx="1823965" cy="654078"/>
-          </a:xfrm>
-          <a:prstGeom prst="downArrow">
-            <a:avLst/>
+          <a:xfrm rot="20774537">
+            <a:off x="3971000" y="2902334"/>
+            <a:ext cx="2593068" cy="768692"/>
+          </a:xfrm>
+          <a:prstGeom prst="rightArrow">
+            <a:avLst>
+              <a:gd name="adj1" fmla="val 53998"/>
+              <a:gd name="adj2" fmla="val 60662"/>
+            </a:avLst>
           </a:prstGeom>
         </p:spPr>
         <p:style>
@@ -8240,17 +11209,17 @@
             <a:pPr algn="ctr"/>
             <a:r>
               <a:rPr lang="en-US" dirty="0"/>
-              <a:t>Spawns bucket</a:t>
+              <a:t>Have bucket in storage </a:t>
             </a:r>
           </a:p>
         </p:txBody>
       </p:sp>
       <p:pic>
         <p:nvPicPr>
-          <p:cNvPr id="29" name="Picture 28">
-            <a:extLst>
-              <a:ext uri="{FF2B5EF4-FFF2-40B4-BE49-F238E27FC236}">
-                <a16:creationId xmlns:a16="http://schemas.microsoft.com/office/drawing/2014/main" id="{A3F44E14-D09D-290B-DA10-09BE66D874CE}"/>
+          <p:cNvPr id="22" name="Picture 21">
+            <a:extLst>
+              <a:ext uri="{FF2B5EF4-FFF2-40B4-BE49-F238E27FC236}">
+                <a16:creationId xmlns:a16="http://schemas.microsoft.com/office/drawing/2014/main" id="{ECE93F01-56FC-CFE0-F64C-5A4196D3FDA0}"/>
               </a:ext>
             </a:extLst>
           </p:cNvPr>
@@ -8260,15 +11229,54 @@
           <p:nvPr/>
         </p:nvPicPr>
         <p:blipFill>
-          <a:blip r:embed="rId10"/>
+          <a:blip r:embed="rId9"/>
           <a:stretch>
             <a:fillRect/>
           </a:stretch>
         </p:blipFill>
         <p:spPr>
           <a:xfrm>
-            <a:off x="2543289" y="5189826"/>
-            <a:ext cx="1736774" cy="1299653"/>
+            <a:off x="6674314" y="2448432"/>
+            <a:ext cx="687107" cy="1173807"/>
+          </a:xfrm>
+          <a:prstGeom prst="rect">
+            <a:avLst/>
+          </a:prstGeom>
+        </p:spPr>
+      </p:pic>
+      <p:pic>
+        <p:nvPicPr>
+          <p:cNvPr id="23" name="Graphic 22" descr="Cursor with solid fill">
+            <a:extLst>
+              <a:ext uri="{FF2B5EF4-FFF2-40B4-BE49-F238E27FC236}">
+                <a16:creationId xmlns:a16="http://schemas.microsoft.com/office/drawing/2014/main" id="{984D1423-29D4-A148-552B-9F3F8AC5F715}"/>
+              </a:ext>
+            </a:extLst>
+          </p:cNvPr>
+          <p:cNvPicPr>
+            <a:picLocks noChangeAspect="1"/>
+          </p:cNvPicPr>
+          <p:nvPr/>
+        </p:nvPicPr>
+        <p:blipFill>
+          <a:blip r:embed="rId7">
+            <a:extLst>
+              <a:ext uri="{28A0092B-C50C-407E-A947-70E740481C1C}">
+                <a14:useLocalDpi xmlns:a14="http://schemas.microsoft.com/office/drawing/2010/main" val="0"/>
+              </a:ext>
+              <a:ext uri="{96DAC541-7B7A-43D3-8B79-37D633B846F1}">
+                <asvg:svgBlip xmlns:asvg="http://schemas.microsoft.com/office/drawing/2016/SVG/main" r:embed="rId8"/>
+              </a:ext>
+            </a:extLst>
+          </a:blip>
+          <a:stretch>
+            <a:fillRect/>
+          </a:stretch>
+        </p:blipFill>
+        <p:spPr>
+          <a:xfrm>
+            <a:off x="7038562" y="3162696"/>
+            <a:ext cx="462114" cy="462114"/>
           </a:xfrm>
           <a:prstGeom prst="rect">
             <a:avLst/>
@@ -8277,10 +11285,10 @@
       </p:pic>
       <p:sp>
         <p:nvSpPr>
-          <p:cNvPr id="30" name="Arrow: Down 29">
-            <a:extLst>
-              <a:ext uri="{FF2B5EF4-FFF2-40B4-BE49-F238E27FC236}">
-                <a16:creationId xmlns:a16="http://schemas.microsoft.com/office/drawing/2014/main" id="{8482BA6E-1534-A46E-6B31-14458E461318}"/>
+          <p:cNvPr id="24" name="Arrow: Right 23">
+            <a:extLst>
+              <a:ext uri="{FF2B5EF4-FFF2-40B4-BE49-F238E27FC236}">
+                <a16:creationId xmlns:a16="http://schemas.microsoft.com/office/drawing/2014/main" id="{89B41EEC-E99D-D116-5A42-A2361DA3BF4D}"/>
               </a:ext>
             </a:extLst>
           </p:cNvPr>
@@ -8288,15 +11296,12 @@
           <p:nvPr/>
         </p:nvSpPr>
         <p:spPr>
-          <a:xfrm>
-            <a:off x="2842307" y="4398951"/>
-            <a:ext cx="1138738" cy="654078"/>
-          </a:xfrm>
-          <a:prstGeom prst="downArrow">
-            <a:avLst>
-              <a:gd name="adj1" fmla="val 33744"/>
-              <a:gd name="adj2" fmla="val 61870"/>
-            </a:avLst>
+          <a:xfrm rot="20496174">
+            <a:off x="7986411" y="3649476"/>
+            <a:ext cx="1811370" cy="1178365"/>
+          </a:xfrm>
+          <a:prstGeom prst="rightArrow">
+            <a:avLst/>
           </a:prstGeom>
         </p:spPr>
         <p:style>
@@ -8318,16 +11323,26 @@
           <a:lstStyle/>
           <a:p>
             <a:pPr algn="ctr"/>
-            <a:endParaRPr lang="en-US" dirty="0"/>
+            <a:r>
+              <a:rPr lang="en-US" dirty="0"/>
+              <a:t>Click on </a:t>
+            </a:r>
+            <a:br>
+              <a:rPr lang="en-US" dirty="0"/>
+            </a:br>
+            <a:r>
+              <a:rPr lang="en-US" dirty="0"/>
+              <a:t>water</a:t>
+            </a:r>
           </a:p>
         </p:txBody>
       </p:sp>
       <p:sp>
         <p:nvSpPr>
-          <p:cNvPr id="31" name="Arrow: Right 30">
-            <a:extLst>
-              <a:ext uri="{FF2B5EF4-FFF2-40B4-BE49-F238E27FC236}">
-                <a16:creationId xmlns:a16="http://schemas.microsoft.com/office/drawing/2014/main" id="{68159FC1-D87C-3201-A944-B9132F05CC85}"/>
+          <p:cNvPr id="13" name="Arrow: Right 12">
+            <a:extLst>
+              <a:ext uri="{FF2B5EF4-FFF2-40B4-BE49-F238E27FC236}">
+                <a16:creationId xmlns:a16="http://schemas.microsoft.com/office/drawing/2014/main" id="{64677852-DDD3-D551-E68E-9A9218676E87}"/>
               </a:ext>
             </a:extLst>
           </p:cNvPr>
@@ -8336,14 +11351,11 @@
         </p:nvSpPr>
         <p:spPr>
           <a:xfrm>
-            <a:off x="4643800" y="5442218"/>
-            <a:ext cx="2960137" cy="830251"/>
+            <a:off x="4913366" y="1223009"/>
+            <a:ext cx="1787992" cy="1078120"/>
           </a:xfrm>
           <a:prstGeom prst="rightArrow">
-            <a:avLst>
-              <a:gd name="adj1" fmla="val 35598"/>
-              <a:gd name="adj2" fmla="val 58801"/>
-            </a:avLst>
+            <a:avLst/>
           </a:prstGeom>
         </p:spPr>
         <p:style>
@@ -8367,17 +11379,17 @@
             <a:pPr algn="ctr"/>
             <a:r>
               <a:rPr lang="en-US" dirty="0"/>
-              <a:t>drops</a:t>
+              <a:t>Fly in barn</a:t>
             </a:r>
           </a:p>
         </p:txBody>
       </p:sp>
       <p:pic>
         <p:nvPicPr>
-          <p:cNvPr id="32" name="Picture 31" descr="A picture containing yellow&#10;&#10;Description automatically generated">
-            <a:extLst>
-              <a:ext uri="{FF2B5EF4-FFF2-40B4-BE49-F238E27FC236}">
-                <a16:creationId xmlns:a16="http://schemas.microsoft.com/office/drawing/2014/main" id="{A1408A73-AA53-626A-BDF2-C2F01DC5CB38}"/>
+          <p:cNvPr id="26" name="Picture 25" descr="A picture containing yellow&#10;&#10;Description automatically generated">
+            <a:extLst>
+              <a:ext uri="{FF2B5EF4-FFF2-40B4-BE49-F238E27FC236}">
+                <a16:creationId xmlns:a16="http://schemas.microsoft.com/office/drawing/2014/main" id="{A6E33105-9EE8-6924-61DC-CE15F84B1EF2}"/>
               </a:ext>
             </a:extLst>
           </p:cNvPr>
@@ -8387,7 +11399,7 @@
           <p:nvPr/>
         </p:nvPicPr>
         <p:blipFill>
-          <a:blip r:embed="rId3">
+          <a:blip r:embed="rId5">
             <a:extLst>
               <a:ext uri="{28A0092B-C50C-407E-A947-70E740481C1C}">
                 <a14:useLocalDpi xmlns:a14="http://schemas.microsoft.com/office/drawing/2010/main" val="0"/>
@@ -8400,8 +11412,8 @@
         </p:blipFill>
         <p:spPr>
           <a:xfrm>
-            <a:off x="7582888" y="5164888"/>
-            <a:ext cx="1299653" cy="1299653"/>
+            <a:off x="6431793" y="4270074"/>
+            <a:ext cx="1172145" cy="1172145"/>
           </a:xfrm>
           <a:prstGeom prst="rect">
             <a:avLst/>
@@ -8410,10 +11422,10 @@
       </p:pic>
       <p:sp>
         <p:nvSpPr>
-          <p:cNvPr id="34" name="Arrow: Right 33">
-            <a:extLst>
-              <a:ext uri="{FF2B5EF4-FFF2-40B4-BE49-F238E27FC236}">
-                <a16:creationId xmlns:a16="http://schemas.microsoft.com/office/drawing/2014/main" id="{9FA48EC5-D67A-62CE-6259-0A14FC4F758F}"/>
+          <p:cNvPr id="27" name="Arrow: Down 26">
+            <a:extLst>
+              <a:ext uri="{FF2B5EF4-FFF2-40B4-BE49-F238E27FC236}">
+                <a16:creationId xmlns:a16="http://schemas.microsoft.com/office/drawing/2014/main" id="{9E7FEB4B-8C21-7BC1-637A-85DA14D9DCAD}"/>
               </a:ext>
             </a:extLst>
           </p:cNvPr>
@@ -8421,11 +11433,11 @@
           <p:nvPr/>
         </p:nvSpPr>
         <p:spPr>
-          <a:xfrm rot="19109824">
-            <a:off x="8887782" y="4727142"/>
-            <a:ext cx="1787992" cy="1078120"/>
-          </a:xfrm>
-          <a:prstGeom prst="rightArrow">
+          <a:xfrm>
+            <a:off x="6105884" y="3664343"/>
+            <a:ext cx="1823965" cy="654078"/>
+          </a:xfrm>
+          <a:prstGeom prst="downArrow">
             <a:avLst/>
           </a:prstGeom>
         </p:spPr>
@@ -8450,6 +11462,216 @@
             <a:pPr algn="ctr"/>
             <a:r>
               <a:rPr lang="en-US" dirty="0"/>
+              <a:t>Spawns water</a:t>
+            </a:r>
+          </a:p>
+        </p:txBody>
+      </p:sp>
+      <p:pic>
+        <p:nvPicPr>
+          <p:cNvPr id="29" name="Picture 28">
+            <a:extLst>
+              <a:ext uri="{FF2B5EF4-FFF2-40B4-BE49-F238E27FC236}">
+                <a16:creationId xmlns:a16="http://schemas.microsoft.com/office/drawing/2014/main" id="{A3F44E14-D09D-290B-DA10-09BE66D874CE}"/>
+              </a:ext>
+            </a:extLst>
+          </p:cNvPr>
+          <p:cNvPicPr>
+            <a:picLocks noChangeAspect="1"/>
+          </p:cNvPicPr>
+          <p:nvPr/>
+        </p:nvPicPr>
+        <p:blipFill>
+          <a:blip r:embed="rId10"/>
+          <a:stretch>
+            <a:fillRect/>
+          </a:stretch>
+        </p:blipFill>
+        <p:spPr>
+          <a:xfrm>
+            <a:off x="2543289" y="5189826"/>
+            <a:ext cx="1736774" cy="1299653"/>
+          </a:xfrm>
+          <a:prstGeom prst="rect">
+            <a:avLst/>
+          </a:prstGeom>
+        </p:spPr>
+      </p:pic>
+      <p:sp>
+        <p:nvSpPr>
+          <p:cNvPr id="30" name="Arrow: Down 29">
+            <a:extLst>
+              <a:ext uri="{FF2B5EF4-FFF2-40B4-BE49-F238E27FC236}">
+                <a16:creationId xmlns:a16="http://schemas.microsoft.com/office/drawing/2014/main" id="{8482BA6E-1534-A46E-6B31-14458E461318}"/>
+              </a:ext>
+            </a:extLst>
+          </p:cNvPr>
+          <p:cNvSpPr/>
+          <p:nvPr/>
+        </p:nvSpPr>
+        <p:spPr>
+          <a:xfrm>
+            <a:off x="2842307" y="4398951"/>
+            <a:ext cx="1138738" cy="654078"/>
+          </a:xfrm>
+          <a:prstGeom prst="downArrow">
+            <a:avLst>
+              <a:gd name="adj1" fmla="val 33744"/>
+              <a:gd name="adj2" fmla="val 61870"/>
+            </a:avLst>
+          </a:prstGeom>
+        </p:spPr>
+        <p:style>
+          <a:lnRef idx="0">
+            <a:schemeClr val="accent6"/>
+          </a:lnRef>
+          <a:fillRef idx="3">
+            <a:schemeClr val="accent6"/>
+          </a:fillRef>
+          <a:effectRef idx="3">
+            <a:schemeClr val="accent6"/>
+          </a:effectRef>
+          <a:fontRef idx="minor">
+            <a:schemeClr val="lt1"/>
+          </a:fontRef>
+        </p:style>
+        <p:txBody>
+          <a:bodyPr rtlCol="0" anchor="ctr"/>
+          <a:lstStyle/>
+          <a:p>
+            <a:pPr algn="ctr"/>
+            <a:endParaRPr lang="en-US" dirty="0"/>
+          </a:p>
+        </p:txBody>
+      </p:sp>
+      <p:sp>
+        <p:nvSpPr>
+          <p:cNvPr id="31" name="Arrow: Right 30">
+            <a:extLst>
+              <a:ext uri="{FF2B5EF4-FFF2-40B4-BE49-F238E27FC236}">
+                <a16:creationId xmlns:a16="http://schemas.microsoft.com/office/drawing/2014/main" id="{68159FC1-D87C-3201-A944-B9132F05CC85}"/>
+              </a:ext>
+            </a:extLst>
+          </p:cNvPr>
+          <p:cNvSpPr/>
+          <p:nvPr/>
+        </p:nvSpPr>
+        <p:spPr>
+          <a:xfrm>
+            <a:off x="4643800" y="5442218"/>
+            <a:ext cx="2960137" cy="830251"/>
+          </a:xfrm>
+          <a:prstGeom prst="rightArrow">
+            <a:avLst>
+              <a:gd name="adj1" fmla="val 35598"/>
+              <a:gd name="adj2" fmla="val 58801"/>
+            </a:avLst>
+          </a:prstGeom>
+        </p:spPr>
+        <p:style>
+          <a:lnRef idx="0">
+            <a:schemeClr val="accent6"/>
+          </a:lnRef>
+          <a:fillRef idx="3">
+            <a:schemeClr val="accent6"/>
+          </a:fillRef>
+          <a:effectRef idx="3">
+            <a:schemeClr val="accent6"/>
+          </a:effectRef>
+          <a:fontRef idx="minor">
+            <a:schemeClr val="lt1"/>
+          </a:fontRef>
+        </p:style>
+        <p:txBody>
+          <a:bodyPr rtlCol="0" anchor="ctr"/>
+          <a:lstStyle/>
+          <a:p>
+            <a:pPr algn="ctr"/>
+            <a:r>
+              <a:rPr lang="en-US" dirty="0"/>
+              <a:t>Drops milk</a:t>
+            </a:r>
+          </a:p>
+        </p:txBody>
+      </p:sp>
+      <p:pic>
+        <p:nvPicPr>
+          <p:cNvPr id="32" name="Picture 31" descr="A picture containing yellow&#10;&#10;Description automatically generated">
+            <a:extLst>
+              <a:ext uri="{FF2B5EF4-FFF2-40B4-BE49-F238E27FC236}">
+                <a16:creationId xmlns:a16="http://schemas.microsoft.com/office/drawing/2014/main" id="{A1408A73-AA53-626A-BDF2-C2F01DC5CB38}"/>
+              </a:ext>
+            </a:extLst>
+          </p:cNvPr>
+          <p:cNvPicPr>
+            <a:picLocks noChangeAspect="1"/>
+          </p:cNvPicPr>
+          <p:nvPr/>
+        </p:nvPicPr>
+        <p:blipFill>
+          <a:blip r:embed="rId3">
+            <a:extLst>
+              <a:ext uri="{28A0092B-C50C-407E-A947-70E740481C1C}">
+                <a14:useLocalDpi xmlns:a14="http://schemas.microsoft.com/office/drawing/2010/main" val="0"/>
+              </a:ext>
+            </a:extLst>
+          </a:blip>
+          <a:stretch>
+            <a:fillRect/>
+          </a:stretch>
+        </p:blipFill>
+        <p:spPr>
+          <a:xfrm>
+            <a:off x="7582888" y="5164888"/>
+            <a:ext cx="1299653" cy="1299653"/>
+          </a:xfrm>
+          <a:prstGeom prst="rect">
+            <a:avLst/>
+          </a:prstGeom>
+        </p:spPr>
+      </p:pic>
+      <p:sp>
+        <p:nvSpPr>
+          <p:cNvPr id="34" name="Arrow: Right 33">
+            <a:extLst>
+              <a:ext uri="{FF2B5EF4-FFF2-40B4-BE49-F238E27FC236}">
+                <a16:creationId xmlns:a16="http://schemas.microsoft.com/office/drawing/2014/main" id="{9FA48EC5-D67A-62CE-6259-0A14FC4F758F}"/>
+              </a:ext>
+            </a:extLst>
+          </p:cNvPr>
+          <p:cNvSpPr/>
+          <p:nvPr/>
+        </p:nvSpPr>
+        <p:spPr>
+          <a:xfrm rot="19109824">
+            <a:off x="8887782" y="4727142"/>
+            <a:ext cx="1787992" cy="1078120"/>
+          </a:xfrm>
+          <a:prstGeom prst="rightArrow">
+            <a:avLst/>
+          </a:prstGeom>
+        </p:spPr>
+        <p:style>
+          <a:lnRef idx="0">
+            <a:schemeClr val="accent6"/>
+          </a:lnRef>
+          <a:fillRef idx="3">
+            <a:schemeClr val="accent6"/>
+          </a:fillRef>
+          <a:effectRef idx="3">
+            <a:schemeClr val="accent6"/>
+          </a:effectRef>
+          <a:fontRef idx="minor">
+            <a:schemeClr val="lt1"/>
+          </a:fontRef>
+        </p:style>
+        <p:txBody>
+          <a:bodyPr rtlCol="0" anchor="ctr"/>
+          <a:lstStyle/>
+          <a:p>
+            <a:pPr algn="ctr"/>
+            <a:r>
+              <a:rPr lang="en-US" dirty="0"/>
               <a:t>Click on </a:t>
             </a:r>
             <a:br>
@@ -8579,10 +11801,1691 @@
           </a:prstGeom>
         </p:spPr>
       </p:pic>
+      <p:pic>
+        <p:nvPicPr>
+          <p:cNvPr id="4" name="Picture 3" descr="Icon&#10;&#10;Description automatically generated">
+            <a:extLst>
+              <a:ext uri="{FF2B5EF4-FFF2-40B4-BE49-F238E27FC236}">
+                <a16:creationId xmlns:a16="http://schemas.microsoft.com/office/drawing/2014/main" id="{95B6D3C2-2209-11E4-54A1-3DB5F7AC3722}"/>
+              </a:ext>
+            </a:extLst>
+          </p:cNvPr>
+          <p:cNvPicPr>
+            <a:picLocks noChangeAspect="1"/>
+          </p:cNvPicPr>
+          <p:nvPr/>
+        </p:nvPicPr>
+        <p:blipFill>
+          <a:blip r:embed="rId11">
+            <a:extLst>
+              <a:ext uri="{28A0092B-C50C-407E-A947-70E740481C1C}">
+                <a14:useLocalDpi xmlns:a14="http://schemas.microsoft.com/office/drawing/2010/main" val="0"/>
+              </a:ext>
+            </a:extLst>
+          </a:blip>
+          <a:stretch>
+            <a:fillRect/>
+          </a:stretch>
+        </p:blipFill>
+        <p:spPr>
+          <a:xfrm>
+            <a:off x="11033185" y="5699185"/>
+            <a:ext cx="1158815" cy="1158815"/>
+          </a:xfrm>
+          <a:prstGeom prst="rect">
+            <a:avLst/>
+          </a:prstGeom>
+        </p:spPr>
+      </p:pic>
+    </p:spTree>
+    <p:extLst>
+      <p:ext uri="{BB962C8B-B14F-4D97-AF65-F5344CB8AC3E}">
+        <p14:creationId xmlns:p14="http://schemas.microsoft.com/office/powerpoint/2010/main" val="2102838215"/>
+      </p:ext>
+    </p:extLst>
+  </p:cSld>
+  <p:clrMapOvr>
+    <a:masterClrMapping/>
+  </p:clrMapOvr>
+</p:sld>
+</file>
+
+<file path=ppt/slides/slide7.xml><?xml version="1.0" encoding="utf-8"?>
+<p:sld xmlns:a="http://schemas.openxmlformats.org/drawingml/2006/main" xmlns:r="http://schemas.openxmlformats.org/officeDocument/2006/relationships" xmlns:p="http://schemas.openxmlformats.org/presentationml/2006/main">
+  <p:cSld>
+    <p:spTree>
+      <p:nvGrpSpPr>
+        <p:cNvPr id="1" name=""/>
+        <p:cNvGrpSpPr/>
+        <p:nvPr/>
+      </p:nvGrpSpPr>
+      <p:grpSpPr>
+        <a:xfrm>
+          <a:off x="0" y="0"/>
+          <a:ext cx="0" cy="0"/>
+          <a:chOff x="0" y="0"/>
+          <a:chExt cx="0" cy="0"/>
+        </a:xfrm>
+      </p:grpSpPr>
+      <p:sp>
+        <p:nvSpPr>
+          <p:cNvPr id="11" name="TextBox 10">
+            <a:extLst>
+              <a:ext uri="{FF2B5EF4-FFF2-40B4-BE49-F238E27FC236}">
+                <a16:creationId xmlns:a16="http://schemas.microsoft.com/office/drawing/2014/main" id="{13A726F4-4F1A-0E43-5DDB-DF59D3337A06}"/>
+              </a:ext>
+            </a:extLst>
+          </p:cNvPr>
+          <p:cNvSpPr txBox="1"/>
+          <p:nvPr/>
+        </p:nvSpPr>
+        <p:spPr>
+          <a:xfrm>
+            <a:off x="0" y="0"/>
+            <a:ext cx="12192000" cy="584775"/>
+          </a:xfrm>
+          <a:prstGeom prst="rect">
+            <a:avLst/>
+          </a:prstGeom>
+          <a:noFill/>
+        </p:spPr>
+        <p:txBody>
+          <a:bodyPr wrap="square" rtlCol="0">
+            <a:spAutoFit/>
+          </a:bodyPr>
+          <a:lstStyle/>
+          <a:p>
+            <a:pPr algn="ctr"/>
+            <a:r>
+              <a:rPr lang="en-US" sz="3200" dirty="0">
+                <a:solidFill>
+                  <a:schemeClr val="bg1"/>
+                </a:solidFill>
+              </a:rPr>
+              <a:t>Collecting eggs and flower</a:t>
+            </a:r>
+          </a:p>
+        </p:txBody>
+      </p:sp>
+      <p:pic>
+        <p:nvPicPr>
+          <p:cNvPr id="59" name="Picture 58" descr="A picture containing toy&#10;&#10;Description automatically generated">
+            <a:extLst>
+              <a:ext uri="{FF2B5EF4-FFF2-40B4-BE49-F238E27FC236}">
+                <a16:creationId xmlns:a16="http://schemas.microsoft.com/office/drawing/2014/main" id="{7227C457-22E8-C992-7ADF-D83C086C8EF7}"/>
+              </a:ext>
+            </a:extLst>
+          </p:cNvPr>
+          <p:cNvPicPr>
+            <a:picLocks noChangeAspect="1"/>
+          </p:cNvPicPr>
+          <p:nvPr/>
+        </p:nvPicPr>
+        <p:blipFill>
+          <a:blip r:embed="rId2">
+            <a:extLst>
+              <a:ext uri="{28A0092B-C50C-407E-A947-70E740481C1C}">
+                <a14:useLocalDpi xmlns:a14="http://schemas.microsoft.com/office/drawing/2010/main" val="0"/>
+              </a:ext>
+            </a:extLst>
+          </a:blip>
+          <a:stretch>
+            <a:fillRect/>
+          </a:stretch>
+        </p:blipFill>
+        <p:spPr>
+          <a:xfrm>
+            <a:off x="9425170" y="2984740"/>
+            <a:ext cx="2719201" cy="1529550"/>
+          </a:xfrm>
+          <a:prstGeom prst="rect">
+            <a:avLst/>
+          </a:prstGeom>
+        </p:spPr>
+      </p:pic>
+      <p:pic>
+        <p:nvPicPr>
+          <p:cNvPr id="4" name="Picture 3" descr="Icon&#10;&#10;Description automatically generated">
+            <a:extLst>
+              <a:ext uri="{FF2B5EF4-FFF2-40B4-BE49-F238E27FC236}">
+                <a16:creationId xmlns:a16="http://schemas.microsoft.com/office/drawing/2014/main" id="{95B6D3C2-2209-11E4-54A1-3DB5F7AC3722}"/>
+              </a:ext>
+            </a:extLst>
+          </p:cNvPr>
+          <p:cNvPicPr>
+            <a:picLocks noChangeAspect="1"/>
+          </p:cNvPicPr>
+          <p:nvPr/>
+        </p:nvPicPr>
+        <p:blipFill>
+          <a:blip r:embed="rId3">
+            <a:extLst>
+              <a:ext uri="{28A0092B-C50C-407E-A947-70E740481C1C}">
+                <a14:useLocalDpi xmlns:a14="http://schemas.microsoft.com/office/drawing/2010/main" val="0"/>
+              </a:ext>
+            </a:extLst>
+          </a:blip>
+          <a:stretch>
+            <a:fillRect/>
+          </a:stretch>
+        </p:blipFill>
+        <p:spPr>
+          <a:xfrm>
+            <a:off x="11033185" y="5699185"/>
+            <a:ext cx="1158815" cy="1158815"/>
+          </a:xfrm>
+          <a:prstGeom prst="rect">
+            <a:avLst/>
+          </a:prstGeom>
+        </p:spPr>
+      </p:pic>
+      <p:pic>
+        <p:nvPicPr>
+          <p:cNvPr id="5" name="Picture 4" descr="A picture containing light&#10;&#10;Description automatically generated">
+            <a:extLst>
+              <a:ext uri="{FF2B5EF4-FFF2-40B4-BE49-F238E27FC236}">
+                <a16:creationId xmlns:a16="http://schemas.microsoft.com/office/drawing/2014/main" id="{76A748E9-8F3C-64D1-C33F-FB15325BB823}"/>
+              </a:ext>
+            </a:extLst>
+          </p:cNvPr>
+          <p:cNvPicPr>
+            <a:picLocks noChangeAspect="1"/>
+          </p:cNvPicPr>
+          <p:nvPr/>
+        </p:nvPicPr>
+        <p:blipFill>
+          <a:blip r:embed="rId4">
+            <a:extLst>
+              <a:ext uri="{28A0092B-C50C-407E-A947-70E740481C1C}">
+                <a14:useLocalDpi xmlns:a14="http://schemas.microsoft.com/office/drawing/2010/main" val="0"/>
+              </a:ext>
+            </a:extLst>
+          </a:blip>
+          <a:stretch>
+            <a:fillRect/>
+          </a:stretch>
+        </p:blipFill>
+        <p:spPr>
+          <a:xfrm>
+            <a:off x="381682" y="1425479"/>
+            <a:ext cx="1559261" cy="1559261"/>
+          </a:xfrm>
+          <a:prstGeom prst="rect">
+            <a:avLst/>
+          </a:prstGeom>
+        </p:spPr>
+      </p:pic>
+      <p:pic>
+        <p:nvPicPr>
+          <p:cNvPr id="10" name="Picture 9" descr="A white letter on a black background&#10;&#10;Description automatically generated with low confidence">
+            <a:extLst>
+              <a:ext uri="{FF2B5EF4-FFF2-40B4-BE49-F238E27FC236}">
+                <a16:creationId xmlns:a16="http://schemas.microsoft.com/office/drawing/2014/main" id="{B076ECC6-592E-55A7-5817-C363C4C411BA}"/>
+              </a:ext>
+            </a:extLst>
+          </p:cNvPr>
+          <p:cNvPicPr>
+            <a:picLocks noChangeAspect="1"/>
+          </p:cNvPicPr>
+          <p:nvPr/>
+        </p:nvPicPr>
+        <p:blipFill>
+          <a:blip r:embed="rId5">
+            <a:extLst>
+              <a:ext uri="{28A0092B-C50C-407E-A947-70E740481C1C}">
+                <a14:useLocalDpi xmlns:a14="http://schemas.microsoft.com/office/drawing/2010/main" val="0"/>
+              </a:ext>
+            </a:extLst>
+          </a:blip>
+          <a:stretch>
+            <a:fillRect/>
+          </a:stretch>
+        </p:blipFill>
+        <p:spPr>
+          <a:xfrm>
+            <a:off x="5234040" y="4763901"/>
+            <a:ext cx="1999208" cy="1999208"/>
+          </a:xfrm>
+          <a:prstGeom prst="rect">
+            <a:avLst/>
+          </a:prstGeom>
+        </p:spPr>
+      </p:pic>
+      <p:pic>
+        <p:nvPicPr>
+          <p:cNvPr id="25" name="Graphic 24" descr="Cursor with solid fill">
+            <a:extLst>
+              <a:ext uri="{FF2B5EF4-FFF2-40B4-BE49-F238E27FC236}">
+                <a16:creationId xmlns:a16="http://schemas.microsoft.com/office/drawing/2014/main" id="{D68D6AB6-9E6A-E765-5D96-AC979A71DFEC}"/>
+              </a:ext>
+            </a:extLst>
+          </p:cNvPr>
+          <p:cNvPicPr>
+            <a:picLocks noChangeAspect="1"/>
+          </p:cNvPicPr>
+          <p:nvPr/>
+        </p:nvPicPr>
+        <p:blipFill>
+          <a:blip r:embed="rId6">
+            <a:extLst>
+              <a:ext uri="{28A0092B-C50C-407E-A947-70E740481C1C}">
+                <a14:useLocalDpi xmlns:a14="http://schemas.microsoft.com/office/drawing/2010/main" val="0"/>
+              </a:ext>
+              <a:ext uri="{96DAC541-7B7A-43D3-8B79-37D633B846F1}">
+                <asvg:svgBlip xmlns:asvg="http://schemas.microsoft.com/office/drawing/2016/SVG/main" r:embed="rId7"/>
+              </a:ext>
+            </a:extLst>
+          </a:blip>
+          <a:stretch>
+            <a:fillRect/>
+          </a:stretch>
+        </p:blipFill>
+        <p:spPr>
+          <a:xfrm>
+            <a:off x="6019553" y="5495022"/>
+            <a:ext cx="789988" cy="789988"/>
+          </a:xfrm>
+          <a:prstGeom prst="rect">
+            <a:avLst/>
+          </a:prstGeom>
+        </p:spPr>
+      </p:pic>
+      <p:sp>
+        <p:nvSpPr>
+          <p:cNvPr id="28" name="Arrow: Right 27">
+            <a:extLst>
+              <a:ext uri="{FF2B5EF4-FFF2-40B4-BE49-F238E27FC236}">
+                <a16:creationId xmlns:a16="http://schemas.microsoft.com/office/drawing/2014/main" id="{56F32BB4-0588-9479-87F5-A94FC57CE143}"/>
+              </a:ext>
+            </a:extLst>
+          </p:cNvPr>
+          <p:cNvSpPr/>
+          <p:nvPr/>
+        </p:nvSpPr>
+        <p:spPr>
+          <a:xfrm rot="20133203">
+            <a:off x="7479830" y="4680839"/>
+            <a:ext cx="1787992" cy="1078120"/>
+          </a:xfrm>
+          <a:prstGeom prst="rightArrow">
+            <a:avLst/>
+          </a:prstGeom>
+        </p:spPr>
+        <p:style>
+          <a:lnRef idx="0">
+            <a:schemeClr val="accent6"/>
+          </a:lnRef>
+          <a:fillRef idx="3">
+            <a:schemeClr val="accent6"/>
+          </a:fillRef>
+          <a:effectRef idx="3">
+            <a:schemeClr val="accent6"/>
+          </a:effectRef>
+          <a:fontRef idx="minor">
+            <a:schemeClr val="lt1"/>
+          </a:fontRef>
+        </p:style>
+        <p:txBody>
+          <a:bodyPr rtlCol="0" anchor="ctr"/>
+          <a:lstStyle/>
+          <a:p>
+            <a:pPr algn="ctr"/>
+            <a:r>
+              <a:rPr lang="en-US" dirty="0"/>
+              <a:t>Click on egg</a:t>
+            </a:r>
+          </a:p>
+        </p:txBody>
+      </p:sp>
+      <p:pic>
+        <p:nvPicPr>
+          <p:cNvPr id="33" name="Picture 32" descr="A white letter on a black background&#10;&#10;Description automatically generated with low confidence">
+            <a:extLst>
+              <a:ext uri="{FF2B5EF4-FFF2-40B4-BE49-F238E27FC236}">
+                <a16:creationId xmlns:a16="http://schemas.microsoft.com/office/drawing/2014/main" id="{D447A3EA-0D33-FC3C-8718-6D957CBD5D7F}"/>
+              </a:ext>
+            </a:extLst>
+          </p:cNvPr>
+          <p:cNvPicPr>
+            <a:picLocks noChangeAspect="1"/>
+          </p:cNvPicPr>
+          <p:nvPr/>
+        </p:nvPicPr>
+        <p:blipFill>
+          <a:blip r:embed="rId5">
+            <a:extLst>
+              <a:ext uri="{28A0092B-C50C-407E-A947-70E740481C1C}">
+                <a14:useLocalDpi xmlns:a14="http://schemas.microsoft.com/office/drawing/2010/main" val="0"/>
+              </a:ext>
+            </a:extLst>
+          </a:blip>
+          <a:stretch>
+            <a:fillRect/>
+          </a:stretch>
+        </p:blipFill>
+        <p:spPr>
+          <a:xfrm>
+            <a:off x="381682" y="4713202"/>
+            <a:ext cx="1999208" cy="1999208"/>
+          </a:xfrm>
+          <a:prstGeom prst="rect">
+            <a:avLst/>
+          </a:prstGeom>
+        </p:spPr>
+      </p:pic>
+      <p:pic>
+        <p:nvPicPr>
+          <p:cNvPr id="38" name="Picture 37" descr="A picture containing toy&#10;&#10;Description automatically generated">
+            <a:extLst>
+              <a:ext uri="{FF2B5EF4-FFF2-40B4-BE49-F238E27FC236}">
+                <a16:creationId xmlns:a16="http://schemas.microsoft.com/office/drawing/2014/main" id="{C9B8EBE7-3BE2-AD9B-B8D3-E0D010809725}"/>
+              </a:ext>
+            </a:extLst>
+          </p:cNvPr>
+          <p:cNvPicPr>
+            <a:picLocks noChangeAspect="1"/>
+          </p:cNvPicPr>
+          <p:nvPr/>
+        </p:nvPicPr>
+        <p:blipFill>
+          <a:blip r:embed="rId2">
+            <a:extLst>
+              <a:ext uri="{28A0092B-C50C-407E-A947-70E740481C1C}">
+                <a14:useLocalDpi xmlns:a14="http://schemas.microsoft.com/office/drawing/2010/main" val="0"/>
+              </a:ext>
+            </a:extLst>
+          </a:blip>
+          <a:stretch>
+            <a:fillRect/>
+          </a:stretch>
+        </p:blipFill>
+        <p:spPr>
+          <a:xfrm>
+            <a:off x="1793022" y="1220732"/>
+            <a:ext cx="1823966" cy="1025981"/>
+          </a:xfrm>
+          <a:prstGeom prst="rect">
+            <a:avLst/>
+          </a:prstGeom>
+        </p:spPr>
+      </p:pic>
+      <p:pic>
+        <p:nvPicPr>
+          <p:cNvPr id="39" name="Picture 38" descr="A picture containing light&#10;&#10;Description automatically generated">
+            <a:extLst>
+              <a:ext uri="{FF2B5EF4-FFF2-40B4-BE49-F238E27FC236}">
+                <a16:creationId xmlns:a16="http://schemas.microsoft.com/office/drawing/2014/main" id="{0A8A5695-55CE-6220-FB3B-CD6252811681}"/>
+              </a:ext>
+            </a:extLst>
+          </p:cNvPr>
+          <p:cNvPicPr>
+            <a:picLocks noChangeAspect="1"/>
+          </p:cNvPicPr>
+          <p:nvPr/>
+        </p:nvPicPr>
+        <p:blipFill>
+          <a:blip r:embed="rId8">
+            <a:extLst>
+              <a:ext uri="{28A0092B-C50C-407E-A947-70E740481C1C}">
+                <a14:useLocalDpi xmlns:a14="http://schemas.microsoft.com/office/drawing/2010/main" val="0"/>
+              </a:ext>
+            </a:extLst>
+          </a:blip>
+          <a:stretch>
+            <a:fillRect/>
+          </a:stretch>
+        </p:blipFill>
+        <p:spPr>
+          <a:xfrm>
+            <a:off x="2705005" y="1500178"/>
+            <a:ext cx="897322" cy="897322"/>
+          </a:xfrm>
+          <a:prstGeom prst="rect">
+            <a:avLst/>
+          </a:prstGeom>
+        </p:spPr>
+      </p:pic>
+      <p:sp>
+        <p:nvSpPr>
+          <p:cNvPr id="40" name="Arrow: Right 39">
+            <a:extLst>
+              <a:ext uri="{FF2B5EF4-FFF2-40B4-BE49-F238E27FC236}">
+                <a16:creationId xmlns:a16="http://schemas.microsoft.com/office/drawing/2014/main" id="{0F952BF5-8A32-C9CE-4E04-012F7D549246}"/>
+              </a:ext>
+            </a:extLst>
+          </p:cNvPr>
+          <p:cNvSpPr/>
+          <p:nvPr/>
+        </p:nvSpPr>
+        <p:spPr>
+          <a:xfrm>
+            <a:off x="1924260" y="2097179"/>
+            <a:ext cx="2514296" cy="887561"/>
+          </a:xfrm>
+          <a:prstGeom prst="rightArrow">
+            <a:avLst/>
+          </a:prstGeom>
+        </p:spPr>
+        <p:style>
+          <a:lnRef idx="0">
+            <a:schemeClr val="accent6"/>
+          </a:lnRef>
+          <a:fillRef idx="3">
+            <a:schemeClr val="accent6"/>
+          </a:fillRef>
+          <a:effectRef idx="3">
+            <a:schemeClr val="accent6"/>
+          </a:effectRef>
+          <a:fontRef idx="minor">
+            <a:schemeClr val="lt1"/>
+          </a:fontRef>
+        </p:style>
+        <p:txBody>
+          <a:bodyPr rtlCol="0" anchor="ctr"/>
+          <a:lstStyle/>
+          <a:p>
+            <a:pPr algn="ctr"/>
+            <a:r>
+              <a:rPr lang="en-US" dirty="0"/>
+              <a:t>Have grain in storage</a:t>
+            </a:r>
+          </a:p>
+        </p:txBody>
+      </p:sp>
+      <p:pic>
+        <p:nvPicPr>
+          <p:cNvPr id="42" name="Picture 41">
+            <a:extLst>
+              <a:ext uri="{FF2B5EF4-FFF2-40B4-BE49-F238E27FC236}">
+                <a16:creationId xmlns:a16="http://schemas.microsoft.com/office/drawing/2014/main" id="{F884CF73-0A51-FB77-1240-2834495DC33C}"/>
+              </a:ext>
+            </a:extLst>
+          </p:cNvPr>
+          <p:cNvPicPr>
+            <a:picLocks noChangeAspect="1"/>
+          </p:cNvPicPr>
+          <p:nvPr/>
+        </p:nvPicPr>
+        <p:blipFill>
+          <a:blip r:embed="rId9"/>
+          <a:stretch>
+            <a:fillRect/>
+          </a:stretch>
+        </p:blipFill>
+        <p:spPr>
+          <a:xfrm>
+            <a:off x="4516317" y="796624"/>
+            <a:ext cx="2121667" cy="2816970"/>
+          </a:xfrm>
+          <a:prstGeom prst="rect">
+            <a:avLst/>
+          </a:prstGeom>
+        </p:spPr>
+      </p:pic>
+      <p:sp>
+        <p:nvSpPr>
+          <p:cNvPr id="43" name="Arrow: Right 42">
+            <a:extLst>
+              <a:ext uri="{FF2B5EF4-FFF2-40B4-BE49-F238E27FC236}">
+                <a16:creationId xmlns:a16="http://schemas.microsoft.com/office/drawing/2014/main" id="{11A47190-729D-5173-D8F2-D8C7B3148A15}"/>
+              </a:ext>
+            </a:extLst>
+          </p:cNvPr>
+          <p:cNvSpPr/>
+          <p:nvPr/>
+        </p:nvSpPr>
+        <p:spPr>
+          <a:xfrm rot="20015164">
+            <a:off x="6526328" y="2381559"/>
+            <a:ext cx="1836608" cy="749271"/>
+          </a:xfrm>
+          <a:prstGeom prst="rightArrow">
+            <a:avLst>
+              <a:gd name="adj1" fmla="val 60536"/>
+              <a:gd name="adj2" fmla="val 50000"/>
+            </a:avLst>
+          </a:prstGeom>
+        </p:spPr>
+        <p:style>
+          <a:lnRef idx="0">
+            <a:schemeClr val="accent6"/>
+          </a:lnRef>
+          <a:fillRef idx="3">
+            <a:schemeClr val="accent6"/>
+          </a:fillRef>
+          <a:effectRef idx="3">
+            <a:schemeClr val="accent6"/>
+          </a:effectRef>
+          <a:fontRef idx="minor">
+            <a:schemeClr val="lt1"/>
+          </a:fontRef>
+        </p:style>
+        <p:txBody>
+          <a:bodyPr rtlCol="0" anchor="ctr"/>
+          <a:lstStyle/>
+          <a:p>
+            <a:pPr algn="ctr"/>
+            <a:r>
+              <a:rPr lang="en-US" dirty="0"/>
+              <a:t>Spawns flower</a:t>
+            </a:r>
+          </a:p>
+        </p:txBody>
+      </p:sp>
+      <p:pic>
+        <p:nvPicPr>
+          <p:cNvPr id="44" name="Picture 43" descr="A picture containing light&#10;&#10;Description automatically generated">
+            <a:extLst>
+              <a:ext uri="{FF2B5EF4-FFF2-40B4-BE49-F238E27FC236}">
+                <a16:creationId xmlns:a16="http://schemas.microsoft.com/office/drawing/2014/main" id="{84860609-A298-E69D-C903-42A745EE6143}"/>
+              </a:ext>
+            </a:extLst>
+          </p:cNvPr>
+          <p:cNvPicPr>
+            <a:picLocks noChangeAspect="1"/>
+          </p:cNvPicPr>
+          <p:nvPr/>
+        </p:nvPicPr>
+        <p:blipFill>
+          <a:blip r:embed="rId4">
+            <a:extLst>
+              <a:ext uri="{28A0092B-C50C-407E-A947-70E740481C1C}">
+                <a14:useLocalDpi xmlns:a14="http://schemas.microsoft.com/office/drawing/2010/main" val="0"/>
+              </a:ext>
+            </a:extLst>
+          </a:blip>
+          <a:stretch>
+            <a:fillRect/>
+          </a:stretch>
+        </p:blipFill>
+        <p:spPr>
+          <a:xfrm>
+            <a:off x="7654097" y="1178480"/>
+            <a:ext cx="1559261" cy="1559261"/>
+          </a:xfrm>
+          <a:prstGeom prst="rect">
+            <a:avLst/>
+          </a:prstGeom>
+        </p:spPr>
+      </p:pic>
+      <p:sp>
+        <p:nvSpPr>
+          <p:cNvPr id="45" name="Arrow: Right 44">
+            <a:extLst>
+              <a:ext uri="{FF2B5EF4-FFF2-40B4-BE49-F238E27FC236}">
+                <a16:creationId xmlns:a16="http://schemas.microsoft.com/office/drawing/2014/main" id="{104A2BE1-4377-9F5D-6BC7-CA4206DD0B9F}"/>
+              </a:ext>
+            </a:extLst>
+          </p:cNvPr>
+          <p:cNvSpPr/>
+          <p:nvPr/>
+        </p:nvSpPr>
+        <p:spPr>
+          <a:xfrm rot="1319558">
+            <a:off x="8992390" y="2008640"/>
+            <a:ext cx="1946117" cy="747040"/>
+          </a:xfrm>
+          <a:prstGeom prst="rightArrow">
+            <a:avLst>
+              <a:gd name="adj1" fmla="val 52765"/>
+              <a:gd name="adj2" fmla="val 55176"/>
+            </a:avLst>
+          </a:prstGeom>
+        </p:spPr>
+        <p:style>
+          <a:lnRef idx="0">
+            <a:schemeClr val="accent6"/>
+          </a:lnRef>
+          <a:fillRef idx="3">
+            <a:schemeClr val="accent6"/>
+          </a:fillRef>
+          <a:effectRef idx="3">
+            <a:schemeClr val="accent6"/>
+          </a:effectRef>
+          <a:fontRef idx="minor">
+            <a:schemeClr val="lt1"/>
+          </a:fontRef>
+        </p:style>
+        <p:txBody>
+          <a:bodyPr rtlCol="0" anchor="ctr"/>
+          <a:lstStyle/>
+          <a:p>
+            <a:pPr algn="ctr"/>
+            <a:r>
+              <a:rPr lang="en-US" dirty="0"/>
+              <a:t>Click on flower</a:t>
+            </a:r>
+          </a:p>
+        </p:txBody>
+      </p:sp>
+      <p:pic>
+        <p:nvPicPr>
+          <p:cNvPr id="46" name="Graphic 45" descr="Cursor with solid fill">
+            <a:extLst>
+              <a:ext uri="{FF2B5EF4-FFF2-40B4-BE49-F238E27FC236}">
+                <a16:creationId xmlns:a16="http://schemas.microsoft.com/office/drawing/2014/main" id="{24F4D718-0357-BC0F-640B-3EAD2D35C213}"/>
+              </a:ext>
+            </a:extLst>
+          </p:cNvPr>
+          <p:cNvPicPr>
+            <a:picLocks noChangeAspect="1"/>
+          </p:cNvPicPr>
+          <p:nvPr/>
+        </p:nvPicPr>
+        <p:blipFill>
+          <a:blip r:embed="rId6">
+            <a:extLst>
+              <a:ext uri="{28A0092B-C50C-407E-A947-70E740481C1C}">
+                <a14:useLocalDpi xmlns:a14="http://schemas.microsoft.com/office/drawing/2010/main" val="0"/>
+              </a:ext>
+              <a:ext uri="{96DAC541-7B7A-43D3-8B79-37D633B846F1}">
+                <asvg:svgBlip xmlns:asvg="http://schemas.microsoft.com/office/drawing/2016/SVG/main" r:embed="rId7"/>
+              </a:ext>
+            </a:extLst>
+          </a:blip>
+          <a:stretch>
+            <a:fillRect/>
+          </a:stretch>
+        </p:blipFill>
+        <p:spPr>
+          <a:xfrm>
+            <a:off x="8502325" y="1958110"/>
+            <a:ext cx="789988" cy="789988"/>
+          </a:xfrm>
+          <a:prstGeom prst="rect">
+            <a:avLst/>
+          </a:prstGeom>
+        </p:spPr>
+      </p:pic>
     </p:spTree>
     <p:extLst>
       <p:ext uri="{BB962C8B-B14F-4D97-AF65-F5344CB8AC3E}">
         <p14:creationId xmlns:p14="http://schemas.microsoft.com/office/powerpoint/2010/main" val="1128374672"/>
+      </p:ext>
+    </p:extLst>
+  </p:cSld>
+  <p:clrMapOvr>
+    <a:masterClrMapping/>
+  </p:clrMapOvr>
+</p:sld>
+</file>
+
+<file path=ppt/slides/slide8.xml><?xml version="1.0" encoding="utf-8"?>
+<p:sld xmlns:a="http://schemas.openxmlformats.org/drawingml/2006/main" xmlns:r="http://schemas.openxmlformats.org/officeDocument/2006/relationships" xmlns:p="http://schemas.openxmlformats.org/presentationml/2006/main">
+  <p:cSld>
+    <p:spTree>
+      <p:nvGrpSpPr>
+        <p:cNvPr id="1" name=""/>
+        <p:cNvGrpSpPr/>
+        <p:nvPr/>
+      </p:nvGrpSpPr>
+      <p:grpSpPr>
+        <a:xfrm>
+          <a:off x="0" y="0"/>
+          <a:ext cx="0" cy="0"/>
+          <a:chOff x="0" y="0"/>
+          <a:chExt cx="0" cy="0"/>
+        </a:xfrm>
+      </p:grpSpPr>
+      <p:sp>
+        <p:nvSpPr>
+          <p:cNvPr id="11" name="TextBox 10">
+            <a:extLst>
+              <a:ext uri="{FF2B5EF4-FFF2-40B4-BE49-F238E27FC236}">
+                <a16:creationId xmlns:a16="http://schemas.microsoft.com/office/drawing/2014/main" id="{13A726F4-4F1A-0E43-5DDB-DF59D3337A06}"/>
+              </a:ext>
+            </a:extLst>
+          </p:cNvPr>
+          <p:cNvSpPr txBox="1"/>
+          <p:nvPr/>
+        </p:nvSpPr>
+        <p:spPr>
+          <a:xfrm>
+            <a:off x="0" y="0"/>
+            <a:ext cx="12192000" cy="584775"/>
+          </a:xfrm>
+          <a:prstGeom prst="rect">
+            <a:avLst/>
+          </a:prstGeom>
+          <a:noFill/>
+        </p:spPr>
+        <p:txBody>
+          <a:bodyPr wrap="square" rtlCol="0">
+            <a:spAutoFit/>
+          </a:bodyPr>
+          <a:lstStyle/>
+          <a:p>
+            <a:pPr algn="ctr"/>
+            <a:r>
+              <a:rPr lang="en-US" sz="3200" dirty="0">
+                <a:solidFill>
+                  <a:schemeClr val="bg1"/>
+                </a:solidFill>
+              </a:rPr>
+              <a:t>Making bread, pizza or pancakes</a:t>
+            </a:r>
+          </a:p>
+        </p:txBody>
+      </p:sp>
+      <p:pic>
+        <p:nvPicPr>
+          <p:cNvPr id="59" name="Picture 58" descr="A picture containing toy&#10;&#10;Description automatically generated">
+            <a:extLst>
+              <a:ext uri="{FF2B5EF4-FFF2-40B4-BE49-F238E27FC236}">
+                <a16:creationId xmlns:a16="http://schemas.microsoft.com/office/drawing/2014/main" id="{7227C457-22E8-C992-7ADF-D83C086C8EF7}"/>
+              </a:ext>
+            </a:extLst>
+          </p:cNvPr>
+          <p:cNvPicPr>
+            <a:picLocks noChangeAspect="1"/>
+          </p:cNvPicPr>
+          <p:nvPr/>
+        </p:nvPicPr>
+        <p:blipFill>
+          <a:blip r:embed="rId2">
+            <a:extLst>
+              <a:ext uri="{28A0092B-C50C-407E-A947-70E740481C1C}">
+                <a14:useLocalDpi xmlns:a14="http://schemas.microsoft.com/office/drawing/2010/main" val="0"/>
+              </a:ext>
+            </a:extLst>
+          </a:blip>
+          <a:stretch>
+            <a:fillRect/>
+          </a:stretch>
+        </p:blipFill>
+        <p:spPr>
+          <a:xfrm>
+            <a:off x="9425170" y="2984740"/>
+            <a:ext cx="2719201" cy="1529550"/>
+          </a:xfrm>
+          <a:prstGeom prst="rect">
+            <a:avLst/>
+          </a:prstGeom>
+        </p:spPr>
+      </p:pic>
+      <p:pic>
+        <p:nvPicPr>
+          <p:cNvPr id="4" name="Picture 3" descr="Icon&#10;&#10;Description automatically generated">
+            <a:extLst>
+              <a:ext uri="{FF2B5EF4-FFF2-40B4-BE49-F238E27FC236}">
+                <a16:creationId xmlns:a16="http://schemas.microsoft.com/office/drawing/2014/main" id="{95B6D3C2-2209-11E4-54A1-3DB5F7AC3722}"/>
+              </a:ext>
+            </a:extLst>
+          </p:cNvPr>
+          <p:cNvPicPr>
+            <a:picLocks noChangeAspect="1"/>
+          </p:cNvPicPr>
+          <p:nvPr/>
+        </p:nvPicPr>
+        <p:blipFill>
+          <a:blip r:embed="rId3">
+            <a:extLst>
+              <a:ext uri="{28A0092B-C50C-407E-A947-70E740481C1C}">
+                <a14:useLocalDpi xmlns:a14="http://schemas.microsoft.com/office/drawing/2010/main" val="0"/>
+              </a:ext>
+            </a:extLst>
+          </a:blip>
+          <a:stretch>
+            <a:fillRect/>
+          </a:stretch>
+        </p:blipFill>
+        <p:spPr>
+          <a:xfrm>
+            <a:off x="11033185" y="5699185"/>
+            <a:ext cx="1158815" cy="1158815"/>
+          </a:xfrm>
+          <a:prstGeom prst="rect">
+            <a:avLst/>
+          </a:prstGeom>
+        </p:spPr>
+      </p:pic>
+      <p:pic>
+        <p:nvPicPr>
+          <p:cNvPr id="3" name="Picture 2">
+            <a:extLst>
+              <a:ext uri="{FF2B5EF4-FFF2-40B4-BE49-F238E27FC236}">
+                <a16:creationId xmlns:a16="http://schemas.microsoft.com/office/drawing/2014/main" id="{79F3D753-1D10-0877-604F-1C31BC9F902A}"/>
+              </a:ext>
+            </a:extLst>
+          </p:cNvPr>
+          <p:cNvPicPr>
+            <a:picLocks noChangeAspect="1"/>
+          </p:cNvPicPr>
+          <p:nvPr/>
+        </p:nvPicPr>
+        <p:blipFill>
+          <a:blip r:embed="rId4"/>
+          <a:stretch>
+            <a:fillRect/>
+          </a:stretch>
+        </p:blipFill>
+        <p:spPr>
+          <a:xfrm>
+            <a:off x="5440054" y="2107098"/>
+            <a:ext cx="2337572" cy="2730107"/>
+          </a:xfrm>
+          <a:prstGeom prst="rect">
+            <a:avLst/>
+          </a:prstGeom>
+        </p:spPr>
+      </p:pic>
+      <p:sp>
+        <p:nvSpPr>
+          <p:cNvPr id="6" name="Arrow: Right 5">
+            <a:extLst>
+              <a:ext uri="{FF2B5EF4-FFF2-40B4-BE49-F238E27FC236}">
+                <a16:creationId xmlns:a16="http://schemas.microsoft.com/office/drawing/2014/main" id="{ED418043-F533-AA21-C31D-C58E4671A37B}"/>
+              </a:ext>
+            </a:extLst>
+          </p:cNvPr>
+          <p:cNvSpPr/>
+          <p:nvPr/>
+        </p:nvSpPr>
+        <p:spPr>
+          <a:xfrm>
+            <a:off x="7263442" y="3536830"/>
+            <a:ext cx="2803584" cy="1136016"/>
+          </a:xfrm>
+          <a:prstGeom prst="rightArrow">
+            <a:avLst/>
+          </a:prstGeom>
+        </p:spPr>
+        <p:style>
+          <a:lnRef idx="0">
+            <a:schemeClr val="accent6"/>
+          </a:lnRef>
+          <a:fillRef idx="3">
+            <a:schemeClr val="accent6"/>
+          </a:fillRef>
+          <a:effectRef idx="3">
+            <a:schemeClr val="accent6"/>
+          </a:effectRef>
+          <a:fontRef idx="minor">
+            <a:schemeClr val="lt1"/>
+          </a:fontRef>
+        </p:style>
+        <p:txBody>
+          <a:bodyPr rtlCol="0" anchor="ctr"/>
+          <a:lstStyle/>
+          <a:p>
+            <a:pPr algn="ctr"/>
+            <a:r>
+              <a:rPr lang="en-US" dirty="0"/>
+              <a:t>Bakery makes</a:t>
+            </a:r>
+          </a:p>
+          <a:p>
+            <a:pPr algn="ctr"/>
+            <a:r>
+              <a:rPr lang="en-US" dirty="0"/>
+              <a:t>Bread, pizza or pancakes</a:t>
+            </a:r>
+          </a:p>
+        </p:txBody>
+      </p:sp>
+      <p:pic>
+        <p:nvPicPr>
+          <p:cNvPr id="8" name="Picture 7" descr="A picture containing pool ball, gambling house, room, dark&#10;&#10;Description automatically generated">
+            <a:extLst>
+              <a:ext uri="{FF2B5EF4-FFF2-40B4-BE49-F238E27FC236}">
+                <a16:creationId xmlns:a16="http://schemas.microsoft.com/office/drawing/2014/main" id="{EF372B1B-0308-2F75-A9D9-D9DB95C5EEDF}"/>
+              </a:ext>
+            </a:extLst>
+          </p:cNvPr>
+          <p:cNvPicPr>
+            <a:picLocks noChangeAspect="1"/>
+          </p:cNvPicPr>
+          <p:nvPr/>
+        </p:nvPicPr>
+        <p:blipFill>
+          <a:blip r:embed="rId5">
+            <a:extLst>
+              <a:ext uri="{28A0092B-C50C-407E-A947-70E740481C1C}">
+                <a14:useLocalDpi xmlns:a14="http://schemas.microsoft.com/office/drawing/2010/main" val="0"/>
+              </a:ext>
+            </a:extLst>
+          </a:blip>
+          <a:stretch>
+            <a:fillRect/>
+          </a:stretch>
+        </p:blipFill>
+        <p:spPr>
+          <a:xfrm>
+            <a:off x="232340" y="2212204"/>
+            <a:ext cx="1981127" cy="1981127"/>
+          </a:xfrm>
+          <a:prstGeom prst="rect">
+            <a:avLst/>
+          </a:prstGeom>
+        </p:spPr>
+      </p:pic>
+      <p:pic>
+        <p:nvPicPr>
+          <p:cNvPr id="12" name="Picture 11">
+            <a:extLst>
+              <a:ext uri="{FF2B5EF4-FFF2-40B4-BE49-F238E27FC236}">
+                <a16:creationId xmlns:a16="http://schemas.microsoft.com/office/drawing/2014/main" id="{DB4F5DB8-E8EA-E683-A0EA-05886AF963D0}"/>
+              </a:ext>
+            </a:extLst>
+          </p:cNvPr>
+          <p:cNvPicPr>
+            <a:picLocks noChangeAspect="1"/>
+          </p:cNvPicPr>
+          <p:nvPr/>
+        </p:nvPicPr>
+        <p:blipFill>
+          <a:blip r:embed="rId6">
+            <a:extLst>
+              <a:ext uri="{28A0092B-C50C-407E-A947-70E740481C1C}">
+                <a14:useLocalDpi xmlns:a14="http://schemas.microsoft.com/office/drawing/2010/main" val="0"/>
+              </a:ext>
+            </a:extLst>
+          </a:blip>
+          <a:stretch>
+            <a:fillRect/>
+          </a:stretch>
+        </p:blipFill>
+        <p:spPr>
+          <a:xfrm>
+            <a:off x="47925" y="314712"/>
+            <a:ext cx="2349958" cy="2349958"/>
+          </a:xfrm>
+          <a:prstGeom prst="rect">
+            <a:avLst/>
+          </a:prstGeom>
+        </p:spPr>
+      </p:pic>
+      <p:pic>
+        <p:nvPicPr>
+          <p:cNvPr id="14" name="Picture 13" descr="A stack of books&#10;&#10;Description automatically generated with medium confidence">
+            <a:extLst>
+              <a:ext uri="{FF2B5EF4-FFF2-40B4-BE49-F238E27FC236}">
+                <a16:creationId xmlns:a16="http://schemas.microsoft.com/office/drawing/2014/main" id="{5C87BB0F-07C5-F933-74F5-84911194E1C1}"/>
+              </a:ext>
+            </a:extLst>
+          </p:cNvPr>
+          <p:cNvPicPr>
+            <a:picLocks noChangeAspect="1"/>
+          </p:cNvPicPr>
+          <p:nvPr/>
+        </p:nvPicPr>
+        <p:blipFill>
+          <a:blip r:embed="rId7">
+            <a:extLst>
+              <a:ext uri="{28A0092B-C50C-407E-A947-70E740481C1C}">
+                <a14:useLocalDpi xmlns:a14="http://schemas.microsoft.com/office/drawing/2010/main" val="0"/>
+              </a:ext>
+            </a:extLst>
+          </a:blip>
+          <a:stretch>
+            <a:fillRect/>
+          </a:stretch>
+        </p:blipFill>
+        <p:spPr>
+          <a:xfrm>
+            <a:off x="180457" y="4193331"/>
+            <a:ext cx="2084892" cy="2084892"/>
+          </a:xfrm>
+          <a:prstGeom prst="rect">
+            <a:avLst/>
+          </a:prstGeom>
+        </p:spPr>
+      </p:pic>
+      <p:pic>
+        <p:nvPicPr>
+          <p:cNvPr id="15" name="Picture 14" descr="A picture containing toy&#10;&#10;Description automatically generated">
+            <a:extLst>
+              <a:ext uri="{FF2B5EF4-FFF2-40B4-BE49-F238E27FC236}">
+                <a16:creationId xmlns:a16="http://schemas.microsoft.com/office/drawing/2014/main" id="{DDD14D9C-17C3-7625-5987-7D59A8BF89F2}"/>
+              </a:ext>
+            </a:extLst>
+          </p:cNvPr>
+          <p:cNvPicPr>
+            <a:picLocks noChangeAspect="1"/>
+          </p:cNvPicPr>
+          <p:nvPr/>
+        </p:nvPicPr>
+        <p:blipFill>
+          <a:blip r:embed="rId2">
+            <a:extLst>
+              <a:ext uri="{28A0092B-C50C-407E-A947-70E740481C1C}">
+                <a14:useLocalDpi xmlns:a14="http://schemas.microsoft.com/office/drawing/2010/main" val="0"/>
+              </a:ext>
+            </a:extLst>
+          </a:blip>
+          <a:stretch>
+            <a:fillRect/>
+          </a:stretch>
+        </p:blipFill>
+        <p:spPr>
+          <a:xfrm>
+            <a:off x="1958635" y="2578756"/>
+            <a:ext cx="1703241" cy="958073"/>
+          </a:xfrm>
+          <a:prstGeom prst="rect">
+            <a:avLst/>
+          </a:prstGeom>
+        </p:spPr>
+      </p:pic>
+      <p:pic>
+        <p:nvPicPr>
+          <p:cNvPr id="17" name="Picture 16" descr="A picture containing umbrella, accessory&#10;&#10;Description automatically generated">
+            <a:extLst>
+              <a:ext uri="{FF2B5EF4-FFF2-40B4-BE49-F238E27FC236}">
+                <a16:creationId xmlns:a16="http://schemas.microsoft.com/office/drawing/2014/main" id="{D031EAE9-5171-5A7C-1691-F0E2BBB02691}"/>
+              </a:ext>
+            </a:extLst>
+          </p:cNvPr>
+          <p:cNvPicPr>
+            <a:picLocks noChangeAspect="1"/>
+          </p:cNvPicPr>
+          <p:nvPr/>
+        </p:nvPicPr>
+        <p:blipFill>
+          <a:blip r:embed="rId8">
+            <a:extLst>
+              <a:ext uri="{28A0092B-C50C-407E-A947-70E740481C1C}">
+                <a14:useLocalDpi xmlns:a14="http://schemas.microsoft.com/office/drawing/2010/main" val="0"/>
+              </a:ext>
+            </a:extLst>
+          </a:blip>
+          <a:stretch>
+            <a:fillRect/>
+          </a:stretch>
+        </p:blipFill>
+        <p:spPr>
+          <a:xfrm>
+            <a:off x="2848301" y="2940914"/>
+            <a:ext cx="584775" cy="584775"/>
+          </a:xfrm>
+          <a:prstGeom prst="rect">
+            <a:avLst/>
+          </a:prstGeom>
+        </p:spPr>
+      </p:pic>
+      <p:pic>
+        <p:nvPicPr>
+          <p:cNvPr id="18" name="Picture 17" descr="A picture containing toy&#10;&#10;Description automatically generated">
+            <a:extLst>
+              <a:ext uri="{FF2B5EF4-FFF2-40B4-BE49-F238E27FC236}">
+                <a16:creationId xmlns:a16="http://schemas.microsoft.com/office/drawing/2014/main" id="{2F951A08-82AA-909E-3614-9C05DB68647B}"/>
+              </a:ext>
+            </a:extLst>
+          </p:cNvPr>
+          <p:cNvPicPr>
+            <a:picLocks noChangeAspect="1"/>
+          </p:cNvPicPr>
+          <p:nvPr/>
+        </p:nvPicPr>
+        <p:blipFill>
+          <a:blip r:embed="rId2">
+            <a:extLst>
+              <a:ext uri="{28A0092B-C50C-407E-A947-70E740481C1C}">
+                <a14:useLocalDpi xmlns:a14="http://schemas.microsoft.com/office/drawing/2010/main" val="0"/>
+              </a:ext>
+            </a:extLst>
+          </a:blip>
+          <a:stretch>
+            <a:fillRect/>
+          </a:stretch>
+        </p:blipFill>
+        <p:spPr>
+          <a:xfrm>
+            <a:off x="1958635" y="3556217"/>
+            <a:ext cx="1703241" cy="958073"/>
+          </a:xfrm>
+          <a:prstGeom prst="rect">
+            <a:avLst/>
+          </a:prstGeom>
+        </p:spPr>
+      </p:pic>
+      <p:pic>
+        <p:nvPicPr>
+          <p:cNvPr id="20" name="Picture 19" descr="A picture containing light&#10;&#10;Description automatically generated">
+            <a:extLst>
+              <a:ext uri="{FF2B5EF4-FFF2-40B4-BE49-F238E27FC236}">
+                <a16:creationId xmlns:a16="http://schemas.microsoft.com/office/drawing/2014/main" id="{22BF553D-245D-BC9B-6707-DD97A7889831}"/>
+              </a:ext>
+            </a:extLst>
+          </p:cNvPr>
+          <p:cNvPicPr>
+            <a:picLocks noChangeAspect="1"/>
+          </p:cNvPicPr>
+          <p:nvPr/>
+        </p:nvPicPr>
+        <p:blipFill>
+          <a:blip r:embed="rId9">
+            <a:extLst>
+              <a:ext uri="{28A0092B-C50C-407E-A947-70E740481C1C}">
+                <a14:useLocalDpi xmlns:a14="http://schemas.microsoft.com/office/drawing/2010/main" val="0"/>
+              </a:ext>
+            </a:extLst>
+          </a:blip>
+          <a:stretch>
+            <a:fillRect/>
+          </a:stretch>
+        </p:blipFill>
+        <p:spPr>
+          <a:xfrm>
+            <a:off x="2504989" y="3680317"/>
+            <a:ext cx="1156888" cy="1156888"/>
+          </a:xfrm>
+          <a:prstGeom prst="rect">
+            <a:avLst/>
+          </a:prstGeom>
+        </p:spPr>
+      </p:pic>
+      <p:sp>
+        <p:nvSpPr>
+          <p:cNvPr id="21" name="Arrow: Right 20">
+            <a:extLst>
+              <a:ext uri="{FF2B5EF4-FFF2-40B4-BE49-F238E27FC236}">
+                <a16:creationId xmlns:a16="http://schemas.microsoft.com/office/drawing/2014/main" id="{E3456EDC-9697-DDA1-CFC6-F76EB56FECB2}"/>
+              </a:ext>
+            </a:extLst>
+          </p:cNvPr>
+          <p:cNvSpPr/>
+          <p:nvPr/>
+        </p:nvSpPr>
+        <p:spPr>
+          <a:xfrm>
+            <a:off x="3529343" y="3556217"/>
+            <a:ext cx="2388016" cy="1136016"/>
+          </a:xfrm>
+          <a:prstGeom prst="rightArrow">
+            <a:avLst/>
+          </a:prstGeom>
+        </p:spPr>
+        <p:style>
+          <a:lnRef idx="0">
+            <a:schemeClr val="accent6"/>
+          </a:lnRef>
+          <a:fillRef idx="3">
+            <a:schemeClr val="accent6"/>
+          </a:fillRef>
+          <a:effectRef idx="3">
+            <a:schemeClr val="accent6"/>
+          </a:effectRef>
+          <a:fontRef idx="minor">
+            <a:schemeClr val="lt1"/>
+          </a:fontRef>
+        </p:style>
+        <p:txBody>
+          <a:bodyPr rtlCol="0" anchor="ctr"/>
+          <a:lstStyle/>
+          <a:p>
+            <a:pPr algn="ctr"/>
+            <a:r>
+              <a:rPr lang="en-US" dirty="0"/>
+              <a:t>Tomatoes and flower</a:t>
+            </a:r>
+          </a:p>
+        </p:txBody>
+      </p:sp>
+      <p:pic>
+        <p:nvPicPr>
+          <p:cNvPr id="22" name="Picture 21" descr="A picture containing toy&#10;&#10;Description automatically generated">
+            <a:extLst>
+              <a:ext uri="{FF2B5EF4-FFF2-40B4-BE49-F238E27FC236}">
+                <a16:creationId xmlns:a16="http://schemas.microsoft.com/office/drawing/2014/main" id="{8FDEEF21-5766-14A6-EBA9-5BF60613A93C}"/>
+              </a:ext>
+            </a:extLst>
+          </p:cNvPr>
+          <p:cNvPicPr>
+            <a:picLocks noChangeAspect="1"/>
+          </p:cNvPicPr>
+          <p:nvPr/>
+        </p:nvPicPr>
+        <p:blipFill>
+          <a:blip r:embed="rId2">
+            <a:extLst>
+              <a:ext uri="{28A0092B-C50C-407E-A947-70E740481C1C}">
+                <a14:useLocalDpi xmlns:a14="http://schemas.microsoft.com/office/drawing/2010/main" val="0"/>
+              </a:ext>
+            </a:extLst>
+          </a:blip>
+          <a:stretch>
+            <a:fillRect/>
+          </a:stretch>
+        </p:blipFill>
+        <p:spPr>
+          <a:xfrm>
+            <a:off x="2979260" y="4874741"/>
+            <a:ext cx="1703241" cy="958073"/>
+          </a:xfrm>
+          <a:prstGeom prst="rect">
+            <a:avLst/>
+          </a:prstGeom>
+        </p:spPr>
+      </p:pic>
+      <p:pic>
+        <p:nvPicPr>
+          <p:cNvPr id="23" name="Picture 22" descr="A picture containing light&#10;&#10;Description automatically generated">
+            <a:extLst>
+              <a:ext uri="{FF2B5EF4-FFF2-40B4-BE49-F238E27FC236}">
+                <a16:creationId xmlns:a16="http://schemas.microsoft.com/office/drawing/2014/main" id="{69242735-5BD2-4BD6-9066-1F0D1FC3C017}"/>
+              </a:ext>
+            </a:extLst>
+          </p:cNvPr>
+          <p:cNvPicPr>
+            <a:picLocks noChangeAspect="1"/>
+          </p:cNvPicPr>
+          <p:nvPr/>
+        </p:nvPicPr>
+        <p:blipFill>
+          <a:blip r:embed="rId9">
+            <a:extLst>
+              <a:ext uri="{28A0092B-C50C-407E-A947-70E740481C1C}">
+                <a14:useLocalDpi xmlns:a14="http://schemas.microsoft.com/office/drawing/2010/main" val="0"/>
+              </a:ext>
+            </a:extLst>
+          </a:blip>
+          <a:stretch>
+            <a:fillRect/>
+          </a:stretch>
+        </p:blipFill>
+        <p:spPr>
+          <a:xfrm>
+            <a:off x="3525614" y="4998841"/>
+            <a:ext cx="1156888" cy="1156888"/>
+          </a:xfrm>
+          <a:prstGeom prst="rect">
+            <a:avLst/>
+          </a:prstGeom>
+        </p:spPr>
+      </p:pic>
+      <p:pic>
+        <p:nvPicPr>
+          <p:cNvPr id="24" name="Picture 23" descr="A picture containing toy&#10;&#10;Description automatically generated">
+            <a:extLst>
+              <a:ext uri="{FF2B5EF4-FFF2-40B4-BE49-F238E27FC236}">
+                <a16:creationId xmlns:a16="http://schemas.microsoft.com/office/drawing/2014/main" id="{FCAD6655-ECB7-126E-4C33-C685ADC5E892}"/>
+              </a:ext>
+            </a:extLst>
+          </p:cNvPr>
+          <p:cNvPicPr>
+            <a:picLocks noChangeAspect="1"/>
+          </p:cNvPicPr>
+          <p:nvPr/>
+        </p:nvPicPr>
+        <p:blipFill>
+          <a:blip r:embed="rId2">
+            <a:extLst>
+              <a:ext uri="{28A0092B-C50C-407E-A947-70E740481C1C}">
+                <a14:useLocalDpi xmlns:a14="http://schemas.microsoft.com/office/drawing/2010/main" val="0"/>
+              </a:ext>
+            </a:extLst>
+          </a:blip>
+          <a:stretch>
+            <a:fillRect/>
+          </a:stretch>
+        </p:blipFill>
+        <p:spPr>
+          <a:xfrm>
+            <a:off x="4749620" y="5807287"/>
+            <a:ext cx="1703241" cy="958073"/>
+          </a:xfrm>
+          <a:prstGeom prst="rect">
+            <a:avLst/>
+          </a:prstGeom>
+        </p:spPr>
+      </p:pic>
+      <p:pic>
+        <p:nvPicPr>
+          <p:cNvPr id="27" name="Picture 26" descr="A picture containing toy&#10;&#10;Description automatically generated">
+            <a:extLst>
+              <a:ext uri="{FF2B5EF4-FFF2-40B4-BE49-F238E27FC236}">
+                <a16:creationId xmlns:a16="http://schemas.microsoft.com/office/drawing/2014/main" id="{28C2CF6A-4C3B-018A-A1E0-6298D75C579E}"/>
+              </a:ext>
+            </a:extLst>
+          </p:cNvPr>
+          <p:cNvPicPr>
+            <a:picLocks noChangeAspect="1"/>
+          </p:cNvPicPr>
+          <p:nvPr/>
+        </p:nvPicPr>
+        <p:blipFill>
+          <a:blip r:embed="rId2">
+            <a:extLst>
+              <a:ext uri="{28A0092B-C50C-407E-A947-70E740481C1C}">
+                <a14:useLocalDpi xmlns:a14="http://schemas.microsoft.com/office/drawing/2010/main" val="0"/>
+              </a:ext>
+            </a:extLst>
+          </a:blip>
+          <a:stretch>
+            <a:fillRect/>
+          </a:stretch>
+        </p:blipFill>
+        <p:spPr>
+          <a:xfrm>
+            <a:off x="7214662" y="5787900"/>
+            <a:ext cx="1703241" cy="958073"/>
+          </a:xfrm>
+          <a:prstGeom prst="rect">
+            <a:avLst/>
+          </a:prstGeom>
+        </p:spPr>
+      </p:pic>
+      <p:pic>
+        <p:nvPicPr>
+          <p:cNvPr id="31" name="Picture 30" descr="A white letter on a black background&#10;&#10;Description automatically generated with low confidence">
+            <a:extLst>
+              <a:ext uri="{FF2B5EF4-FFF2-40B4-BE49-F238E27FC236}">
+                <a16:creationId xmlns:a16="http://schemas.microsoft.com/office/drawing/2014/main" id="{08B273DA-8E8E-BC16-8DDE-FE2693233FA6}"/>
+              </a:ext>
+            </a:extLst>
+          </p:cNvPr>
+          <p:cNvPicPr>
+            <a:picLocks noChangeAspect="1"/>
+          </p:cNvPicPr>
+          <p:nvPr/>
+        </p:nvPicPr>
+        <p:blipFill>
+          <a:blip r:embed="rId10">
+            <a:extLst>
+              <a:ext uri="{28A0092B-C50C-407E-A947-70E740481C1C}">
+                <a14:useLocalDpi xmlns:a14="http://schemas.microsoft.com/office/drawing/2010/main" val="0"/>
+              </a:ext>
+            </a:extLst>
+          </a:blip>
+          <a:stretch>
+            <a:fillRect/>
+          </a:stretch>
+        </p:blipFill>
+        <p:spPr>
+          <a:xfrm>
+            <a:off x="5295972" y="5881121"/>
+            <a:ext cx="1156889" cy="1156889"/>
+          </a:xfrm>
+          <a:prstGeom prst="rect">
+            <a:avLst/>
+          </a:prstGeom>
+        </p:spPr>
+      </p:pic>
+      <p:pic>
+        <p:nvPicPr>
+          <p:cNvPr id="34" name="Picture 33" descr="A picture containing yellow&#10;&#10;Description automatically generated">
+            <a:extLst>
+              <a:ext uri="{FF2B5EF4-FFF2-40B4-BE49-F238E27FC236}">
+                <a16:creationId xmlns:a16="http://schemas.microsoft.com/office/drawing/2014/main" id="{DA980B16-8677-04A4-7D5D-BBC8E8F10F71}"/>
+              </a:ext>
+            </a:extLst>
+          </p:cNvPr>
+          <p:cNvPicPr>
+            <a:picLocks noChangeAspect="1"/>
+          </p:cNvPicPr>
+          <p:nvPr/>
+        </p:nvPicPr>
+        <p:blipFill>
+          <a:blip r:embed="rId11">
+            <a:extLst>
+              <a:ext uri="{28A0092B-C50C-407E-A947-70E740481C1C}">
+                <a14:useLocalDpi xmlns:a14="http://schemas.microsoft.com/office/drawing/2010/main" val="0"/>
+              </a:ext>
+            </a:extLst>
+          </a:blip>
+          <a:stretch>
+            <a:fillRect/>
+          </a:stretch>
+        </p:blipFill>
+        <p:spPr>
+          <a:xfrm>
+            <a:off x="7963313" y="6017369"/>
+            <a:ext cx="816473" cy="816473"/>
+          </a:xfrm>
+          <a:prstGeom prst="rect">
+            <a:avLst/>
+          </a:prstGeom>
+        </p:spPr>
+      </p:pic>
+      <p:sp>
+        <p:nvSpPr>
+          <p:cNvPr id="35" name="Arrow: Up 34">
+            <a:extLst>
+              <a:ext uri="{FF2B5EF4-FFF2-40B4-BE49-F238E27FC236}">
+                <a16:creationId xmlns:a16="http://schemas.microsoft.com/office/drawing/2014/main" id="{15956298-A9C9-8929-1952-E0F1F00B2E8D}"/>
+              </a:ext>
+            </a:extLst>
+          </p:cNvPr>
+          <p:cNvSpPr/>
+          <p:nvPr/>
+        </p:nvSpPr>
+        <p:spPr>
+          <a:xfrm rot="239678">
+            <a:off x="5178101" y="4777515"/>
+            <a:ext cx="2501660" cy="919740"/>
+          </a:xfrm>
+          <a:prstGeom prst="upArrow">
+            <a:avLst>
+              <a:gd name="adj1" fmla="val 62221"/>
+              <a:gd name="adj2" fmla="val 50000"/>
+            </a:avLst>
+          </a:prstGeom>
+        </p:spPr>
+        <p:style>
+          <a:lnRef idx="0">
+            <a:schemeClr val="accent6"/>
+          </a:lnRef>
+          <a:fillRef idx="3">
+            <a:schemeClr val="accent6"/>
+          </a:fillRef>
+          <a:effectRef idx="3">
+            <a:schemeClr val="accent6"/>
+          </a:effectRef>
+          <a:fontRef idx="minor">
+            <a:schemeClr val="lt1"/>
+          </a:fontRef>
+        </p:style>
+        <p:txBody>
+          <a:bodyPr rtlCol="0" anchor="ctr"/>
+          <a:lstStyle/>
+          <a:p>
+            <a:pPr algn="ctr"/>
+            <a:r>
+              <a:rPr lang="en-US" dirty="0"/>
+              <a:t>Flower, eggs and milk</a:t>
+            </a:r>
+          </a:p>
+        </p:txBody>
+      </p:sp>
+      <p:pic>
+        <p:nvPicPr>
+          <p:cNvPr id="37" name="Picture 36" descr="A picture containing toy&#10;&#10;Description automatically generated">
+            <a:extLst>
+              <a:ext uri="{FF2B5EF4-FFF2-40B4-BE49-F238E27FC236}">
+                <a16:creationId xmlns:a16="http://schemas.microsoft.com/office/drawing/2014/main" id="{BEA9BBB8-FFEA-EFEF-6AFD-0ECA81E8C1DF}"/>
+              </a:ext>
+            </a:extLst>
+          </p:cNvPr>
+          <p:cNvPicPr>
+            <a:picLocks noChangeAspect="1"/>
+          </p:cNvPicPr>
+          <p:nvPr/>
+        </p:nvPicPr>
+        <p:blipFill>
+          <a:blip r:embed="rId2">
+            <a:extLst>
+              <a:ext uri="{28A0092B-C50C-407E-A947-70E740481C1C}">
+                <a14:useLocalDpi xmlns:a14="http://schemas.microsoft.com/office/drawing/2010/main" val="0"/>
+              </a:ext>
+            </a:extLst>
+          </a:blip>
+          <a:stretch>
+            <a:fillRect/>
+          </a:stretch>
+        </p:blipFill>
+        <p:spPr>
+          <a:xfrm>
+            <a:off x="5802791" y="1077208"/>
+            <a:ext cx="1703241" cy="958073"/>
+          </a:xfrm>
+          <a:prstGeom prst="rect">
+            <a:avLst/>
+          </a:prstGeom>
+        </p:spPr>
+      </p:pic>
+      <p:pic>
+        <p:nvPicPr>
+          <p:cNvPr id="41" name="Picture 40" descr="A picture containing light&#10;&#10;Description automatically generated">
+            <a:extLst>
+              <a:ext uri="{FF2B5EF4-FFF2-40B4-BE49-F238E27FC236}">
+                <a16:creationId xmlns:a16="http://schemas.microsoft.com/office/drawing/2014/main" id="{E205D2B8-22EB-D2D1-4CE7-654133A7B626}"/>
+              </a:ext>
+            </a:extLst>
+          </p:cNvPr>
+          <p:cNvPicPr>
+            <a:picLocks noChangeAspect="1"/>
+          </p:cNvPicPr>
+          <p:nvPr/>
+        </p:nvPicPr>
+        <p:blipFill>
+          <a:blip r:embed="rId9">
+            <a:extLst>
+              <a:ext uri="{28A0092B-C50C-407E-A947-70E740481C1C}">
+                <a14:useLocalDpi xmlns:a14="http://schemas.microsoft.com/office/drawing/2010/main" val="0"/>
+              </a:ext>
+            </a:extLst>
+          </a:blip>
+          <a:stretch>
+            <a:fillRect/>
+          </a:stretch>
+        </p:blipFill>
+        <p:spPr>
+          <a:xfrm>
+            <a:off x="6349145" y="1201308"/>
+            <a:ext cx="1156888" cy="1156888"/>
+          </a:xfrm>
+          <a:prstGeom prst="rect">
+            <a:avLst/>
+          </a:prstGeom>
+        </p:spPr>
+      </p:pic>
+      <p:sp>
+        <p:nvSpPr>
+          <p:cNvPr id="47" name="Arrow: Down 46">
+            <a:extLst>
+              <a:ext uri="{FF2B5EF4-FFF2-40B4-BE49-F238E27FC236}">
+                <a16:creationId xmlns:a16="http://schemas.microsoft.com/office/drawing/2014/main" id="{4F1665DC-2339-4FC9-B424-A914CD2158F5}"/>
+              </a:ext>
+            </a:extLst>
+          </p:cNvPr>
+          <p:cNvSpPr/>
+          <p:nvPr/>
+        </p:nvSpPr>
+        <p:spPr>
+          <a:xfrm rot="20708500">
+            <a:off x="5146944" y="2393603"/>
+            <a:ext cx="1898114" cy="973086"/>
+          </a:xfrm>
+          <a:prstGeom prst="downArrow">
+            <a:avLst>
+              <a:gd name="adj1" fmla="val 69997"/>
+              <a:gd name="adj2" fmla="val 50000"/>
+            </a:avLst>
+          </a:prstGeom>
+        </p:spPr>
+        <p:style>
+          <a:lnRef idx="0">
+            <a:schemeClr val="accent6"/>
+          </a:lnRef>
+          <a:fillRef idx="3">
+            <a:schemeClr val="accent6"/>
+          </a:fillRef>
+          <a:effectRef idx="3">
+            <a:schemeClr val="accent6"/>
+          </a:effectRef>
+          <a:fontRef idx="minor">
+            <a:schemeClr val="lt1"/>
+          </a:fontRef>
+        </p:style>
+        <p:txBody>
+          <a:bodyPr rtlCol="0" anchor="ctr"/>
+          <a:lstStyle/>
+          <a:p>
+            <a:pPr algn="ctr"/>
+            <a:r>
+              <a:rPr lang="en-US" dirty="0"/>
+              <a:t>Water and flower</a:t>
+            </a:r>
+          </a:p>
+        </p:txBody>
+      </p:sp>
+      <p:pic>
+        <p:nvPicPr>
+          <p:cNvPr id="48" name="Picture 47" descr="A picture containing toy&#10;&#10;Description automatically generated">
+            <a:extLst>
+              <a:ext uri="{FF2B5EF4-FFF2-40B4-BE49-F238E27FC236}">
+                <a16:creationId xmlns:a16="http://schemas.microsoft.com/office/drawing/2014/main" id="{7653418C-4D7F-DE3C-45FD-6F1B449E1B90}"/>
+              </a:ext>
+            </a:extLst>
+          </p:cNvPr>
+          <p:cNvPicPr>
+            <a:picLocks noChangeAspect="1"/>
+          </p:cNvPicPr>
+          <p:nvPr/>
+        </p:nvPicPr>
+        <p:blipFill>
+          <a:blip r:embed="rId2">
+            <a:extLst>
+              <a:ext uri="{28A0092B-C50C-407E-A947-70E740481C1C}">
+                <a14:useLocalDpi xmlns:a14="http://schemas.microsoft.com/office/drawing/2010/main" val="0"/>
+              </a:ext>
+            </a:extLst>
+          </a:blip>
+          <a:stretch>
+            <a:fillRect/>
+          </a:stretch>
+        </p:blipFill>
+        <p:spPr>
+          <a:xfrm>
+            <a:off x="3896604" y="1131904"/>
+            <a:ext cx="1703241" cy="958073"/>
+          </a:xfrm>
+          <a:prstGeom prst="rect">
+            <a:avLst/>
+          </a:prstGeom>
+        </p:spPr>
+      </p:pic>
+      <p:pic>
+        <p:nvPicPr>
+          <p:cNvPr id="50" name="Picture 49" descr="A picture containing yellow&#10;&#10;Description automatically generated">
+            <a:extLst>
+              <a:ext uri="{FF2B5EF4-FFF2-40B4-BE49-F238E27FC236}">
+                <a16:creationId xmlns:a16="http://schemas.microsoft.com/office/drawing/2014/main" id="{B8BF6EFD-6E57-E5A4-B59E-7B6FD4BB0D16}"/>
+              </a:ext>
+            </a:extLst>
+          </p:cNvPr>
+          <p:cNvPicPr>
+            <a:picLocks noChangeAspect="1"/>
+          </p:cNvPicPr>
+          <p:nvPr/>
+        </p:nvPicPr>
+        <p:blipFill>
+          <a:blip r:embed="rId12">
+            <a:extLst>
+              <a:ext uri="{28A0092B-C50C-407E-A947-70E740481C1C}">
+                <a14:useLocalDpi xmlns:a14="http://schemas.microsoft.com/office/drawing/2010/main" val="0"/>
+              </a:ext>
+            </a:extLst>
+          </a:blip>
+          <a:stretch>
+            <a:fillRect/>
+          </a:stretch>
+        </p:blipFill>
+        <p:spPr>
+          <a:xfrm>
+            <a:off x="4640969" y="1506979"/>
+            <a:ext cx="752346" cy="752346"/>
+          </a:xfrm>
+          <a:prstGeom prst="rect">
+            <a:avLst/>
+          </a:prstGeom>
+        </p:spPr>
+      </p:pic>
+    </p:spTree>
+    <p:extLst>
+      <p:ext uri="{BB962C8B-B14F-4D97-AF65-F5344CB8AC3E}">
+        <p14:creationId xmlns:p14="http://schemas.microsoft.com/office/powerpoint/2010/main" val="3973355849"/>
       </p:ext>
     </p:extLst>
   </p:cSld>
